--- a/01 - CURSO ADS/4° Semestre (Atual)/Disciplinas Presenciais/ED/Desenvolvimento Web com .NET/Slides/Aula 01 - JavaScript Básico.pptx
+++ b/01 - CURSO ADS/4° Semestre (Atual)/Disciplinas Presenciais/ED/Desenvolvimento Web com .NET/Slides/Aula 01 - JavaScript Básico.pptx
@@ -2,44 +2,44 @@
 <file path=ppt/presentation.xml><?xml version="1.0" encoding="utf-8"?>
 <p:presentation xmlns:a="http://schemas.openxmlformats.org/drawingml/2006/main" xmlns:r="http://schemas.openxmlformats.org/officeDocument/2006/relationships" xmlns:p="http://schemas.openxmlformats.org/presentationml/2006/main" saveSubsetFonts="1" autoCompressPictures="0">
   <p:sldMasterIdLst>
-    <p:sldMasterId id="2147483648" r:id="rId1"/>
+    <p:sldMasterId id="2147483648" r:id="rId4"/>
   </p:sldMasterIdLst>
   <p:notesMasterIdLst>
-    <p:notesMasterId r:id="rId34"/>
+    <p:notesMasterId r:id="rId37"/>
   </p:notesMasterIdLst>
   <p:sldIdLst>
-    <p:sldId id="289" r:id="rId2"/>
-    <p:sldId id="285" r:id="rId3"/>
-    <p:sldId id="286" r:id="rId4"/>
-    <p:sldId id="287" r:id="rId5"/>
-    <p:sldId id="288" r:id="rId6"/>
-    <p:sldId id="284" r:id="rId7"/>
-    <p:sldId id="258" r:id="rId8"/>
-    <p:sldId id="259" r:id="rId9"/>
-    <p:sldId id="260" r:id="rId10"/>
-    <p:sldId id="261" r:id="rId11"/>
-    <p:sldId id="262" r:id="rId12"/>
-    <p:sldId id="263" r:id="rId13"/>
-    <p:sldId id="264" r:id="rId14"/>
-    <p:sldId id="265" r:id="rId15"/>
-    <p:sldId id="266" r:id="rId16"/>
-    <p:sldId id="267" r:id="rId17"/>
-    <p:sldId id="268" r:id="rId18"/>
-    <p:sldId id="269" r:id="rId19"/>
-    <p:sldId id="270" r:id="rId20"/>
-    <p:sldId id="271" r:id="rId21"/>
-    <p:sldId id="272" r:id="rId22"/>
-    <p:sldId id="273" r:id="rId23"/>
-    <p:sldId id="274" r:id="rId24"/>
-    <p:sldId id="275" r:id="rId25"/>
-    <p:sldId id="276" r:id="rId26"/>
-    <p:sldId id="277" r:id="rId27"/>
-    <p:sldId id="278" r:id="rId28"/>
-    <p:sldId id="279" r:id="rId29"/>
-    <p:sldId id="280" r:id="rId30"/>
-    <p:sldId id="281" r:id="rId31"/>
-    <p:sldId id="282" r:id="rId32"/>
-    <p:sldId id="283" r:id="rId33"/>
+    <p:sldId id="289" r:id="rId5"/>
+    <p:sldId id="285" r:id="rId6"/>
+    <p:sldId id="286" r:id="rId7"/>
+    <p:sldId id="287" r:id="rId8"/>
+    <p:sldId id="288" r:id="rId9"/>
+    <p:sldId id="284" r:id="rId10"/>
+    <p:sldId id="258" r:id="rId11"/>
+    <p:sldId id="259" r:id="rId12"/>
+    <p:sldId id="260" r:id="rId13"/>
+    <p:sldId id="261" r:id="rId14"/>
+    <p:sldId id="262" r:id="rId15"/>
+    <p:sldId id="263" r:id="rId16"/>
+    <p:sldId id="264" r:id="rId17"/>
+    <p:sldId id="265" r:id="rId18"/>
+    <p:sldId id="266" r:id="rId19"/>
+    <p:sldId id="267" r:id="rId20"/>
+    <p:sldId id="268" r:id="rId21"/>
+    <p:sldId id="269" r:id="rId22"/>
+    <p:sldId id="270" r:id="rId23"/>
+    <p:sldId id="271" r:id="rId24"/>
+    <p:sldId id="272" r:id="rId25"/>
+    <p:sldId id="273" r:id="rId26"/>
+    <p:sldId id="274" r:id="rId27"/>
+    <p:sldId id="275" r:id="rId28"/>
+    <p:sldId id="276" r:id="rId29"/>
+    <p:sldId id="277" r:id="rId30"/>
+    <p:sldId id="278" r:id="rId31"/>
+    <p:sldId id="279" r:id="rId32"/>
+    <p:sldId id="280" r:id="rId33"/>
+    <p:sldId id="281" r:id="rId34"/>
+    <p:sldId id="282" r:id="rId35"/>
+    <p:sldId id="283" r:id="rId36"/>
   </p:sldIdLst>
   <p:sldSz cx="12192000" cy="6858000"/>
   <p:notesSz cx="6858000" cy="12192000"/>
@@ -220,7 +220,7 @@
           <a:p>
             <a:fld id="{5282F153-3F37-0F45-9E97-73ACFA13230C}" type="datetimeFigureOut">
               <a:rPr lang="en-US"/>
-              <a:t>8/6/2026</a:t>
+              <a:t>9/13/2026</a:t>
             </a:fld>
             <a:endParaRPr lang="en-US"/>
           </a:p>
@@ -549,7 +549,7 @@
           <a:bodyPr/>
           <a:lstStyle/>
           <a:p>
-            <a:endParaRPr lang="en-US" dirty="0"/>
+            <a:endParaRPr lang="en-US"/>
           </a:p>
         </p:txBody>
       </p:sp>
@@ -639,7 +639,7 @@
           <a:bodyPr/>
           <a:lstStyle/>
           <a:p>
-            <a:endParaRPr lang="en-US" dirty="0"/>
+            <a:endParaRPr lang="en-US"/>
           </a:p>
         </p:txBody>
       </p:sp>
@@ -723,7 +723,7 @@
           <a:bodyPr/>
           <a:lstStyle/>
           <a:p>
-            <a:endParaRPr lang="en-US" dirty="0"/>
+            <a:endParaRPr lang="en-US"/>
           </a:p>
         </p:txBody>
       </p:sp>
@@ -807,7 +807,7 @@
           <a:bodyPr/>
           <a:lstStyle/>
           <a:p>
-            <a:endParaRPr lang="en-US" dirty="0"/>
+            <a:endParaRPr lang="en-US"/>
           </a:p>
         </p:txBody>
       </p:sp>
@@ -891,7 +891,7 @@
           <a:bodyPr/>
           <a:lstStyle/>
           <a:p>
-            <a:endParaRPr lang="en-US" dirty="0"/>
+            <a:endParaRPr lang="en-US"/>
           </a:p>
         </p:txBody>
       </p:sp>
@@ -975,7 +975,7 @@
           <a:bodyPr/>
           <a:lstStyle/>
           <a:p>
-            <a:endParaRPr lang="en-US" dirty="0"/>
+            <a:endParaRPr lang="en-US"/>
           </a:p>
         </p:txBody>
       </p:sp>
@@ -1059,7 +1059,7 @@
           <a:bodyPr/>
           <a:lstStyle/>
           <a:p>
-            <a:endParaRPr lang="en-US" dirty="0"/>
+            <a:endParaRPr lang="en-US"/>
           </a:p>
         </p:txBody>
       </p:sp>
@@ -1143,7 +1143,7 @@
           <a:bodyPr/>
           <a:lstStyle/>
           <a:p>
-            <a:endParaRPr lang="en-US" dirty="0"/>
+            <a:endParaRPr lang="en-US"/>
           </a:p>
         </p:txBody>
       </p:sp>
@@ -1227,7 +1227,7 @@
           <a:bodyPr/>
           <a:lstStyle/>
           <a:p>
-            <a:endParaRPr lang="en-US" dirty="0"/>
+            <a:endParaRPr lang="en-US"/>
           </a:p>
         </p:txBody>
       </p:sp>
@@ -1311,7 +1311,7 @@
           <a:bodyPr/>
           <a:lstStyle/>
           <a:p>
-            <a:endParaRPr lang="en-US" dirty="0"/>
+            <a:endParaRPr lang="en-US"/>
           </a:p>
         </p:txBody>
       </p:sp>
@@ -1395,7 +1395,7 @@
           <a:bodyPr/>
           <a:lstStyle/>
           <a:p>
-            <a:endParaRPr lang="en-US" dirty="0"/>
+            <a:endParaRPr lang="en-US"/>
           </a:p>
         </p:txBody>
       </p:sp>
@@ -1497,7 +1497,7 @@
           <a:bodyPr/>
           <a:lstStyle/>
           <a:p>
-            <a:endParaRPr lang="en-US" dirty="0"/>
+            <a:endParaRPr lang="en-US"/>
           </a:p>
         </p:txBody>
       </p:sp>
@@ -1587,7 +1587,7 @@
           <a:bodyPr/>
           <a:lstStyle/>
           <a:p>
-            <a:endParaRPr lang="en-US" dirty="0"/>
+            <a:endParaRPr lang="en-US"/>
           </a:p>
         </p:txBody>
       </p:sp>
@@ -1671,7 +1671,7 @@
           <a:bodyPr/>
           <a:lstStyle/>
           <a:p>
-            <a:endParaRPr lang="en-US" dirty="0"/>
+            <a:endParaRPr lang="en-US"/>
           </a:p>
         </p:txBody>
       </p:sp>
@@ -1755,7 +1755,7 @@
           <a:bodyPr/>
           <a:lstStyle/>
           <a:p>
-            <a:endParaRPr lang="en-US" dirty="0"/>
+            <a:endParaRPr lang="en-US"/>
           </a:p>
         </p:txBody>
       </p:sp>
@@ -1839,7 +1839,7 @@
           <a:bodyPr/>
           <a:lstStyle/>
           <a:p>
-            <a:endParaRPr lang="en-US" dirty="0"/>
+            <a:endParaRPr lang="en-US"/>
           </a:p>
         </p:txBody>
       </p:sp>
@@ -1923,7 +1923,7 @@
           <a:bodyPr/>
           <a:lstStyle/>
           <a:p>
-            <a:endParaRPr lang="en-US" dirty="0"/>
+            <a:endParaRPr lang="en-US"/>
           </a:p>
         </p:txBody>
       </p:sp>
@@ -2007,7 +2007,7 @@
           <a:bodyPr/>
           <a:lstStyle/>
           <a:p>
-            <a:endParaRPr lang="en-US" dirty="0"/>
+            <a:endParaRPr lang="en-US"/>
           </a:p>
         </p:txBody>
       </p:sp>
@@ -2091,7 +2091,7 @@
           <a:bodyPr/>
           <a:lstStyle/>
           <a:p>
-            <a:endParaRPr lang="en-US" dirty="0"/>
+            <a:endParaRPr lang="en-US"/>
           </a:p>
         </p:txBody>
       </p:sp>
@@ -2175,7 +2175,7 @@
           <a:bodyPr/>
           <a:lstStyle/>
           <a:p>
-            <a:endParaRPr lang="en-US" dirty="0"/>
+            <a:endParaRPr lang="en-US"/>
           </a:p>
         </p:txBody>
       </p:sp>
@@ -2259,7 +2259,7 @@
           <a:bodyPr/>
           <a:lstStyle/>
           <a:p>
-            <a:endParaRPr lang="en-US" dirty="0"/>
+            <a:endParaRPr lang="en-US"/>
           </a:p>
         </p:txBody>
       </p:sp>
@@ -2343,7 +2343,7 @@
           <a:bodyPr/>
           <a:lstStyle/>
           <a:p>
-            <a:endParaRPr lang="en-US" dirty="0"/>
+            <a:endParaRPr lang="en-US"/>
           </a:p>
         </p:txBody>
       </p:sp>
@@ -2445,7 +2445,7 @@
           <a:bodyPr/>
           <a:lstStyle/>
           <a:p>
-            <a:endParaRPr lang="en-US" dirty="0"/>
+            <a:endParaRPr lang="en-US"/>
           </a:p>
         </p:txBody>
       </p:sp>
@@ -2535,7 +2535,7 @@
           <a:bodyPr/>
           <a:lstStyle/>
           <a:p>
-            <a:endParaRPr lang="en-US" dirty="0"/>
+            <a:endParaRPr lang="en-US"/>
           </a:p>
         </p:txBody>
       </p:sp>
@@ -2619,7 +2619,7 @@
           <a:bodyPr/>
           <a:lstStyle/>
           <a:p>
-            <a:endParaRPr lang="en-US" dirty="0"/>
+            <a:endParaRPr lang="en-US"/>
           </a:p>
         </p:txBody>
       </p:sp>
@@ -2703,7 +2703,7 @@
           <a:bodyPr/>
           <a:lstStyle/>
           <a:p>
-            <a:endParaRPr lang="en-US" dirty="0"/>
+            <a:endParaRPr lang="en-US"/>
           </a:p>
         </p:txBody>
       </p:sp>
@@ -2805,7 +2805,7 @@
           <a:bodyPr/>
           <a:lstStyle/>
           <a:p>
-            <a:endParaRPr lang="en-US" dirty="0"/>
+            <a:endParaRPr lang="en-US"/>
           </a:p>
         </p:txBody>
       </p:sp>
@@ -2913,7 +2913,7 @@
           <a:bodyPr/>
           <a:lstStyle/>
           <a:p>
-            <a:endParaRPr lang="en-US" dirty="0"/>
+            <a:endParaRPr lang="en-US"/>
           </a:p>
         </p:txBody>
       </p:sp>
@@ -3021,7 +3021,7 @@
           <a:bodyPr/>
           <a:lstStyle/>
           <a:p>
-            <a:endParaRPr lang="en-US" dirty="0"/>
+            <a:endParaRPr lang="en-US"/>
           </a:p>
         </p:txBody>
       </p:sp>
@@ -3111,7 +3111,7 @@
           <a:bodyPr/>
           <a:lstStyle/>
           <a:p>
-            <a:endParaRPr lang="en-US" dirty="0"/>
+            <a:endParaRPr lang="en-US"/>
           </a:p>
         </p:txBody>
       </p:sp>
@@ -3195,7 +3195,7 @@
           <a:bodyPr/>
           <a:lstStyle/>
           <a:p>
-            <a:endParaRPr lang="en-US" dirty="0"/>
+            <a:endParaRPr lang="en-US"/>
           </a:p>
         </p:txBody>
       </p:sp>
@@ -3279,7 +3279,7 @@
           <a:bodyPr/>
           <a:lstStyle/>
           <a:p>
-            <a:endParaRPr lang="en-US" dirty="0"/>
+            <a:endParaRPr lang="en-US"/>
           </a:p>
         </p:txBody>
       </p:sp>
@@ -3414,7 +3414,7 @@
             <a:pPr marL="0" indent="0" algn="l">
               <a:buNone/>
             </a:pPr>
-            <a:endParaRPr lang="en-US" sz="4600" dirty="0"/>
+            <a:endParaRPr lang="en-US" sz="4600"/>
           </a:p>
         </p:txBody>
       </p:sp>
@@ -3491,7 +3491,7 @@
             <a:pPr marL="0" indent="0" algn="l">
               <a:buNone/>
             </a:pPr>
-            <a:endParaRPr lang="en-US" sz="3400" dirty="0"/>
+            <a:endParaRPr lang="en-US" sz="3400"/>
           </a:p>
         </p:txBody>
       </p:sp>
@@ -3891,7 +3891,7 @@
               <a:buNone/>
             </a:pPr>
             <a:r>
-              <a:rPr lang="en-US" sz="4600" b="1" dirty="0">
+              <a:rPr lang="en-US" sz="4600" b="1">
                 <a:solidFill>
                   <a:srgbClr val="17202A"/>
                 </a:solidFill>
@@ -3902,7 +3902,7 @@
               <a:t>O plano para </a:t>
             </a:r>
             <a:r>
-              <a:rPr lang="en-US" sz="4600" b="1" dirty="0" err="1">
+              <a:rPr lang="en-US" sz="4600" b="1" err="1">
                 <a:solidFill>
                   <a:srgbClr val="17202A"/>
                 </a:solidFill>
@@ -3913,7 +3913,7 @@
               <a:t>este</a:t>
             </a:r>
             <a:r>
-              <a:rPr lang="en-US" sz="4600" b="1" dirty="0">
+              <a:rPr lang="en-US" sz="4600" b="1">
                 <a:solidFill>
                   <a:srgbClr val="17202A"/>
                 </a:solidFill>
@@ -3924,7 +3924,7 @@
               <a:t> </a:t>
             </a:r>
             <a:r>
-              <a:rPr lang="en-US" sz="4600" b="1" dirty="0" err="1">
+              <a:rPr lang="en-US" sz="4600" b="1" err="1">
                 <a:solidFill>
                   <a:srgbClr val="17202A"/>
                 </a:solidFill>
@@ -3934,7 +3934,7 @@
               </a:rPr>
               <a:t>semestre</a:t>
             </a:r>
-            <a:endParaRPr lang="en-US" sz="4600" dirty="0"/>
+            <a:endParaRPr lang="en-US" sz="4600"/>
           </a:p>
         </p:txBody>
       </p:sp>
@@ -3969,7 +3969,7 @@
               <a:buNone/>
             </a:pPr>
             <a:r>
-              <a:rPr lang="en-US" sz="2400" dirty="0">
+              <a:rPr lang="en-US" sz="2400">
                 <a:solidFill>
                   <a:srgbClr val="5A6472"/>
                 </a:solidFill>
@@ -3979,7 +3979,7 @@
               </a:rPr>
               <a:t>Desenvolvimento Web/Mobile • Análise e Desenvolvimento de Sistemas</a:t>
             </a:r>
-            <a:endParaRPr lang="en-US" sz="2400" dirty="0"/>
+            <a:endParaRPr lang="en-US" sz="2400"/>
           </a:p>
         </p:txBody>
       </p:sp>
@@ -4014,7 +4014,7 @@
               <a:buNone/>
             </a:pPr>
             <a:r>
-              <a:rPr lang="en-US" sz="2400" dirty="0"/>
+              <a:rPr lang="en-US" sz="2400"/>
               <a:t>Prof. Flávio Waltz</a:t>
             </a:r>
           </a:p>
@@ -4079,7 +4079,7 @@
               <a:buNone/>
             </a:pPr>
             <a:r>
-              <a:rPr lang="en-US" sz="3400" b="1" dirty="0">
+              <a:rPr lang="en-US" sz="3400" b="1">
                 <a:solidFill>
                   <a:srgbClr val="17202A"/>
                 </a:solidFill>
@@ -4089,7 +4089,7 @@
               </a:rPr>
               <a:t>Estrutura de um programa em JS</a:t>
             </a:r>
-            <a:endParaRPr lang="en-US" sz="3400" dirty="0"/>
+            <a:endParaRPr lang="en-US" sz="3400"/>
           </a:p>
         </p:txBody>
       </p:sp>
@@ -4160,7 +4160,7 @@
               <a:buChar char="•"/>
             </a:pPr>
             <a:r>
-              <a:rPr lang="en-US" sz="2600" dirty="0">
+              <a:rPr lang="en-US" sz="2600">
                 <a:solidFill>
                   <a:srgbClr val="17202A"/>
                 </a:solidFill>
@@ -4170,7 +4170,7 @@
               </a:rPr>
               <a:t>Blocos são delimitados por chaves { }, não por indentação</a:t>
             </a:r>
-            <a:endParaRPr lang="en-US" sz="2600" dirty="0"/>
+            <a:endParaRPr lang="en-US" sz="2600"/>
           </a:p>
           <a:p>
             <a:pPr marL="342900" indent="-342900">
@@ -4181,7 +4181,7 @@
               <a:buChar char="•"/>
             </a:pPr>
             <a:r>
-              <a:rPr lang="en-US" sz="2600" dirty="0">
+              <a:rPr lang="en-US" sz="2600">
                 <a:solidFill>
                   <a:srgbClr val="17202A"/>
                 </a:solidFill>
@@ -4191,7 +4191,7 @@
               </a:rPr>
               <a:t>Instruções terminam com ponto e vírgula ; (opcional, mas recomendado)</a:t>
             </a:r>
-            <a:endParaRPr lang="en-US" sz="2600" dirty="0"/>
+            <a:endParaRPr lang="en-US" sz="2600"/>
           </a:p>
           <a:p>
             <a:pPr marL="342900" indent="-342900">
@@ -4202,7 +4202,7 @@
               <a:buChar char="•"/>
             </a:pPr>
             <a:r>
-              <a:rPr lang="en-US" sz="2600" dirty="0">
+              <a:rPr lang="en-US" sz="2600">
                 <a:solidFill>
                   <a:srgbClr val="17202A"/>
                 </a:solidFill>
@@ -4212,7 +4212,7 @@
               </a:rPr>
               <a:t>A indentação existe só para leitura humana — não muda o significado</a:t>
             </a:r>
-            <a:endParaRPr lang="en-US" sz="2600" dirty="0"/>
+            <a:endParaRPr lang="en-US" sz="2600"/>
           </a:p>
         </p:txBody>
       </p:sp>
@@ -4270,7 +4270,7 @@
               <a:buNone/>
             </a:pPr>
             <a:r>
-              <a:rPr lang="en-US" sz="3400" b="1" dirty="0">
+              <a:rPr lang="en-US" sz="3400" b="1">
                 <a:solidFill>
                   <a:srgbClr val="17202A"/>
                 </a:solidFill>
@@ -4280,7 +4280,7 @@
               </a:rPr>
               <a:t>Blocos: chaves x indentação</a:t>
             </a:r>
-            <a:endParaRPr lang="en-US" sz="3400" dirty="0"/>
+            <a:endParaRPr lang="en-US" sz="3400"/>
           </a:p>
         </p:txBody>
       </p:sp>
@@ -4347,7 +4347,7 @@
               <a:buNone/>
             </a:pPr>
             <a:r>
-              <a:rPr lang="en-US" sz="2200" b="1" dirty="0">
+              <a:rPr lang="en-US" sz="2200" b="1">
                 <a:solidFill>
                   <a:srgbClr val="C2410C"/>
                 </a:solidFill>
@@ -4357,7 +4357,7 @@
               </a:rPr>
               <a:t>JavaScript</a:t>
             </a:r>
-            <a:endParaRPr lang="en-US" sz="2200" dirty="0"/>
+            <a:endParaRPr lang="en-US" sz="2200"/>
           </a:p>
         </p:txBody>
       </p:sp>
@@ -4386,7 +4386,7 @@
               <a:buNone/>
             </a:pPr>
             <a:r>
-              <a:rPr lang="en-US" sz="2200" b="1" dirty="0">
+              <a:rPr lang="en-US" sz="2200" b="1">
                 <a:solidFill>
                   <a:srgbClr val="5A6472"/>
                 </a:solidFill>
@@ -4396,7 +4396,7 @@
               </a:rPr>
               <a:t>Python</a:t>
             </a:r>
-            <a:endParaRPr lang="en-US" sz="2200" dirty="0"/>
+            <a:endParaRPr lang="en-US" sz="2200"/>
           </a:p>
         </p:txBody>
       </p:sp>
@@ -4466,7 +4466,7 @@
               <a:buNone/>
             </a:pPr>
             <a:r>
-              <a:rPr lang="en-US" sz="1800" b="1" dirty="0">
+              <a:rPr lang="en-US" sz="1800" b="1">
                 <a:solidFill>
                   <a:srgbClr val="C2410C"/>
                 </a:solidFill>
@@ -4477,7 +4477,7 @@
               <a:t>if</a:t>
             </a:r>
             <a:r>
-              <a:rPr lang="en-US" sz="1800" dirty="0">
+              <a:rPr lang="en-US" sz="1800">
                 <a:solidFill>
                   <a:srgbClr val="17202A"/>
                 </a:solidFill>
@@ -4487,7 +4487,7 @@
               </a:rPr>
               <a:t> (idade &gt;= 18) {</a:t>
             </a:r>
-            <a:endParaRPr lang="en-US" sz="1800" dirty="0"/>
+            <a:endParaRPr lang="en-US" sz="1800"/>
           </a:p>
           <a:p>
             <a:pPr marL="0" indent="0" algn="l">
@@ -4497,7 +4497,7 @@
               <a:buNone/>
             </a:pPr>
             <a:r>
-              <a:rPr lang="en-US" sz="1800" dirty="0">
+              <a:rPr lang="en-US" sz="1800">
                 <a:solidFill>
                   <a:srgbClr val="17202A"/>
                 </a:solidFill>
@@ -4508,7 +4508,7 @@
               <a:t>  </a:t>
             </a:r>
             <a:r>
-              <a:rPr lang="en-US" sz="1800" b="1" dirty="0">
+              <a:rPr lang="en-US" sz="1800" b="1">
                 <a:solidFill>
                   <a:srgbClr val="C2410C"/>
                 </a:solidFill>
@@ -4519,7 +4519,7 @@
               <a:t>console</a:t>
             </a:r>
             <a:r>
-              <a:rPr lang="en-US" sz="1800" dirty="0">
+              <a:rPr lang="en-US" sz="1800">
                 <a:solidFill>
                   <a:srgbClr val="17202A"/>
                 </a:solidFill>
@@ -4530,7 +4530,7 @@
               <a:t>.</a:t>
             </a:r>
             <a:r>
-              <a:rPr lang="en-US" sz="1800" b="1" dirty="0">
+              <a:rPr lang="en-US" sz="1800" b="1">
                 <a:solidFill>
                   <a:srgbClr val="C2410C"/>
                 </a:solidFill>
@@ -4541,7 +4541,7 @@
               <a:t>log</a:t>
             </a:r>
             <a:r>
-              <a:rPr lang="en-US" sz="1800" dirty="0">
+              <a:rPr lang="en-US" sz="1800">
                 <a:solidFill>
                   <a:srgbClr val="17202A"/>
                 </a:solidFill>
@@ -4551,7 +4551,7 @@
               </a:rPr>
               <a:t>("Maior de idade");</a:t>
             </a:r>
-            <a:endParaRPr lang="en-US" sz="1800" dirty="0"/>
+            <a:endParaRPr lang="en-US" sz="1800"/>
           </a:p>
           <a:p>
             <a:pPr marL="0" indent="0" algn="l">
@@ -4561,7 +4561,7 @@
               <a:buNone/>
             </a:pPr>
             <a:r>
-              <a:rPr lang="en-US" sz="1800" dirty="0">
+              <a:rPr lang="en-US" sz="1800">
                 <a:solidFill>
                   <a:srgbClr val="17202A"/>
                 </a:solidFill>
@@ -4572,7 +4572,7 @@
               <a:t>  </a:t>
             </a:r>
             <a:r>
-              <a:rPr lang="en-US" sz="1800" b="1" dirty="0">
+              <a:rPr lang="en-US" sz="1800" b="1">
                 <a:solidFill>
                   <a:srgbClr val="C2410C"/>
                 </a:solidFill>
@@ -4583,7 +4583,7 @@
               <a:t>console</a:t>
             </a:r>
             <a:r>
-              <a:rPr lang="en-US" sz="1800" dirty="0">
+              <a:rPr lang="en-US" sz="1800">
                 <a:solidFill>
                   <a:srgbClr val="17202A"/>
                 </a:solidFill>
@@ -4594,7 +4594,7 @@
               <a:t>.</a:t>
             </a:r>
             <a:r>
-              <a:rPr lang="en-US" sz="1800" b="1" dirty="0">
+              <a:rPr lang="en-US" sz="1800" b="1">
                 <a:solidFill>
                   <a:srgbClr val="C2410C"/>
                 </a:solidFill>
@@ -4605,7 +4605,7 @@
               <a:t>log</a:t>
             </a:r>
             <a:r>
-              <a:rPr lang="en-US" sz="1800" dirty="0">
+              <a:rPr lang="en-US" sz="1800">
                 <a:solidFill>
                   <a:srgbClr val="17202A"/>
                 </a:solidFill>
@@ -4615,7 +4615,7 @@
               </a:rPr>
               <a:t>("Pode entrar");</a:t>
             </a:r>
-            <a:endParaRPr lang="en-US" sz="1800" dirty="0"/>
+            <a:endParaRPr lang="en-US" sz="1800"/>
           </a:p>
           <a:p>
             <a:pPr marL="0" indent="0" algn="l">
@@ -4625,7 +4625,7 @@
               <a:buNone/>
             </a:pPr>
             <a:r>
-              <a:rPr lang="en-US" sz="1800" dirty="0">
+              <a:rPr lang="en-US" sz="1800">
                 <a:solidFill>
                   <a:srgbClr val="17202A"/>
                 </a:solidFill>
@@ -4635,7 +4635,7 @@
               </a:rPr>
               <a:t>}</a:t>
             </a:r>
-            <a:endParaRPr lang="en-US" sz="1800" dirty="0"/>
+            <a:endParaRPr lang="en-US" sz="1800"/>
           </a:p>
         </p:txBody>
       </p:sp>
@@ -4705,7 +4705,7 @@
               <a:buNone/>
             </a:pPr>
             <a:r>
-              <a:rPr lang="en-US" sz="1800" b="1" dirty="0">
+              <a:rPr lang="en-US" sz="1800" b="1">
                 <a:solidFill>
                   <a:srgbClr val="C2410C"/>
                 </a:solidFill>
@@ -4716,7 +4716,7 @@
               <a:t>if</a:t>
             </a:r>
             <a:r>
-              <a:rPr lang="en-US" sz="1800" dirty="0">
+              <a:rPr lang="en-US" sz="1800">
                 <a:solidFill>
                   <a:srgbClr val="17202A"/>
                 </a:solidFill>
@@ -4726,7 +4726,7 @@
               </a:rPr>
               <a:t> idade &gt;= 18:</a:t>
             </a:r>
-            <a:endParaRPr lang="en-US" sz="1800" dirty="0"/>
+            <a:endParaRPr lang="en-US" sz="1800"/>
           </a:p>
           <a:p>
             <a:pPr marL="0" indent="0" algn="l">
@@ -4736,7 +4736,7 @@
               <a:buNone/>
             </a:pPr>
             <a:r>
-              <a:rPr lang="en-US" sz="1800" dirty="0">
+              <a:rPr lang="en-US" sz="1800">
                 <a:solidFill>
                   <a:srgbClr val="17202A"/>
                 </a:solidFill>
@@ -4747,7 +4747,7 @@
               <a:t>    </a:t>
             </a:r>
             <a:r>
-              <a:rPr lang="en-US" sz="1800" b="1" dirty="0">
+              <a:rPr lang="en-US" sz="1800" b="1">
                 <a:solidFill>
                   <a:srgbClr val="C2410C"/>
                 </a:solidFill>
@@ -4758,7 +4758,7 @@
               <a:t>print</a:t>
             </a:r>
             <a:r>
-              <a:rPr lang="en-US" sz="1800" dirty="0">
+              <a:rPr lang="en-US" sz="1800">
                 <a:solidFill>
                   <a:srgbClr val="17202A"/>
                 </a:solidFill>
@@ -4768,7 +4768,7 @@
               </a:rPr>
               <a:t>("Maior de idade")</a:t>
             </a:r>
-            <a:endParaRPr lang="en-US" sz="1800" dirty="0"/>
+            <a:endParaRPr lang="en-US" sz="1800"/>
           </a:p>
           <a:p>
             <a:pPr marL="0" indent="0" algn="l">
@@ -4778,7 +4778,7 @@
               <a:buNone/>
             </a:pPr>
             <a:r>
-              <a:rPr lang="en-US" sz="1800" dirty="0">
+              <a:rPr lang="en-US" sz="1800">
                 <a:solidFill>
                   <a:srgbClr val="17202A"/>
                 </a:solidFill>
@@ -4789,7 +4789,7 @@
               <a:t>    </a:t>
             </a:r>
             <a:r>
-              <a:rPr lang="en-US" sz="1800" b="1" dirty="0">
+              <a:rPr lang="en-US" sz="1800" b="1">
                 <a:solidFill>
                   <a:srgbClr val="C2410C"/>
                 </a:solidFill>
@@ -4800,7 +4800,7 @@
               <a:t>print</a:t>
             </a:r>
             <a:r>
-              <a:rPr lang="en-US" sz="1800" dirty="0">
+              <a:rPr lang="en-US" sz="1800">
                 <a:solidFill>
                   <a:srgbClr val="17202A"/>
                 </a:solidFill>
@@ -4810,7 +4810,7 @@
               </a:rPr>
               <a:t>("Pode entrar")</a:t>
             </a:r>
-            <a:endParaRPr lang="en-US" sz="1800" dirty="0"/>
+            <a:endParaRPr lang="en-US" sz="1800"/>
           </a:p>
         </p:txBody>
       </p:sp>
@@ -4839,7 +4839,7 @@
               <a:buNone/>
             </a:pPr>
             <a:r>
-              <a:rPr lang="en-US" sz="1900" i="1" dirty="0">
+              <a:rPr lang="en-US" sz="1900" i="1">
                 <a:solidFill>
                   <a:srgbClr val="5A6472"/>
                 </a:solidFill>
@@ -4849,7 +4849,7 @@
               </a:rPr>
               <a:t>Em JS, quem define o bloco são as chaves. Em Python, é a indentação.</a:t>
             </a:r>
-            <a:endParaRPr lang="en-US" sz="1900" dirty="0"/>
+            <a:endParaRPr lang="en-US" sz="1900"/>
           </a:p>
         </p:txBody>
       </p:sp>
@@ -4907,7 +4907,7 @@
               <a:buNone/>
             </a:pPr>
             <a:r>
-              <a:rPr lang="en-US" sz="3400" b="1" dirty="0">
+              <a:rPr lang="en-US" sz="3400" b="1">
                 <a:solidFill>
                   <a:srgbClr val="17202A"/>
                 </a:solidFill>
@@ -4917,7 +4917,7 @@
               </a:rPr>
               <a:t>Comentários</a:t>
             </a:r>
-            <a:endParaRPr lang="en-US" sz="3400" dirty="0"/>
+            <a:endParaRPr lang="en-US" sz="3400"/>
           </a:p>
         </p:txBody>
       </p:sp>
@@ -4984,7 +4984,7 @@
               <a:buNone/>
             </a:pPr>
             <a:r>
-              <a:rPr lang="en-US" sz="2200" b="1" dirty="0">
+              <a:rPr lang="en-US" sz="2200" b="1">
                 <a:solidFill>
                   <a:srgbClr val="C2410C"/>
                 </a:solidFill>
@@ -4994,7 +4994,7 @@
               </a:rPr>
               <a:t>JavaScript</a:t>
             </a:r>
-            <a:endParaRPr lang="en-US" sz="2200" dirty="0"/>
+            <a:endParaRPr lang="en-US" sz="2200"/>
           </a:p>
         </p:txBody>
       </p:sp>
@@ -5023,7 +5023,7 @@
               <a:buNone/>
             </a:pPr>
             <a:r>
-              <a:rPr lang="en-US" sz="2200" b="1" dirty="0">
+              <a:rPr lang="en-US" sz="2200" b="1">
                 <a:solidFill>
                   <a:srgbClr val="5A6472"/>
                 </a:solidFill>
@@ -5033,7 +5033,7 @@
               </a:rPr>
               <a:t>Python</a:t>
             </a:r>
-            <a:endParaRPr lang="en-US" sz="2200" dirty="0"/>
+            <a:endParaRPr lang="en-US" sz="2200"/>
           </a:p>
         </p:txBody>
       </p:sp>
@@ -5103,7 +5103,7 @@
               <a:buNone/>
             </a:pPr>
             <a:r>
-              <a:rPr lang="en-US" sz="1800" i="1" dirty="0">
+              <a:rPr lang="en-US" sz="1800" i="1">
                 <a:solidFill>
                   <a:srgbClr val="5A6472"/>
                 </a:solidFill>
@@ -5113,7 +5113,7 @@
               </a:rPr>
               <a:t>// comentário de uma linha</a:t>
             </a:r>
-            <a:endParaRPr lang="en-US" sz="1800" dirty="0"/>
+            <a:endParaRPr lang="en-US" sz="1800"/>
           </a:p>
           <a:p>
             <a:pPr marL="0" indent="0" algn="l">
@@ -5122,7 +5122,7 @@
               </a:lnSpc>
               <a:buNone/>
             </a:pPr>
-            <a:endParaRPr lang="en-US" sz="1800" dirty="0"/>
+            <a:endParaRPr lang="en-US" sz="1800"/>
           </a:p>
           <a:p>
             <a:pPr marL="0" indent="0" algn="l">
@@ -5132,7 +5132,7 @@
               <a:buNone/>
             </a:pPr>
             <a:r>
-              <a:rPr lang="en-US" sz="1800" dirty="0">
+              <a:rPr lang="en-US" sz="1800">
                 <a:solidFill>
                   <a:srgbClr val="17202A"/>
                 </a:solidFill>
@@ -5142,7 +5142,7 @@
               </a:rPr>
               <a:t>/* comentário</a:t>
             </a:r>
-            <a:endParaRPr lang="en-US" sz="1800" dirty="0"/>
+            <a:endParaRPr lang="en-US" sz="1800"/>
           </a:p>
           <a:p>
             <a:pPr marL="0" indent="0" algn="l">
@@ -5152,7 +5152,7 @@
               <a:buNone/>
             </a:pPr>
             <a:r>
-              <a:rPr lang="en-US" sz="1800" dirty="0">
+              <a:rPr lang="en-US" sz="1800">
                 <a:solidFill>
                   <a:srgbClr val="17202A"/>
                 </a:solidFill>
@@ -5162,7 +5162,7 @@
               </a:rPr>
               <a:t>   de várias linhas */</a:t>
             </a:r>
-            <a:endParaRPr lang="en-US" sz="1800" dirty="0"/>
+            <a:endParaRPr lang="en-US" sz="1800"/>
           </a:p>
         </p:txBody>
       </p:sp>
@@ -5232,7 +5232,7 @@
               <a:buNone/>
             </a:pPr>
             <a:r>
-              <a:rPr lang="en-US" sz="1800" i="1" dirty="0">
+              <a:rPr lang="en-US" sz="1800" i="1">
                 <a:solidFill>
                   <a:srgbClr val="5A6472"/>
                 </a:solidFill>
@@ -5242,7 +5242,7 @@
               </a:rPr>
               <a:t># comentário de uma linha</a:t>
             </a:r>
-            <a:endParaRPr lang="en-US" sz="1800" dirty="0"/>
+            <a:endParaRPr lang="en-US" sz="1800"/>
           </a:p>
           <a:p>
             <a:pPr marL="0" indent="0" algn="l">
@@ -5251,7 +5251,7 @@
               </a:lnSpc>
               <a:buNone/>
             </a:pPr>
-            <a:endParaRPr lang="en-US" sz="1800" dirty="0"/>
+            <a:endParaRPr lang="en-US" sz="1800"/>
           </a:p>
           <a:p>
             <a:pPr marL="0" indent="0" algn="l">
@@ -5261,7 +5261,7 @@
               <a:buNone/>
             </a:pPr>
             <a:r>
-              <a:rPr lang="en-US" sz="1800" dirty="0">
+              <a:rPr lang="en-US" sz="1800">
                 <a:solidFill>
                   <a:srgbClr val="17202A"/>
                 </a:solidFill>
@@ -5271,7 +5271,7 @@
               </a:rPr>
               <a:t>"""comentário</a:t>
             </a:r>
-            <a:endParaRPr lang="en-US" sz="1800" dirty="0"/>
+            <a:endParaRPr lang="en-US" sz="1800"/>
           </a:p>
           <a:p>
             <a:pPr marL="0" indent="0" algn="l">
@@ -5281,7 +5281,7 @@
               <a:buNone/>
             </a:pPr>
             <a:r>
-              <a:rPr lang="en-US" sz="1800" dirty="0">
+              <a:rPr lang="en-US" sz="1800">
                 <a:solidFill>
                   <a:srgbClr val="17202A"/>
                 </a:solidFill>
@@ -5291,7 +5291,7 @@
               </a:rPr>
               <a:t>   de várias linhas"""</a:t>
             </a:r>
-            <a:endParaRPr lang="en-US" sz="1800" dirty="0"/>
+            <a:endParaRPr lang="en-US" sz="1800"/>
           </a:p>
         </p:txBody>
       </p:sp>
@@ -5320,7 +5320,7 @@
               <a:buNone/>
             </a:pPr>
             <a:r>
-              <a:rPr lang="en-US" sz="1900" i="1" dirty="0">
+              <a:rPr lang="en-US" sz="1900" i="1">
                 <a:solidFill>
                   <a:srgbClr val="5A6472"/>
                 </a:solidFill>
@@ -5330,7 +5330,7 @@
               </a:rPr>
               <a:t>O comentário de uma linha é a diferença mais visível: // no JS, # no Python.</a:t>
             </a:r>
-            <a:endParaRPr lang="en-US" sz="1900" dirty="0"/>
+            <a:endParaRPr lang="en-US" sz="1900"/>
           </a:p>
         </p:txBody>
       </p:sp>
@@ -5388,7 +5388,7 @@
               <a:buNone/>
             </a:pPr>
             <a:r>
-              <a:rPr lang="en-US" sz="3400" b="1" dirty="0">
+              <a:rPr lang="en-US" sz="3400" b="1">
                 <a:solidFill>
                   <a:srgbClr val="17202A"/>
                 </a:solidFill>
@@ -5398,7 +5398,7 @@
               </a:rPr>
               <a:t>Variáveis</a:t>
             </a:r>
-            <a:endParaRPr lang="en-US" sz="3400" dirty="0"/>
+            <a:endParaRPr lang="en-US" sz="3400"/>
           </a:p>
         </p:txBody>
       </p:sp>
@@ -5465,7 +5465,7 @@
               <a:buNone/>
             </a:pPr>
             <a:r>
-              <a:rPr lang="en-US" sz="3200" dirty="0">
+              <a:rPr lang="en-US" sz="3200">
                 <a:solidFill>
                   <a:srgbClr val="17202A"/>
                 </a:solidFill>
@@ -5475,7 +5475,7 @@
               </a:rPr>
               <a:t>Uma variável é um nome que aponta para um valor guardado na memória. Em JavaScript, esse nome precisa ser declarado com uma palavra-chave: let, const ou var.</a:t>
             </a:r>
-            <a:endParaRPr lang="en-US" sz="3200" dirty="0"/>
+            <a:endParaRPr lang="en-US" sz="3200"/>
           </a:p>
         </p:txBody>
       </p:sp>
@@ -5533,7 +5533,7 @@
               <a:buNone/>
             </a:pPr>
             <a:r>
-              <a:rPr lang="en-US" sz="3400" b="1" dirty="0">
+              <a:rPr lang="en-US" sz="3400" b="1">
                 <a:solidFill>
                   <a:srgbClr val="17202A"/>
                 </a:solidFill>
@@ -5543,7 +5543,7 @@
               </a:rPr>
               <a:t>let: valor que pode mudar</a:t>
             </a:r>
-            <a:endParaRPr lang="en-US" sz="3400" dirty="0"/>
+            <a:endParaRPr lang="en-US" sz="3400"/>
           </a:p>
         </p:txBody>
       </p:sp>
@@ -5610,7 +5610,7 @@
               <a:buNone/>
             </a:pPr>
             <a:r>
-              <a:rPr lang="en-US" sz="2400" dirty="0">
+              <a:rPr lang="en-US" sz="2400">
                 <a:solidFill>
                   <a:srgbClr val="17202A"/>
                 </a:solidFill>
@@ -5620,7 +5620,7 @@
               </a:rPr>
               <a:t>Use let quando o valor for ser reatribuído.</a:t>
             </a:r>
-            <a:endParaRPr lang="en-US" sz="2400" dirty="0"/>
+            <a:endParaRPr lang="en-US" sz="2400"/>
           </a:p>
         </p:txBody>
       </p:sp>
@@ -5690,7 +5690,7 @@
               <a:buNone/>
             </a:pPr>
             <a:r>
-              <a:rPr lang="en-US" sz="2200" b="1" dirty="0">
+              <a:rPr lang="en-US" sz="2200" b="1">
                 <a:solidFill>
                   <a:srgbClr val="C2410C"/>
                 </a:solidFill>
@@ -5701,7 +5701,7 @@
               <a:t>let</a:t>
             </a:r>
             <a:r>
-              <a:rPr lang="en-US" sz="2200" dirty="0">
+              <a:rPr lang="en-US" sz="2200">
                 <a:solidFill>
                   <a:srgbClr val="17202A"/>
                 </a:solidFill>
@@ -5711,7 +5711,7 @@
               </a:rPr>
               <a:t> contador = 0;</a:t>
             </a:r>
-            <a:endParaRPr lang="en-US" sz="2200" dirty="0"/>
+            <a:endParaRPr lang="en-US" sz="2200"/>
           </a:p>
           <a:p>
             <a:pPr marL="0" indent="0" algn="l">
@@ -5721,7 +5721,7 @@
               <a:buNone/>
             </a:pPr>
             <a:r>
-              <a:rPr lang="en-US" sz="2200" dirty="0">
+              <a:rPr lang="en-US" sz="2200">
                 <a:solidFill>
                   <a:srgbClr val="17202A"/>
                 </a:solidFill>
@@ -5731,7 +5731,7 @@
               </a:rPr>
               <a:t>contador = contador + 1;</a:t>
             </a:r>
-            <a:endParaRPr lang="en-US" sz="2200" dirty="0"/>
+            <a:endParaRPr lang="en-US" sz="2200"/>
           </a:p>
           <a:p>
             <a:pPr marL="0" indent="0" algn="l">
@@ -5740,7 +5740,7 @@
               </a:lnSpc>
               <a:buNone/>
             </a:pPr>
-            <a:endParaRPr lang="en-US" sz="2200" dirty="0"/>
+            <a:endParaRPr lang="en-US" sz="2200"/>
           </a:p>
           <a:p>
             <a:pPr marL="0" indent="0" algn="l">
@@ -5750,7 +5750,7 @@
               <a:buNone/>
             </a:pPr>
             <a:r>
-              <a:rPr lang="en-US" sz="2200" b="1" dirty="0">
+              <a:rPr lang="en-US" sz="2200" b="1">
                 <a:solidFill>
                   <a:srgbClr val="C2410C"/>
                 </a:solidFill>
@@ -5761,7 +5761,7 @@
               <a:t>let</a:t>
             </a:r>
             <a:r>
-              <a:rPr lang="en-US" sz="2200" dirty="0">
+              <a:rPr lang="en-US" sz="2200">
                 <a:solidFill>
                   <a:srgbClr val="17202A"/>
                 </a:solidFill>
@@ -5771,7 +5771,7 @@
               </a:rPr>
               <a:t> nome = "Ana";</a:t>
             </a:r>
-            <a:endParaRPr lang="en-US" sz="2200" dirty="0"/>
+            <a:endParaRPr lang="en-US" sz="2200"/>
           </a:p>
           <a:p>
             <a:pPr marL="0" indent="0" algn="l">
@@ -5781,7 +5781,7 @@
               <a:buNone/>
             </a:pPr>
             <a:r>
-              <a:rPr lang="en-US" sz="2200" dirty="0">
+              <a:rPr lang="en-US" sz="2200">
                 <a:solidFill>
                   <a:srgbClr val="17202A"/>
                 </a:solidFill>
@@ -5791,7 +5791,7 @@
               </a:rPr>
               <a:t>nome = "Bruno";</a:t>
             </a:r>
-            <a:endParaRPr lang="en-US" sz="2200" dirty="0"/>
+            <a:endParaRPr lang="en-US" sz="2200"/>
           </a:p>
         </p:txBody>
       </p:sp>
@@ -5849,7 +5849,7 @@
               <a:buNone/>
             </a:pPr>
             <a:r>
-              <a:rPr lang="en-US" sz="3400" b="1" dirty="0">
+              <a:rPr lang="en-US" sz="3400" b="1">
                 <a:solidFill>
                   <a:srgbClr val="17202A"/>
                 </a:solidFill>
@@ -5859,7 +5859,7 @@
               </a:rPr>
               <a:t>const: valor que não muda</a:t>
             </a:r>
-            <a:endParaRPr lang="en-US" sz="3400" dirty="0"/>
+            <a:endParaRPr lang="en-US" sz="3400"/>
           </a:p>
         </p:txBody>
       </p:sp>
@@ -5926,7 +5926,7 @@
               <a:buNone/>
             </a:pPr>
             <a:r>
-              <a:rPr lang="en-US" sz="2400" dirty="0">
+              <a:rPr lang="en-US" sz="2400">
                 <a:solidFill>
                   <a:srgbClr val="17202A"/>
                 </a:solidFill>
@@ -5936,7 +5936,7 @@
               </a:rPr>
               <a:t>Use const quando a variável não for receber outro valor.</a:t>
             </a:r>
-            <a:endParaRPr lang="en-US" sz="2400" dirty="0"/>
+            <a:endParaRPr lang="en-US" sz="2400"/>
           </a:p>
         </p:txBody>
       </p:sp>
@@ -6006,7 +6006,7 @@
               <a:buNone/>
             </a:pPr>
             <a:r>
-              <a:rPr lang="en-US" sz="2200" b="1" dirty="0">
+              <a:rPr lang="en-US" sz="2200" b="1">
                 <a:solidFill>
                   <a:srgbClr val="C2410C"/>
                 </a:solidFill>
@@ -6017,7 +6017,7 @@
               <a:t>const</a:t>
             </a:r>
             <a:r>
-              <a:rPr lang="en-US" sz="2200" dirty="0">
+              <a:rPr lang="en-US" sz="2200">
                 <a:solidFill>
                   <a:srgbClr val="17202A"/>
                 </a:solidFill>
@@ -6027,7 +6027,7 @@
               </a:rPr>
               <a:t> PI = 3.14159;</a:t>
             </a:r>
-            <a:endParaRPr lang="en-US" sz="2200" dirty="0"/>
+            <a:endParaRPr lang="en-US" sz="2200"/>
           </a:p>
           <a:p>
             <a:pPr marL="0" indent="0" algn="l">
@@ -6037,7 +6037,7 @@
               <a:buNone/>
             </a:pPr>
             <a:r>
-              <a:rPr lang="en-US" sz="2200" b="1" dirty="0">
+              <a:rPr lang="en-US" sz="2200" b="1">
                 <a:solidFill>
                   <a:srgbClr val="C2410C"/>
                 </a:solidFill>
@@ -6048,7 +6048,7 @@
               <a:t>const</a:t>
             </a:r>
             <a:r>
-              <a:rPr lang="en-US" sz="2200" dirty="0">
+              <a:rPr lang="en-US" sz="2200">
                 <a:solidFill>
                   <a:srgbClr val="17202A"/>
                 </a:solidFill>
@@ -6058,7 +6058,7 @@
               </a:rPr>
               <a:t> curso = "ADS";</a:t>
             </a:r>
-            <a:endParaRPr lang="en-US" sz="2200" dirty="0"/>
+            <a:endParaRPr lang="en-US" sz="2200"/>
           </a:p>
           <a:p>
             <a:pPr marL="0" indent="0" algn="l">
@@ -6067,7 +6067,7 @@
               </a:lnSpc>
               <a:buNone/>
             </a:pPr>
-            <a:endParaRPr lang="en-US" sz="2200" dirty="0"/>
+            <a:endParaRPr lang="en-US" sz="2200"/>
           </a:p>
           <a:p>
             <a:pPr marL="0" indent="0" algn="l">
@@ -6077,7 +6077,7 @@
               <a:buNone/>
             </a:pPr>
             <a:r>
-              <a:rPr lang="en-US" sz="2200" dirty="0">
+              <a:rPr lang="en-US" sz="2200">
                 <a:solidFill>
                   <a:srgbClr val="17202A"/>
                 </a:solidFill>
@@ -6087,7 +6087,7 @@
               </a:rPr>
               <a:t>PI = 3; // TypeError: Assignment to constant variable</a:t>
             </a:r>
-            <a:endParaRPr lang="en-US" sz="2200" dirty="0"/>
+            <a:endParaRPr lang="en-US" sz="2200"/>
           </a:p>
         </p:txBody>
       </p:sp>
@@ -6116,7 +6116,7 @@
               <a:buNone/>
             </a:pPr>
             <a:r>
-              <a:rPr lang="en-US" sz="1900" i="1" dirty="0">
+              <a:rPr lang="en-US" sz="1900" i="1">
                 <a:solidFill>
                   <a:srgbClr val="5A6472"/>
                 </a:solidFill>
@@ -6126,7 +6126,7 @@
               </a:rPr>
               <a:t>Regra prática: comece sempre com const e só troque para let quando precisar reatribuir.</a:t>
             </a:r>
-            <a:endParaRPr lang="en-US" sz="1900" dirty="0"/>
+            <a:endParaRPr lang="en-US" sz="1900"/>
           </a:p>
         </p:txBody>
       </p:sp>
@@ -6184,7 +6184,7 @@
               <a:buNone/>
             </a:pPr>
             <a:r>
-              <a:rPr lang="en-US" sz="3400" b="1" dirty="0">
+              <a:rPr lang="en-US" sz="3400" b="1">
                 <a:solidFill>
                   <a:srgbClr val="17202A"/>
                 </a:solidFill>
@@ -6194,7 +6194,7 @@
               </a:rPr>
               <a:t>Declaração de variáveis: JS x Python</a:t>
             </a:r>
-            <a:endParaRPr lang="en-US" sz="3400" dirty="0"/>
+            <a:endParaRPr lang="en-US" sz="3400"/>
           </a:p>
         </p:txBody>
       </p:sp>
@@ -6261,7 +6261,7 @@
               <a:buNone/>
             </a:pPr>
             <a:r>
-              <a:rPr lang="en-US" sz="2200" b="1" dirty="0">
+              <a:rPr lang="en-US" sz="2200" b="1">
                 <a:solidFill>
                   <a:srgbClr val="C2410C"/>
                 </a:solidFill>
@@ -6271,7 +6271,7 @@
               </a:rPr>
               <a:t>JavaScript</a:t>
             </a:r>
-            <a:endParaRPr lang="en-US" sz="2200" dirty="0"/>
+            <a:endParaRPr lang="en-US" sz="2200"/>
           </a:p>
         </p:txBody>
       </p:sp>
@@ -6300,7 +6300,7 @@
               <a:buNone/>
             </a:pPr>
             <a:r>
-              <a:rPr lang="en-US" sz="2200" b="1" dirty="0">
+              <a:rPr lang="en-US" sz="2200" b="1">
                 <a:solidFill>
                   <a:srgbClr val="5A6472"/>
                 </a:solidFill>
@@ -6310,7 +6310,7 @@
               </a:rPr>
               <a:t>Python</a:t>
             </a:r>
-            <a:endParaRPr lang="en-US" sz="2200" dirty="0"/>
+            <a:endParaRPr lang="en-US" sz="2200"/>
           </a:p>
         </p:txBody>
       </p:sp>
@@ -6380,7 +6380,7 @@
               <a:buNone/>
             </a:pPr>
             <a:r>
-              <a:rPr lang="en-US" sz="1800" b="1" dirty="0">
+              <a:rPr lang="en-US" sz="1800" b="1">
                 <a:solidFill>
                   <a:srgbClr val="C2410C"/>
                 </a:solidFill>
@@ -6391,7 +6391,7 @@
               <a:t>let</a:t>
             </a:r>
             <a:r>
-              <a:rPr lang="en-US" sz="1800" dirty="0">
+              <a:rPr lang="en-US" sz="1800">
                 <a:solidFill>
                   <a:srgbClr val="17202A"/>
                 </a:solidFill>
@@ -6401,7 +6401,7 @@
               </a:rPr>
               <a:t> idade = 20;</a:t>
             </a:r>
-            <a:endParaRPr lang="en-US" sz="1800" dirty="0"/>
+            <a:endParaRPr lang="en-US" sz="1800"/>
           </a:p>
           <a:p>
             <a:pPr marL="0" indent="0" algn="l">
@@ -6411,7 +6411,7 @@
               <a:buNone/>
             </a:pPr>
             <a:r>
-              <a:rPr lang="en-US" sz="1800" b="1" dirty="0">
+              <a:rPr lang="en-US" sz="1800" b="1">
                 <a:solidFill>
                   <a:srgbClr val="C2410C"/>
                 </a:solidFill>
@@ -6422,7 +6422,7 @@
               <a:t>const</a:t>
             </a:r>
             <a:r>
-              <a:rPr lang="en-US" sz="1800" dirty="0">
+              <a:rPr lang="en-US" sz="1800">
                 <a:solidFill>
                   <a:srgbClr val="17202A"/>
                 </a:solidFill>
@@ -6432,7 +6432,7 @@
               </a:rPr>
               <a:t> nome = "Ana";</a:t>
             </a:r>
-            <a:endParaRPr lang="en-US" sz="1800" dirty="0"/>
+            <a:endParaRPr lang="en-US" sz="1800"/>
           </a:p>
         </p:txBody>
       </p:sp>
@@ -6502,7 +6502,7 @@
               <a:buNone/>
             </a:pPr>
             <a:r>
-              <a:rPr lang="en-US" sz="1800" dirty="0">
+              <a:rPr lang="en-US" sz="1800">
                 <a:solidFill>
                   <a:srgbClr val="17202A"/>
                 </a:solidFill>
@@ -6512,7 +6512,7 @@
               </a:rPr>
               <a:t>idade = 20</a:t>
             </a:r>
-            <a:endParaRPr lang="en-US" sz="1800" dirty="0"/>
+            <a:endParaRPr lang="en-US" sz="1800"/>
           </a:p>
           <a:p>
             <a:pPr marL="0" indent="0" algn="l">
@@ -6522,7 +6522,7 @@
               <a:buNone/>
             </a:pPr>
             <a:r>
-              <a:rPr lang="en-US" sz="1800" dirty="0">
+              <a:rPr lang="en-US" sz="1800">
                 <a:solidFill>
                   <a:srgbClr val="17202A"/>
                 </a:solidFill>
@@ -6532,7 +6532,7 @@
               </a:rPr>
               <a:t>NOME = "Ana"</a:t>
             </a:r>
-            <a:endParaRPr lang="en-US" sz="1800" dirty="0"/>
+            <a:endParaRPr lang="en-US" sz="1800"/>
           </a:p>
         </p:txBody>
       </p:sp>
@@ -6561,7 +6561,7 @@
               <a:buNone/>
             </a:pPr>
             <a:r>
-              <a:rPr lang="en-US" sz="1900" i="1" dirty="0">
+              <a:rPr lang="en-US" sz="1900" i="1">
                 <a:solidFill>
                   <a:srgbClr val="5A6472"/>
                 </a:solidFill>
@@ -6571,7 +6571,7 @@
               </a:rPr>
               <a:t>Python não exige palavra-chave; JS exige. E o const do JS é uma garantia real, não apenas uma convenção de nome.</a:t>
             </a:r>
-            <a:endParaRPr lang="en-US" sz="1900" dirty="0"/>
+            <a:endParaRPr lang="en-US" sz="1900"/>
           </a:p>
         </p:txBody>
       </p:sp>
@@ -6629,7 +6629,7 @@
               <a:buNone/>
             </a:pPr>
             <a:r>
-              <a:rPr lang="en-US" sz="3400" b="1" dirty="0">
+              <a:rPr lang="en-US" sz="3400" b="1">
                 <a:solidFill>
                   <a:srgbClr val="17202A"/>
                 </a:solidFill>
@@ -6639,7 +6639,7 @@
               </a:rPr>
               <a:t>var: o jeito antigo</a:t>
             </a:r>
-            <a:endParaRPr lang="en-US" sz="3400" dirty="0"/>
+            <a:endParaRPr lang="en-US" sz="3400"/>
           </a:p>
         </p:txBody>
       </p:sp>
@@ -6710,7 +6710,7 @@
               <a:buChar char="•"/>
             </a:pPr>
             <a:r>
-              <a:rPr lang="en-US" sz="2600" dirty="0">
+              <a:rPr lang="en-US" sz="2600">
                 <a:solidFill>
                   <a:srgbClr val="17202A"/>
                 </a:solidFill>
@@ -6720,7 +6720,7 @@
               </a:rPr>
               <a:t>var existe desde as primeiras versões da linguagem</a:t>
             </a:r>
-            <a:endParaRPr lang="en-US" sz="2600" dirty="0"/>
+            <a:endParaRPr lang="en-US" sz="2600"/>
           </a:p>
           <a:p>
             <a:pPr marL="342900" indent="-342900">
@@ -6731,7 +6731,7 @@
               <a:buChar char="•"/>
             </a:pPr>
             <a:r>
-              <a:rPr lang="en-US" sz="2600" dirty="0">
+              <a:rPr lang="en-US" sz="2600">
                 <a:solidFill>
                   <a:srgbClr val="17202A"/>
                 </a:solidFill>
@@ -6741,7 +6741,7 @@
               </a:rPr>
               <a:t>Tem escopo de função, não de bloco</a:t>
             </a:r>
-            <a:endParaRPr lang="en-US" sz="2600" dirty="0"/>
+            <a:endParaRPr lang="en-US" sz="2600"/>
           </a:p>
           <a:p>
             <a:pPr marL="342900" indent="-342900">
@@ -6752,7 +6752,7 @@
               <a:buChar char="•"/>
             </a:pPr>
             <a:r>
-              <a:rPr lang="en-US" sz="2600" dirty="0">
+              <a:rPr lang="en-US" sz="2600">
                 <a:solidFill>
                   <a:srgbClr val="17202A"/>
                 </a:solidFill>
@@ -6762,7 +6762,7 @@
               </a:rPr>
               <a:t>Permite redeclarar a mesma variável sem erro</a:t>
             </a:r>
-            <a:endParaRPr lang="en-US" sz="2600" dirty="0"/>
+            <a:endParaRPr lang="en-US" sz="2600"/>
           </a:p>
         </p:txBody>
       </p:sp>
@@ -6791,7 +6791,7 @@
               <a:buNone/>
             </a:pPr>
             <a:r>
-              <a:rPr lang="en-US" sz="2000" i="1" dirty="0">
+              <a:rPr lang="en-US" sz="2000" i="1">
                 <a:solidFill>
                   <a:srgbClr val="5A6472"/>
                 </a:solidFill>
@@ -6801,7 +6801,7 @@
               </a:rPr>
               <a:t>Em código novo, evite var. Use let e const.</a:t>
             </a:r>
-            <a:endParaRPr lang="en-US" sz="2000" dirty="0"/>
+            <a:endParaRPr lang="en-US" sz="2000"/>
           </a:p>
         </p:txBody>
       </p:sp>
@@ -6859,7 +6859,7 @@
               <a:buNone/>
             </a:pPr>
             <a:r>
-              <a:rPr lang="en-US" sz="3400" b="1" dirty="0">
+              <a:rPr lang="en-US" sz="3400" b="1">
                 <a:solidFill>
                   <a:srgbClr val="17202A"/>
                 </a:solidFill>
@@ -6869,7 +6869,7 @@
               </a:rPr>
               <a:t>Escopo: let x var</a:t>
             </a:r>
-            <a:endParaRPr lang="en-US" sz="3400" dirty="0"/>
+            <a:endParaRPr lang="en-US" sz="3400"/>
           </a:p>
         </p:txBody>
       </p:sp>
@@ -6936,7 +6936,7 @@
               <a:buNone/>
             </a:pPr>
             <a:r>
-              <a:rPr lang="en-US" sz="2400" dirty="0">
+              <a:rPr lang="en-US" sz="2400">
                 <a:solidFill>
                   <a:srgbClr val="17202A"/>
                 </a:solidFill>
@@ -6946,7 +6946,7 @@
               </a:rPr>
               <a:t>O escopo define onde a variável é visível.</a:t>
             </a:r>
-            <a:endParaRPr lang="en-US" sz="2400" dirty="0"/>
+            <a:endParaRPr lang="en-US" sz="2400"/>
           </a:p>
         </p:txBody>
       </p:sp>
@@ -7016,7 +7016,7 @@
               <a:buNone/>
             </a:pPr>
             <a:r>
-              <a:rPr lang="en-US" sz="2000" b="1" dirty="0">
+              <a:rPr lang="en-US" sz="2000" b="1">
                 <a:solidFill>
                   <a:srgbClr val="C2410C"/>
                 </a:solidFill>
@@ -7027,7 +7027,7 @@
               <a:t>if</a:t>
             </a:r>
             <a:r>
-              <a:rPr lang="en-US" sz="2000" dirty="0">
+              <a:rPr lang="en-US" sz="2000">
                 <a:solidFill>
                   <a:srgbClr val="17202A"/>
                 </a:solidFill>
@@ -7038,7 +7038,7 @@
               <a:t> (</a:t>
             </a:r>
             <a:r>
-              <a:rPr lang="en-US" sz="2000" b="1" dirty="0">
+              <a:rPr lang="en-US" sz="2000" b="1">
                 <a:solidFill>
                   <a:srgbClr val="C2410C"/>
                 </a:solidFill>
@@ -7049,7 +7049,7 @@
               <a:t>true</a:t>
             </a:r>
             <a:r>
-              <a:rPr lang="en-US" sz="2000" dirty="0">
+              <a:rPr lang="en-US" sz="2000">
                 <a:solidFill>
                   <a:srgbClr val="17202A"/>
                 </a:solidFill>
@@ -7059,7 +7059,7 @@
               </a:rPr>
               <a:t>) {</a:t>
             </a:r>
-            <a:endParaRPr lang="en-US" sz="2000" dirty="0"/>
+            <a:endParaRPr lang="en-US" sz="2000"/>
           </a:p>
           <a:p>
             <a:pPr marL="0" indent="0" algn="l">
@@ -7069,7 +7069,7 @@
               <a:buNone/>
             </a:pPr>
             <a:r>
-              <a:rPr lang="en-US" sz="2000" dirty="0">
+              <a:rPr lang="en-US" sz="2000">
                 <a:solidFill>
                   <a:srgbClr val="17202A"/>
                 </a:solidFill>
@@ -7080,7 +7080,7 @@
               <a:t>  </a:t>
             </a:r>
             <a:r>
-              <a:rPr lang="en-US" sz="2000" b="1" dirty="0">
+              <a:rPr lang="en-US" sz="2000" b="1">
                 <a:solidFill>
                   <a:srgbClr val="C2410C"/>
                 </a:solidFill>
@@ -7091,7 +7091,7 @@
               <a:t>var</a:t>
             </a:r>
             <a:r>
-              <a:rPr lang="en-US" sz="2000" dirty="0">
+              <a:rPr lang="en-US" sz="2000">
                 <a:solidFill>
                   <a:srgbClr val="17202A"/>
                 </a:solidFill>
@@ -7101,7 +7101,7 @@
               </a:rPr>
               <a:t> a = 1;   // escopo de FUNÇÃO: vaza do bloco</a:t>
             </a:r>
-            <a:endParaRPr lang="en-US" sz="2000" dirty="0"/>
+            <a:endParaRPr lang="en-US" sz="2000"/>
           </a:p>
           <a:p>
             <a:pPr marL="0" indent="0" algn="l">
@@ -7111,7 +7111,7 @@
               <a:buNone/>
             </a:pPr>
             <a:r>
-              <a:rPr lang="en-US" sz="2000" dirty="0">
+              <a:rPr lang="en-US" sz="2000">
                 <a:solidFill>
                   <a:srgbClr val="17202A"/>
                 </a:solidFill>
@@ -7122,7 +7122,7 @@
               <a:t>  </a:t>
             </a:r>
             <a:r>
-              <a:rPr lang="en-US" sz="2000" b="1" dirty="0">
+              <a:rPr lang="en-US" sz="2000" b="1">
                 <a:solidFill>
                   <a:srgbClr val="C2410C"/>
                 </a:solidFill>
@@ -7133,7 +7133,7 @@
               <a:t>let</a:t>
             </a:r>
             <a:r>
-              <a:rPr lang="en-US" sz="2000" dirty="0">
+              <a:rPr lang="en-US" sz="2000">
                 <a:solidFill>
                   <a:srgbClr val="17202A"/>
                 </a:solidFill>
@@ -7143,7 +7143,7 @@
               </a:rPr>
               <a:t> b = 2;   // escopo de BLOCO: só vive aqui dentro</a:t>
             </a:r>
-            <a:endParaRPr lang="en-US" sz="2000" dirty="0"/>
+            <a:endParaRPr lang="en-US" sz="2000"/>
           </a:p>
           <a:p>
             <a:pPr marL="0" indent="0" algn="l">
@@ -7153,7 +7153,7 @@
               <a:buNone/>
             </a:pPr>
             <a:r>
-              <a:rPr lang="en-US" sz="2000" dirty="0">
+              <a:rPr lang="en-US" sz="2000">
                 <a:solidFill>
                   <a:srgbClr val="17202A"/>
                 </a:solidFill>
@@ -7163,7 +7163,7 @@
               </a:rPr>
               <a:t>}</a:t>
             </a:r>
-            <a:endParaRPr lang="en-US" sz="2000" dirty="0"/>
+            <a:endParaRPr lang="en-US" sz="2000"/>
           </a:p>
           <a:p>
             <a:pPr marL="0" indent="0" algn="l">
@@ -7172,7 +7172,7 @@
               </a:lnSpc>
               <a:buNone/>
             </a:pPr>
-            <a:endParaRPr lang="en-US" sz="2000" dirty="0"/>
+            <a:endParaRPr lang="en-US" sz="2000"/>
           </a:p>
           <a:p>
             <a:pPr marL="0" indent="0" algn="l">
@@ -7182,7 +7182,7 @@
               <a:buNone/>
             </a:pPr>
             <a:r>
-              <a:rPr lang="en-US" sz="2000" b="1" dirty="0">
+              <a:rPr lang="en-US" sz="2000" b="1">
                 <a:solidFill>
                   <a:srgbClr val="C2410C"/>
                 </a:solidFill>
@@ -7193,7 +7193,7 @@
               <a:t>console</a:t>
             </a:r>
             <a:r>
-              <a:rPr lang="en-US" sz="2000" dirty="0">
+              <a:rPr lang="en-US" sz="2000">
                 <a:solidFill>
                   <a:srgbClr val="17202A"/>
                 </a:solidFill>
@@ -7204,7 +7204,7 @@
               <a:t>.</a:t>
             </a:r>
             <a:r>
-              <a:rPr lang="en-US" sz="2000" b="1" dirty="0">
+              <a:rPr lang="en-US" sz="2000" b="1">
                 <a:solidFill>
                   <a:srgbClr val="C2410C"/>
                 </a:solidFill>
@@ -7215,7 +7215,7 @@
               <a:t>log</a:t>
             </a:r>
             <a:r>
-              <a:rPr lang="en-US" sz="2000" dirty="0">
+              <a:rPr lang="en-US" sz="2000">
                 <a:solidFill>
                   <a:srgbClr val="17202A"/>
                 </a:solidFill>
@@ -7225,7 +7225,7 @@
               </a:rPr>
               <a:t>(a); // 1</a:t>
             </a:r>
-            <a:endParaRPr lang="en-US" sz="2000" dirty="0"/>
+            <a:endParaRPr lang="en-US" sz="2000"/>
           </a:p>
           <a:p>
             <a:pPr marL="0" indent="0" algn="l">
@@ -7235,7 +7235,7 @@
               <a:buNone/>
             </a:pPr>
             <a:r>
-              <a:rPr lang="en-US" sz="2000" b="1" dirty="0">
+              <a:rPr lang="en-US" sz="2000" b="1">
                 <a:solidFill>
                   <a:srgbClr val="C2410C"/>
                 </a:solidFill>
@@ -7246,7 +7246,7 @@
               <a:t>console</a:t>
             </a:r>
             <a:r>
-              <a:rPr lang="en-US" sz="2000" dirty="0">
+              <a:rPr lang="en-US" sz="2000">
                 <a:solidFill>
                   <a:srgbClr val="17202A"/>
                 </a:solidFill>
@@ -7257,7 +7257,7 @@
               <a:t>.</a:t>
             </a:r>
             <a:r>
-              <a:rPr lang="en-US" sz="2000" b="1" dirty="0">
+              <a:rPr lang="en-US" sz="2000" b="1">
                 <a:solidFill>
                   <a:srgbClr val="C2410C"/>
                 </a:solidFill>
@@ -7268,7 +7268,7 @@
               <a:t>log</a:t>
             </a:r>
             <a:r>
-              <a:rPr lang="en-US" sz="2000" dirty="0">
+              <a:rPr lang="en-US" sz="2000">
                 <a:solidFill>
                   <a:srgbClr val="17202A"/>
                 </a:solidFill>
@@ -7278,7 +7278,7 @@
               </a:rPr>
               <a:t>(b); // ReferenceError: b is not defined</a:t>
             </a:r>
-            <a:endParaRPr lang="en-US" sz="2000" dirty="0"/>
+            <a:endParaRPr lang="en-US" sz="2000"/>
           </a:p>
         </p:txBody>
       </p:sp>
@@ -7307,7 +7307,7 @@
               <a:buNone/>
             </a:pPr>
             <a:r>
-              <a:rPr lang="en-US" sz="1900" i="1" dirty="0">
+              <a:rPr lang="en-US" sz="1900" i="1">
                 <a:solidFill>
                   <a:srgbClr val="5A6472"/>
                 </a:solidFill>
@@ -7317,7 +7317,7 @@
               </a:rPr>
               <a:t>let respeita as chaves. var ignora o bloco e sobe até a função que o contém.</a:t>
             </a:r>
-            <a:endParaRPr lang="en-US" sz="1900" dirty="0"/>
+            <a:endParaRPr lang="en-US" sz="1900"/>
           </a:p>
         </p:txBody>
       </p:sp>
@@ -7375,7 +7375,7 @@
               <a:buNone/>
             </a:pPr>
             <a:r>
-              <a:rPr lang="en-US" sz="3400" b="1" dirty="0">
+              <a:rPr lang="en-US" sz="3400" b="1">
                 <a:solidFill>
                   <a:srgbClr val="17202A"/>
                 </a:solidFill>
@@ -7385,7 +7385,7 @@
               </a:rPr>
               <a:t>Por que preferir const</a:t>
             </a:r>
-            <a:endParaRPr lang="en-US" sz="3400" dirty="0"/>
+            <a:endParaRPr lang="en-US" sz="3400"/>
           </a:p>
         </p:txBody>
       </p:sp>
@@ -7456,7 +7456,7 @@
               <a:buChar char="•"/>
             </a:pPr>
             <a:r>
-              <a:rPr lang="en-US" sz="2600" dirty="0">
+              <a:rPr lang="en-US" sz="2600">
                 <a:solidFill>
                   <a:srgbClr val="17202A"/>
                 </a:solidFill>
@@ -7466,7 +7466,7 @@
               </a:rPr>
               <a:t>Deixa explícito que aquele valor não deve mudar</a:t>
             </a:r>
-            <a:endParaRPr lang="en-US" sz="2600" dirty="0"/>
+            <a:endParaRPr lang="en-US" sz="2600"/>
           </a:p>
           <a:p>
             <a:pPr marL="342900" indent="-342900">
@@ -7477,7 +7477,7 @@
               <a:buChar char="•"/>
             </a:pPr>
             <a:r>
-              <a:rPr lang="en-US" sz="2600" dirty="0">
+              <a:rPr lang="en-US" sz="2600">
                 <a:solidFill>
                   <a:srgbClr val="17202A"/>
                 </a:solidFill>
@@ -7487,7 +7487,7 @@
               </a:rPr>
               <a:t>O erro aparece já na escrita do código, não em produção</a:t>
             </a:r>
-            <a:endParaRPr lang="en-US" sz="2600" dirty="0"/>
+            <a:endParaRPr lang="en-US" sz="2600"/>
           </a:p>
           <a:p>
             <a:pPr marL="342900" indent="-342900">
@@ -7498,7 +7498,7 @@
               <a:buChar char="•"/>
             </a:pPr>
             <a:r>
-              <a:rPr lang="en-US" sz="2600" dirty="0">
+              <a:rPr lang="en-US" sz="2600">
                 <a:solidFill>
                   <a:srgbClr val="17202A"/>
                 </a:solidFill>
@@ -7508,7 +7508,7 @@
               </a:rPr>
               <a:t>Facilita a leitura: quem lê sabe que o valor é estável</a:t>
             </a:r>
-            <a:endParaRPr lang="en-US" sz="2600" dirty="0"/>
+            <a:endParaRPr lang="en-US" sz="2600"/>
           </a:p>
           <a:p>
             <a:pPr marL="342900" indent="-342900">
@@ -7519,7 +7519,7 @@
               <a:buChar char="•"/>
             </a:pPr>
             <a:r>
-              <a:rPr lang="en-US" sz="2600" dirty="0">
+              <a:rPr lang="en-US" sz="2600">
                 <a:solidFill>
                   <a:srgbClr val="17202A"/>
                 </a:solidFill>
@@ -7529,7 +7529,7 @@
               </a:rPr>
               <a:t>Evita reatribuições acidentais em funções longas</a:t>
             </a:r>
-            <a:endParaRPr lang="en-US" sz="2600" dirty="0"/>
+            <a:endParaRPr lang="en-US" sz="2600"/>
           </a:p>
         </p:txBody>
       </p:sp>
@@ -7599,7 +7599,7 @@
               <a:buNone/>
             </a:pPr>
             <a:r>
-              <a:rPr lang="en-US" sz="3400" b="1" dirty="0">
+              <a:rPr lang="en-US" sz="3400" b="1">
                 <a:solidFill>
                   <a:srgbClr val="17202A"/>
                 </a:solidFill>
@@ -7609,7 +7609,7 @@
               </a:rPr>
               <a:t>O plano</a:t>
             </a:r>
-            <a:endParaRPr lang="en-US" sz="3400" dirty="0"/>
+            <a:endParaRPr lang="en-US" sz="3400"/>
           </a:p>
         </p:txBody>
       </p:sp>
@@ -7743,7 +7743,7 @@
               <a:buNone/>
             </a:pPr>
             <a:r>
-              <a:rPr lang="en-US" sz="3400" b="1" dirty="0">
+              <a:rPr lang="en-US" sz="3400" b="1">
                 <a:solidFill>
                   <a:srgbClr val="17202A"/>
                 </a:solidFill>
@@ -7753,7 +7753,7 @@
               </a:rPr>
               <a:t>Declarar não é inicializar</a:t>
             </a:r>
-            <a:endParaRPr lang="en-US" sz="3400" dirty="0"/>
+            <a:endParaRPr lang="en-US" sz="3400"/>
           </a:p>
         </p:txBody>
       </p:sp>
@@ -7820,7 +7820,7 @@
               <a:buNone/>
             </a:pPr>
             <a:r>
-              <a:rPr lang="en-US" sz="3200" dirty="0">
+              <a:rPr lang="en-US" sz="3200">
                 <a:solidFill>
                   <a:srgbClr val="17202A"/>
                 </a:solidFill>
@@ -7830,7 +7830,7 @@
               </a:rPr>
               <a:t>Declarar é criar o nome na memória. Inicializar é colocar um valor nesse espaço. Em JavaScript, essas duas coisas podem acontecer em momentos diferentes.</a:t>
             </a:r>
-            <a:endParaRPr lang="en-US" sz="3200" dirty="0"/>
+            <a:endParaRPr lang="en-US" sz="3200"/>
           </a:p>
         </p:txBody>
       </p:sp>
@@ -7888,7 +7888,7 @@
               <a:buNone/>
             </a:pPr>
             <a:r>
-              <a:rPr lang="en-US" sz="3400" b="1" dirty="0">
+              <a:rPr lang="en-US" sz="3400" b="1">
                 <a:solidFill>
                   <a:srgbClr val="17202A"/>
                 </a:solidFill>
@@ -7898,7 +7898,7 @@
               </a:rPr>
               <a:t>Declarar sem inicializar</a:t>
             </a:r>
-            <a:endParaRPr lang="en-US" sz="3400" dirty="0"/>
+            <a:endParaRPr lang="en-US" sz="3400"/>
           </a:p>
         </p:txBody>
       </p:sp>
@@ -8006,7 +8006,7 @@
               <a:buNone/>
             </a:pPr>
             <a:r>
-              <a:rPr lang="en-US" sz="2200" b="1" dirty="0">
+              <a:rPr lang="en-US" sz="2200" b="1">
                 <a:solidFill>
                   <a:srgbClr val="C2410C"/>
                 </a:solidFill>
@@ -8017,7 +8017,7 @@
               <a:t>let</a:t>
             </a:r>
             <a:r>
-              <a:rPr lang="en-US" sz="2200" dirty="0">
+              <a:rPr lang="en-US" sz="2200">
                 <a:solidFill>
                   <a:srgbClr val="17202A"/>
                 </a:solidFill>
@@ -8027,7 +8027,7 @@
               </a:rPr>
               <a:t> resultado;            // declarada, sem valor</a:t>
             </a:r>
-            <a:endParaRPr lang="en-US" sz="2200" dirty="0"/>
+            <a:endParaRPr lang="en-US" sz="2200"/>
           </a:p>
           <a:p>
             <a:pPr marL="0" indent="0" algn="l">
@@ -8037,7 +8037,7 @@
               <a:buNone/>
             </a:pPr>
             <a:r>
-              <a:rPr lang="en-US" sz="2200" b="1" dirty="0">
+              <a:rPr lang="en-US" sz="2200" b="1">
                 <a:solidFill>
                   <a:srgbClr val="C2410C"/>
                 </a:solidFill>
@@ -8048,7 +8048,7 @@
               <a:t>console</a:t>
             </a:r>
             <a:r>
-              <a:rPr lang="en-US" sz="2200" dirty="0">
+              <a:rPr lang="en-US" sz="2200">
                 <a:solidFill>
                   <a:srgbClr val="17202A"/>
                 </a:solidFill>
@@ -8059,7 +8059,7 @@
               <a:t>.</a:t>
             </a:r>
             <a:r>
-              <a:rPr lang="en-US" sz="2200" b="1" dirty="0">
+              <a:rPr lang="en-US" sz="2200" b="1">
                 <a:solidFill>
                   <a:srgbClr val="C2410C"/>
                 </a:solidFill>
@@ -8070,7 +8070,7 @@
               <a:t>log</a:t>
             </a:r>
             <a:r>
-              <a:rPr lang="en-US" sz="2200" dirty="0">
+              <a:rPr lang="en-US" sz="2200">
                 <a:solidFill>
                   <a:srgbClr val="17202A"/>
                 </a:solidFill>
@@ -8081,7 +8081,7 @@
               <a:t>(resultado);   // </a:t>
             </a:r>
             <a:r>
-              <a:rPr lang="en-US" sz="2200" b="1" dirty="0">
+              <a:rPr lang="en-US" sz="2200" b="1">
                 <a:solidFill>
                   <a:srgbClr val="C2410C"/>
                 </a:solidFill>
@@ -8091,7 +8091,7 @@
               </a:rPr>
               <a:t>undefined</a:t>
             </a:r>
-            <a:endParaRPr lang="en-US" sz="2200" dirty="0"/>
+            <a:endParaRPr lang="en-US" sz="2200"/>
           </a:p>
           <a:p>
             <a:pPr marL="0" indent="0" algn="l">
@@ -8100,7 +8100,7 @@
               </a:lnSpc>
               <a:buNone/>
             </a:pPr>
-            <a:endParaRPr lang="en-US" sz="2200" dirty="0"/>
+            <a:endParaRPr lang="en-US" sz="2200"/>
           </a:p>
           <a:p>
             <a:pPr marL="0" indent="0" algn="l">
@@ -8110,7 +8110,7 @@
               <a:buNone/>
             </a:pPr>
             <a:r>
-              <a:rPr lang="en-US" sz="2200" dirty="0">
+              <a:rPr lang="en-US" sz="2200">
                 <a:solidFill>
                   <a:srgbClr val="17202A"/>
                 </a:solidFill>
@@ -8120,7 +8120,7 @@
               </a:rPr>
               <a:t>resultado = 42;           // agora inicializada</a:t>
             </a:r>
-            <a:endParaRPr lang="en-US" sz="2200" dirty="0"/>
+            <a:endParaRPr lang="en-US" sz="2200"/>
           </a:p>
           <a:p>
             <a:pPr marL="0" indent="0" algn="l">
@@ -8130,7 +8130,7 @@
               <a:buNone/>
             </a:pPr>
             <a:r>
-              <a:rPr lang="en-US" sz="2200" b="1" dirty="0">
+              <a:rPr lang="en-US" sz="2200" b="1">
                 <a:solidFill>
                   <a:srgbClr val="C2410C"/>
                 </a:solidFill>
@@ -8141,7 +8141,7 @@
               <a:t>console</a:t>
             </a:r>
             <a:r>
-              <a:rPr lang="en-US" sz="2200" dirty="0">
+              <a:rPr lang="en-US" sz="2200">
                 <a:solidFill>
                   <a:srgbClr val="17202A"/>
                 </a:solidFill>
@@ -8152,7 +8152,7 @@
               <a:t>.</a:t>
             </a:r>
             <a:r>
-              <a:rPr lang="en-US" sz="2200" b="1" dirty="0">
+              <a:rPr lang="en-US" sz="2200" b="1">
                 <a:solidFill>
                   <a:srgbClr val="C2410C"/>
                 </a:solidFill>
@@ -8163,7 +8163,7 @@
               <a:t>log</a:t>
             </a:r>
             <a:r>
-              <a:rPr lang="en-US" sz="2200" dirty="0">
+              <a:rPr lang="en-US" sz="2200">
                 <a:solidFill>
                   <a:srgbClr val="17202A"/>
                 </a:solidFill>
@@ -8173,7 +8173,7 @@
               </a:rPr>
               <a:t>(resultado);   // 42</a:t>
             </a:r>
-            <a:endParaRPr lang="en-US" sz="2200" dirty="0"/>
+            <a:endParaRPr lang="en-US" sz="2200"/>
           </a:p>
         </p:txBody>
       </p:sp>
@@ -8202,7 +8202,7 @@
               <a:buNone/>
             </a:pPr>
             <a:r>
-              <a:rPr lang="en-US" sz="1900" i="1" dirty="0">
+              <a:rPr lang="en-US" sz="1900" i="1">
                 <a:solidFill>
                   <a:srgbClr val="5A6472"/>
                 </a:solidFill>
@@ -8212,7 +8212,7 @@
               </a:rPr>
               <a:t>O espaço na memória já existe; ele guarda o valor especial undefined até receber outra coisa.</a:t>
             </a:r>
-            <a:endParaRPr lang="en-US" sz="1900" dirty="0"/>
+            <a:endParaRPr lang="en-US" sz="1900"/>
           </a:p>
         </p:txBody>
       </p:sp>
@@ -8270,7 +8270,7 @@
               <a:buNone/>
             </a:pPr>
             <a:r>
-              <a:rPr lang="en-US" sz="3400" b="1" dirty="0">
+              <a:rPr lang="en-US" sz="3400" b="1">
                 <a:solidFill>
                   <a:srgbClr val="17202A"/>
                 </a:solidFill>
@@ -8280,7 +8280,7 @@
               </a:rPr>
               <a:t>Declarar x inicializar: JS x Python</a:t>
             </a:r>
-            <a:endParaRPr lang="en-US" sz="3400" dirty="0"/>
+            <a:endParaRPr lang="en-US" sz="3400"/>
           </a:p>
         </p:txBody>
       </p:sp>
@@ -8347,7 +8347,7 @@
               <a:buNone/>
             </a:pPr>
             <a:r>
-              <a:rPr lang="en-US" sz="2200" b="1" dirty="0">
+              <a:rPr lang="en-US" sz="2200" b="1">
                 <a:solidFill>
                   <a:srgbClr val="C2410C"/>
                 </a:solidFill>
@@ -8357,7 +8357,7 @@
               </a:rPr>
               <a:t>JavaScript</a:t>
             </a:r>
-            <a:endParaRPr lang="en-US" sz="2200" dirty="0"/>
+            <a:endParaRPr lang="en-US" sz="2200"/>
           </a:p>
         </p:txBody>
       </p:sp>
@@ -8386,7 +8386,7 @@
               <a:buNone/>
             </a:pPr>
             <a:r>
-              <a:rPr lang="en-US" sz="2200" b="1" dirty="0">
+              <a:rPr lang="en-US" sz="2200" b="1">
                 <a:solidFill>
                   <a:srgbClr val="5A6472"/>
                 </a:solidFill>
@@ -8396,7 +8396,7 @@
               </a:rPr>
               <a:t>Python</a:t>
             </a:r>
-            <a:endParaRPr lang="en-US" sz="2200" dirty="0"/>
+            <a:endParaRPr lang="en-US" sz="2200"/>
           </a:p>
         </p:txBody>
       </p:sp>
@@ -8466,7 +8466,7 @@
               <a:buNone/>
             </a:pPr>
             <a:r>
-              <a:rPr lang="en-US" sz="1800" b="1" dirty="0">
+              <a:rPr lang="en-US" sz="1800" b="1">
                 <a:solidFill>
                   <a:srgbClr val="C2410C"/>
                 </a:solidFill>
@@ -8477,7 +8477,7 @@
               <a:t>let</a:t>
             </a:r>
             <a:r>
-              <a:rPr lang="en-US" sz="1800" dirty="0">
+              <a:rPr lang="en-US" sz="1800">
                 <a:solidFill>
                   <a:srgbClr val="17202A"/>
                 </a:solidFill>
@@ -8487,7 +8487,7 @@
               </a:rPr>
               <a:t> resultado;</a:t>
             </a:r>
-            <a:endParaRPr lang="en-US" sz="1800" dirty="0"/>
+            <a:endParaRPr lang="en-US" sz="1800"/>
           </a:p>
           <a:p>
             <a:pPr marL="0" indent="0" algn="l">
@@ -8497,7 +8497,7 @@
               <a:buNone/>
             </a:pPr>
             <a:r>
-              <a:rPr lang="en-US" sz="1800" b="1" dirty="0">
+              <a:rPr lang="en-US" sz="1800" b="1">
                 <a:solidFill>
                   <a:srgbClr val="C2410C"/>
                 </a:solidFill>
@@ -8508,7 +8508,7 @@
               <a:t>console</a:t>
             </a:r>
             <a:r>
-              <a:rPr lang="en-US" sz="1800" dirty="0">
+              <a:rPr lang="en-US" sz="1800">
                 <a:solidFill>
                   <a:srgbClr val="17202A"/>
                 </a:solidFill>
@@ -8519,7 +8519,7 @@
               <a:t>.</a:t>
             </a:r>
             <a:r>
-              <a:rPr lang="en-US" sz="1800" b="1" dirty="0">
+              <a:rPr lang="en-US" sz="1800" b="1">
                 <a:solidFill>
                   <a:srgbClr val="C2410C"/>
                 </a:solidFill>
@@ -8530,7 +8530,7 @@
               <a:t>log</a:t>
             </a:r>
             <a:r>
-              <a:rPr lang="en-US" sz="1800" dirty="0">
+              <a:rPr lang="en-US" sz="1800">
                 <a:solidFill>
                   <a:srgbClr val="17202A"/>
                 </a:solidFill>
@@ -8540,7 +8540,7 @@
               </a:rPr>
               <a:t>(resultado);</a:t>
             </a:r>
-            <a:endParaRPr lang="en-US" sz="1800" dirty="0"/>
+            <a:endParaRPr lang="en-US" sz="1800"/>
           </a:p>
           <a:p>
             <a:pPr marL="0" indent="0" algn="l">
@@ -8550,7 +8550,7 @@
               <a:buNone/>
             </a:pPr>
             <a:r>
-              <a:rPr lang="en-US" sz="1800" i="1" dirty="0">
+              <a:rPr lang="en-US" sz="1800" i="1">
                 <a:solidFill>
                   <a:srgbClr val="5A6472"/>
                 </a:solidFill>
@@ -8560,7 +8560,7 @@
               </a:rPr>
               <a:t>// undefined</a:t>
             </a:r>
-            <a:endParaRPr lang="en-US" sz="1800" dirty="0"/>
+            <a:endParaRPr lang="en-US" sz="1800"/>
           </a:p>
         </p:txBody>
       </p:sp>
@@ -8630,7 +8630,7 @@
               <a:buNone/>
             </a:pPr>
             <a:r>
-              <a:rPr lang="en-US" sz="1800" dirty="0">
+              <a:rPr lang="en-US" sz="1800">
                 <a:solidFill>
                   <a:srgbClr val="17202A"/>
                 </a:solidFill>
@@ -8640,7 +8640,7 @@
               </a:rPr>
               <a:t>resultado</a:t>
             </a:r>
-            <a:endParaRPr lang="en-US" sz="1800" dirty="0"/>
+            <a:endParaRPr lang="en-US" sz="1800"/>
           </a:p>
           <a:p>
             <a:pPr marL="0" indent="0" algn="l">
@@ -8650,7 +8650,7 @@
               <a:buNone/>
             </a:pPr>
             <a:r>
-              <a:rPr lang="en-US" sz="1800" b="1" dirty="0">
+              <a:rPr lang="en-US" sz="1800" b="1">
                 <a:solidFill>
                   <a:srgbClr val="C2410C"/>
                 </a:solidFill>
@@ -8661,7 +8661,7 @@
               <a:t>print</a:t>
             </a:r>
             <a:r>
-              <a:rPr lang="en-US" sz="1800" dirty="0">
+              <a:rPr lang="en-US" sz="1800">
                 <a:solidFill>
                   <a:srgbClr val="17202A"/>
                 </a:solidFill>
@@ -8671,7 +8671,7 @@
               </a:rPr>
               <a:t>(resultado)</a:t>
             </a:r>
-            <a:endParaRPr lang="en-US" sz="1800" dirty="0"/>
+            <a:endParaRPr lang="en-US" sz="1800"/>
           </a:p>
           <a:p>
             <a:pPr marL="0" indent="0" algn="l">
@@ -8681,7 +8681,7 @@
               <a:buNone/>
             </a:pPr>
             <a:r>
-              <a:rPr lang="en-US" sz="1800" i="1" dirty="0">
+              <a:rPr lang="en-US" sz="1800" i="1">
                 <a:solidFill>
                   <a:srgbClr val="5A6472"/>
                 </a:solidFill>
@@ -8691,7 +8691,7 @@
               </a:rPr>
               <a:t># NameError: name 'resultado'</a:t>
             </a:r>
-            <a:endParaRPr lang="en-US" sz="1800" dirty="0"/>
+            <a:endParaRPr lang="en-US" sz="1800"/>
           </a:p>
           <a:p>
             <a:pPr marL="0" indent="0" algn="l">
@@ -8701,7 +8701,7 @@
               <a:buNone/>
             </a:pPr>
             <a:r>
-              <a:rPr lang="en-US" sz="1800" i="1" dirty="0">
+              <a:rPr lang="en-US" sz="1800" i="1">
                 <a:solidFill>
                   <a:srgbClr val="5A6472"/>
                 </a:solidFill>
@@ -8711,7 +8711,7 @@
               </a:rPr>
               <a:t># is not defined</a:t>
             </a:r>
-            <a:endParaRPr lang="en-US" sz="1800" dirty="0"/>
+            <a:endParaRPr lang="en-US" sz="1800"/>
           </a:p>
         </p:txBody>
       </p:sp>
@@ -8740,7 +8740,7 @@
               <a:buNone/>
             </a:pPr>
             <a:r>
-              <a:rPr lang="en-US" sz="1900" i="1" dirty="0">
+              <a:rPr lang="en-US" sz="1900" i="1">
                 <a:solidFill>
                   <a:srgbClr val="5A6472"/>
                 </a:solidFill>
@@ -8750,7 +8750,7 @@
               </a:rPr>
               <a:t>Em Python a variável só passa a existir quando recebe um valor. Em JS ela pode existir vazia, valendo undefined.</a:t>
             </a:r>
-            <a:endParaRPr lang="en-US" sz="1900" dirty="0"/>
+            <a:endParaRPr lang="en-US" sz="1900"/>
           </a:p>
         </p:txBody>
       </p:sp>
@@ -8808,7 +8808,7 @@
               <a:buNone/>
             </a:pPr>
             <a:r>
-              <a:rPr lang="en-US" sz="3400" b="1" dirty="0">
+              <a:rPr lang="en-US" sz="3400" b="1">
                 <a:solidFill>
                   <a:srgbClr val="17202A"/>
                 </a:solidFill>
@@ -8818,7 +8818,7 @@
               </a:rPr>
               <a:t>Tipos primitivos em JavaScript</a:t>
             </a:r>
-            <a:endParaRPr lang="en-US" sz="3400" dirty="0"/>
+            <a:endParaRPr lang="en-US" sz="3400"/>
           </a:p>
         </p:txBody>
       </p:sp>
@@ -8889,7 +8889,7 @@
               <a:buChar char="•"/>
             </a:pPr>
             <a:r>
-              <a:rPr lang="en-US" sz="2600" dirty="0">
+              <a:rPr lang="en-US" sz="2600">
                 <a:solidFill>
                   <a:srgbClr val="17202A"/>
                 </a:solidFill>
@@ -8899,7 +8899,7 @@
               </a:rPr>
               <a:t>string — texto: "Ana", 'ADS', `olá`</a:t>
             </a:r>
-            <a:endParaRPr lang="en-US" sz="2600" dirty="0"/>
+            <a:endParaRPr lang="en-US" sz="2600"/>
           </a:p>
           <a:p>
             <a:pPr marL="342900" indent="-342900">
@@ -8910,7 +8910,7 @@
               <a:buChar char="•"/>
             </a:pPr>
             <a:r>
-              <a:rPr lang="en-US" sz="2600" dirty="0">
+              <a:rPr lang="en-US" sz="2600">
                 <a:solidFill>
                   <a:srgbClr val="17202A"/>
                 </a:solidFill>
@@ -8920,7 +8920,7 @@
               </a:rPr>
               <a:t>number — inteiros e decimais no mesmo tipo: 10, 3.14</a:t>
             </a:r>
-            <a:endParaRPr lang="en-US" sz="2600" dirty="0"/>
+            <a:endParaRPr lang="en-US" sz="2600"/>
           </a:p>
           <a:p>
             <a:pPr marL="342900" indent="-342900">
@@ -8931,7 +8931,7 @@
               <a:buChar char="•"/>
             </a:pPr>
             <a:r>
-              <a:rPr lang="en-US" sz="2600" dirty="0">
+              <a:rPr lang="en-US" sz="2600">
                 <a:solidFill>
                   <a:srgbClr val="17202A"/>
                 </a:solidFill>
@@ -8941,7 +8941,7 @@
               </a:rPr>
               <a:t>boolean — true ou false</a:t>
             </a:r>
-            <a:endParaRPr lang="en-US" sz="2600" dirty="0"/>
+            <a:endParaRPr lang="en-US" sz="2600"/>
           </a:p>
           <a:p>
             <a:pPr marL="342900" indent="-342900">
@@ -8952,7 +8952,7 @@
               <a:buChar char="•"/>
             </a:pPr>
             <a:r>
-              <a:rPr lang="en-US" sz="2600" dirty="0">
+              <a:rPr lang="en-US" sz="2600">
                 <a:solidFill>
                   <a:srgbClr val="17202A"/>
                 </a:solidFill>
@@ -8962,7 +8962,7 @@
               </a:rPr>
               <a:t>null — ausência intencional de valor</a:t>
             </a:r>
-            <a:endParaRPr lang="en-US" sz="2600" dirty="0"/>
+            <a:endParaRPr lang="en-US" sz="2600"/>
           </a:p>
           <a:p>
             <a:pPr marL="342900" indent="-342900">
@@ -8973,7 +8973,7 @@
               <a:buChar char="•"/>
             </a:pPr>
             <a:r>
-              <a:rPr lang="en-US" sz="2600" dirty="0">
+              <a:rPr lang="en-US" sz="2600">
                 <a:solidFill>
                   <a:srgbClr val="17202A"/>
                 </a:solidFill>
@@ -8983,7 +8983,7 @@
               </a:rPr>
               <a:t>undefined — valor ainda não atribuído</a:t>
             </a:r>
-            <a:endParaRPr lang="en-US" sz="2600" dirty="0"/>
+            <a:endParaRPr lang="en-US" sz="2600"/>
           </a:p>
         </p:txBody>
       </p:sp>
@@ -9041,7 +9041,7 @@
               <a:buNone/>
             </a:pPr>
             <a:r>
-              <a:rPr lang="en-US" sz="3400" b="1" dirty="0">
+              <a:rPr lang="en-US" sz="3400" b="1">
                 <a:solidFill>
                   <a:srgbClr val="17202A"/>
                 </a:solidFill>
@@ -9051,7 +9051,7 @@
               </a:rPr>
               <a:t>Tipos primitivos: JS x Python</a:t>
             </a:r>
-            <a:endParaRPr lang="en-US" sz="3400" dirty="0"/>
+            <a:endParaRPr lang="en-US" sz="3400"/>
           </a:p>
         </p:txBody>
       </p:sp>
@@ -9118,7 +9118,7 @@
               <a:buNone/>
             </a:pPr>
             <a:r>
-              <a:rPr lang="en-US" sz="2200" b="1" dirty="0">
+              <a:rPr lang="en-US" sz="2200" b="1">
                 <a:solidFill>
                   <a:srgbClr val="C2410C"/>
                 </a:solidFill>
@@ -9128,7 +9128,7 @@
               </a:rPr>
               <a:t>JavaScript</a:t>
             </a:r>
-            <a:endParaRPr lang="en-US" sz="2200" dirty="0"/>
+            <a:endParaRPr lang="en-US" sz="2200"/>
           </a:p>
         </p:txBody>
       </p:sp>
@@ -9157,7 +9157,7 @@
               <a:buNone/>
             </a:pPr>
             <a:r>
-              <a:rPr lang="en-US" sz="2200" b="1" dirty="0">
+              <a:rPr lang="en-US" sz="2200" b="1">
                 <a:solidFill>
                   <a:srgbClr val="5A6472"/>
                 </a:solidFill>
@@ -9167,7 +9167,7 @@
               </a:rPr>
               <a:t>Python</a:t>
             </a:r>
-            <a:endParaRPr lang="en-US" sz="2200" dirty="0"/>
+            <a:endParaRPr lang="en-US" sz="2200"/>
           </a:p>
         </p:txBody>
       </p:sp>
@@ -9237,7 +9237,7 @@
               <a:buNone/>
             </a:pPr>
             <a:r>
-              <a:rPr lang="en-US" sz="1800" b="1" dirty="0">
+              <a:rPr lang="en-US" sz="1800" b="1">
                 <a:solidFill>
                   <a:srgbClr val="C2410C"/>
                 </a:solidFill>
@@ -9248,7 +9248,7 @@
               <a:t>const</a:t>
             </a:r>
             <a:r>
-              <a:rPr lang="en-US" sz="1800" dirty="0">
+              <a:rPr lang="en-US" sz="1800">
                 <a:solidFill>
                   <a:srgbClr val="17202A"/>
                 </a:solidFill>
@@ -9258,7 +9258,7 @@
               </a:rPr>
               <a:t> nome = "Ana";</a:t>
             </a:r>
-            <a:endParaRPr lang="en-US" sz="1800" dirty="0"/>
+            <a:endParaRPr lang="en-US" sz="1800"/>
           </a:p>
           <a:p>
             <a:pPr marL="0" indent="0" algn="l">
@@ -9268,7 +9268,7 @@
               <a:buNone/>
             </a:pPr>
             <a:r>
-              <a:rPr lang="en-US" sz="1800" b="1" dirty="0">
+              <a:rPr lang="en-US" sz="1800" b="1">
                 <a:solidFill>
                   <a:srgbClr val="C2410C"/>
                 </a:solidFill>
@@ -9279,7 +9279,7 @@
               <a:t>const</a:t>
             </a:r>
             <a:r>
-              <a:rPr lang="en-US" sz="1800" dirty="0">
+              <a:rPr lang="en-US" sz="1800">
                 <a:solidFill>
                   <a:srgbClr val="17202A"/>
                 </a:solidFill>
@@ -9289,7 +9289,7 @@
               </a:rPr>
               <a:t> idade = 20;</a:t>
             </a:r>
-            <a:endParaRPr lang="en-US" sz="1800" dirty="0"/>
+            <a:endParaRPr lang="en-US" sz="1800"/>
           </a:p>
           <a:p>
             <a:pPr marL="0" indent="0" algn="l">
@@ -9299,7 +9299,7 @@
               <a:buNone/>
             </a:pPr>
             <a:r>
-              <a:rPr lang="en-US" sz="1800" b="1" dirty="0">
+              <a:rPr lang="en-US" sz="1800" b="1">
                 <a:solidFill>
                   <a:srgbClr val="C2410C"/>
                 </a:solidFill>
@@ -9310,7 +9310,7 @@
               <a:t>const</a:t>
             </a:r>
             <a:r>
-              <a:rPr lang="en-US" sz="1800" dirty="0">
+              <a:rPr lang="en-US" sz="1800">
                 <a:solidFill>
                   <a:srgbClr val="17202A"/>
                 </a:solidFill>
@@ -9320,7 +9320,7 @@
               </a:rPr>
               <a:t> nota = 8.5;</a:t>
             </a:r>
-            <a:endParaRPr lang="en-US" sz="1800" dirty="0"/>
+            <a:endParaRPr lang="en-US" sz="1800"/>
           </a:p>
           <a:p>
             <a:pPr marL="0" indent="0" algn="l">
@@ -9330,7 +9330,7 @@
               <a:buNone/>
             </a:pPr>
             <a:r>
-              <a:rPr lang="en-US" sz="1800" b="1" dirty="0">
+              <a:rPr lang="en-US" sz="1800" b="1">
                 <a:solidFill>
                   <a:srgbClr val="C2410C"/>
                 </a:solidFill>
@@ -9341,7 +9341,7 @@
               <a:t>const</a:t>
             </a:r>
             <a:r>
-              <a:rPr lang="en-US" sz="1800" dirty="0">
+              <a:rPr lang="en-US" sz="1800">
                 <a:solidFill>
                   <a:srgbClr val="17202A"/>
                 </a:solidFill>
@@ -9352,7 +9352,7 @@
               <a:t> ativo = </a:t>
             </a:r>
             <a:r>
-              <a:rPr lang="en-US" sz="1800" b="1" dirty="0">
+              <a:rPr lang="en-US" sz="1800" b="1">
                 <a:solidFill>
                   <a:srgbClr val="C2410C"/>
                 </a:solidFill>
@@ -9363,7 +9363,7 @@
               <a:t>true</a:t>
             </a:r>
             <a:r>
-              <a:rPr lang="en-US" sz="1800" dirty="0">
+              <a:rPr lang="en-US" sz="1800">
                 <a:solidFill>
                   <a:srgbClr val="17202A"/>
                 </a:solidFill>
@@ -9373,7 +9373,7 @@
               </a:rPr>
               <a:t>;</a:t>
             </a:r>
-            <a:endParaRPr lang="en-US" sz="1800" dirty="0"/>
+            <a:endParaRPr lang="en-US" sz="1800"/>
           </a:p>
           <a:p>
             <a:pPr marL="0" indent="0" algn="l">
@@ -9383,7 +9383,7 @@
               <a:buNone/>
             </a:pPr>
             <a:r>
-              <a:rPr lang="en-US" sz="1800" b="1" dirty="0">
+              <a:rPr lang="en-US" sz="1800" b="1">
                 <a:solidFill>
                   <a:srgbClr val="C2410C"/>
                 </a:solidFill>
@@ -9394,7 +9394,7 @@
               <a:t>const</a:t>
             </a:r>
             <a:r>
-              <a:rPr lang="en-US" sz="1800" dirty="0">
+              <a:rPr lang="en-US" sz="1800">
                 <a:solidFill>
                   <a:srgbClr val="17202A"/>
                 </a:solidFill>
@@ -9405,7 +9405,7 @@
               <a:t> vazio = </a:t>
             </a:r>
             <a:r>
-              <a:rPr lang="en-US" sz="1800" b="1" dirty="0">
+              <a:rPr lang="en-US" sz="1800" b="1">
                 <a:solidFill>
                   <a:srgbClr val="C2410C"/>
                 </a:solidFill>
@@ -9416,7 +9416,7 @@
               <a:t>null</a:t>
             </a:r>
             <a:r>
-              <a:rPr lang="en-US" sz="1800" dirty="0">
+              <a:rPr lang="en-US" sz="1800">
                 <a:solidFill>
                   <a:srgbClr val="17202A"/>
                 </a:solidFill>
@@ -9426,7 +9426,7 @@
               </a:rPr>
               <a:t>;</a:t>
             </a:r>
-            <a:endParaRPr lang="en-US" sz="1800" dirty="0"/>
+            <a:endParaRPr lang="en-US" sz="1800"/>
           </a:p>
         </p:txBody>
       </p:sp>
@@ -9496,7 +9496,7 @@
               <a:buNone/>
             </a:pPr>
             <a:r>
-              <a:rPr lang="en-US" sz="1800" dirty="0">
+              <a:rPr lang="en-US" sz="1800">
                 <a:solidFill>
                   <a:srgbClr val="17202A"/>
                 </a:solidFill>
@@ -9506,7 +9506,7 @@
               </a:rPr>
               <a:t>nome = "Ana"</a:t>
             </a:r>
-            <a:endParaRPr lang="en-US" sz="1800" dirty="0"/>
+            <a:endParaRPr lang="en-US" sz="1800"/>
           </a:p>
           <a:p>
             <a:pPr marL="0" indent="0" algn="l">
@@ -9516,7 +9516,7 @@
               <a:buNone/>
             </a:pPr>
             <a:r>
-              <a:rPr lang="en-US" sz="1800" dirty="0">
+              <a:rPr lang="en-US" sz="1800">
                 <a:solidFill>
                   <a:srgbClr val="17202A"/>
                 </a:solidFill>
@@ -9526,7 +9526,7 @@
               </a:rPr>
               <a:t>idade = 20</a:t>
             </a:r>
-            <a:endParaRPr lang="en-US" sz="1800" dirty="0"/>
+            <a:endParaRPr lang="en-US" sz="1800"/>
           </a:p>
           <a:p>
             <a:pPr marL="0" indent="0" algn="l">
@@ -9536,7 +9536,7 @@
               <a:buNone/>
             </a:pPr>
             <a:r>
-              <a:rPr lang="en-US" sz="1800" dirty="0">
+              <a:rPr lang="en-US" sz="1800">
                 <a:solidFill>
                   <a:srgbClr val="17202A"/>
                 </a:solidFill>
@@ -9546,7 +9546,7 @@
               </a:rPr>
               <a:t>nota = 8.5</a:t>
             </a:r>
-            <a:endParaRPr lang="en-US" sz="1800" dirty="0"/>
+            <a:endParaRPr lang="en-US" sz="1800"/>
           </a:p>
           <a:p>
             <a:pPr marL="0" indent="0" algn="l">
@@ -9556,7 +9556,7 @@
               <a:buNone/>
             </a:pPr>
             <a:r>
-              <a:rPr lang="en-US" sz="1800" dirty="0">
+              <a:rPr lang="en-US" sz="1800">
                 <a:solidFill>
                   <a:srgbClr val="17202A"/>
                 </a:solidFill>
@@ -9567,7 +9567,7 @@
               <a:t>ativo = </a:t>
             </a:r>
             <a:r>
-              <a:rPr lang="en-US" sz="1800" b="1" dirty="0">
+              <a:rPr lang="en-US" sz="1800" b="1">
                 <a:solidFill>
                   <a:srgbClr val="C2410C"/>
                 </a:solidFill>
@@ -9577,7 +9577,7 @@
               </a:rPr>
               <a:t>True</a:t>
             </a:r>
-            <a:endParaRPr lang="en-US" sz="1800" dirty="0"/>
+            <a:endParaRPr lang="en-US" sz="1800"/>
           </a:p>
           <a:p>
             <a:pPr marL="0" indent="0" algn="l">
@@ -9587,7 +9587,7 @@
               <a:buNone/>
             </a:pPr>
             <a:r>
-              <a:rPr lang="en-US" sz="1800" dirty="0">
+              <a:rPr lang="en-US" sz="1800">
                 <a:solidFill>
                   <a:srgbClr val="17202A"/>
                 </a:solidFill>
@@ -9598,7 +9598,7 @@
               <a:t>vazio = </a:t>
             </a:r>
             <a:r>
-              <a:rPr lang="en-US" sz="1800" b="1" dirty="0">
+              <a:rPr lang="en-US" sz="1800" b="1">
                 <a:solidFill>
                   <a:srgbClr val="C2410C"/>
                 </a:solidFill>
@@ -9608,7 +9608,7 @@
               </a:rPr>
               <a:t>None</a:t>
             </a:r>
-            <a:endParaRPr lang="en-US" sz="1800" dirty="0"/>
+            <a:endParaRPr lang="en-US" sz="1800"/>
           </a:p>
         </p:txBody>
       </p:sp>
@@ -9637,7 +9637,7 @@
               <a:buNone/>
             </a:pPr>
             <a:r>
-              <a:rPr lang="en-US" sz="1900" i="1" dirty="0">
+              <a:rPr lang="en-US" sz="1900" i="1">
                 <a:solidFill>
                   <a:srgbClr val="5A6472"/>
                 </a:solidFill>
@@ -9647,7 +9647,7 @@
               </a:rPr>
               <a:t>Atenção: em JS, true e false são minúsculos, e não existem int e float separados — tudo é number.</a:t>
             </a:r>
-            <a:endParaRPr lang="en-US" sz="1900" dirty="0"/>
+            <a:endParaRPr lang="en-US" sz="1900"/>
           </a:p>
         </p:txBody>
       </p:sp>
@@ -9705,7 +9705,7 @@
               <a:buNone/>
             </a:pPr>
             <a:r>
-              <a:rPr lang="en-US" sz="3400" b="1" dirty="0">
+              <a:rPr lang="en-US" sz="3400" b="1">
                 <a:solidFill>
                   <a:srgbClr val="17202A"/>
                 </a:solidFill>
@@ -9715,7 +9715,7 @@
               </a:rPr>
               <a:t>null e undefined</a:t>
             </a:r>
-            <a:endParaRPr lang="en-US" sz="3400" dirty="0"/>
+            <a:endParaRPr lang="en-US" sz="3400"/>
           </a:p>
         </p:txBody>
       </p:sp>
@@ -9786,7 +9786,7 @@
               <a:buChar char="•"/>
             </a:pPr>
             <a:r>
-              <a:rPr lang="en-US" sz="2600" dirty="0">
+              <a:rPr lang="en-US" sz="2600">
                 <a:solidFill>
                   <a:srgbClr val="17202A"/>
                 </a:solidFill>
@@ -9796,7 +9796,7 @@
               </a:rPr>
               <a:t>undefined: a variável existe, mas nunca recebeu valor — é o padrão da linguagem</a:t>
             </a:r>
-            <a:endParaRPr lang="en-US" sz="2600" dirty="0"/>
+            <a:endParaRPr lang="en-US" sz="2600"/>
           </a:p>
           <a:p>
             <a:pPr marL="342900" indent="-342900">
@@ -9807,7 +9807,7 @@
               <a:buChar char="•"/>
             </a:pPr>
             <a:r>
-              <a:rPr lang="en-US" sz="2600" dirty="0">
+              <a:rPr lang="en-US" sz="2600">
                 <a:solidFill>
                   <a:srgbClr val="17202A"/>
                 </a:solidFill>
@@ -9817,7 +9817,7 @@
               </a:rPr>
               <a:t>null: você atribuiu deliberadamente um valor vazio</a:t>
             </a:r>
-            <a:endParaRPr lang="en-US" sz="2600" dirty="0"/>
+            <a:endParaRPr lang="en-US" sz="2600"/>
           </a:p>
           <a:p>
             <a:pPr marL="342900" indent="-342900">
@@ -9828,7 +9828,7 @@
               <a:buChar char="•"/>
             </a:pPr>
             <a:r>
-              <a:rPr lang="en-US" sz="2600" dirty="0">
+              <a:rPr lang="en-US" sz="2600">
                 <a:solidFill>
                   <a:srgbClr val="17202A"/>
                 </a:solidFill>
@@ -9838,7 +9838,7 @@
               </a:rPr>
               <a:t>Python tem apenas None, que corresponde mais ao null</a:t>
             </a:r>
-            <a:endParaRPr lang="en-US" sz="2600" dirty="0"/>
+            <a:endParaRPr lang="en-US" sz="2600"/>
           </a:p>
         </p:txBody>
       </p:sp>
@@ -9867,7 +9867,7 @@
               <a:buNone/>
             </a:pPr>
             <a:r>
-              <a:rPr lang="en-US" sz="2000" i="1" dirty="0">
+              <a:rPr lang="en-US" sz="2000" i="1">
                 <a:solidFill>
                   <a:srgbClr val="5A6472"/>
                 </a:solidFill>
@@ -9877,7 +9877,7 @@
               </a:rPr>
               <a:t>undefined é um tipo próprio do JavaScript, sem equivalente direto em Python.</a:t>
             </a:r>
-            <a:endParaRPr lang="en-US" sz="2000" dirty="0"/>
+            <a:endParaRPr lang="en-US" sz="2000"/>
           </a:p>
         </p:txBody>
       </p:sp>
@@ -9935,7 +9935,7 @@
               <a:buNone/>
             </a:pPr>
             <a:r>
-              <a:rPr lang="en-US" sz="3400" b="1" dirty="0">
+              <a:rPr lang="en-US" sz="3400" b="1">
                 <a:solidFill>
                   <a:srgbClr val="17202A"/>
                 </a:solidFill>
@@ -9945,7 +9945,7 @@
               </a:rPr>
               <a:t>Arrays x listas</a:t>
             </a:r>
-            <a:endParaRPr lang="en-US" sz="3400" dirty="0"/>
+            <a:endParaRPr lang="en-US" sz="3400"/>
           </a:p>
         </p:txBody>
       </p:sp>
@@ -10012,7 +10012,7 @@
               <a:buNone/>
             </a:pPr>
             <a:r>
-              <a:rPr lang="en-US" sz="2200" b="1" dirty="0">
+              <a:rPr lang="en-US" sz="2200" b="1">
                 <a:solidFill>
                   <a:srgbClr val="C2410C"/>
                 </a:solidFill>
@@ -10022,7 +10022,7 @@
               </a:rPr>
               <a:t>JavaScript</a:t>
             </a:r>
-            <a:endParaRPr lang="en-US" sz="2200" dirty="0"/>
+            <a:endParaRPr lang="en-US" sz="2200"/>
           </a:p>
         </p:txBody>
       </p:sp>
@@ -10051,7 +10051,7 @@
               <a:buNone/>
             </a:pPr>
             <a:r>
-              <a:rPr lang="en-US" sz="2200" b="1" dirty="0">
+              <a:rPr lang="en-US" sz="2200" b="1">
                 <a:solidFill>
                   <a:srgbClr val="5A6472"/>
                 </a:solidFill>
@@ -10061,7 +10061,7 @@
               </a:rPr>
               <a:t>Python</a:t>
             </a:r>
-            <a:endParaRPr lang="en-US" sz="2200" dirty="0"/>
+            <a:endParaRPr lang="en-US" sz="2200"/>
           </a:p>
         </p:txBody>
       </p:sp>
@@ -10131,7 +10131,7 @@
               <a:buNone/>
             </a:pPr>
             <a:r>
-              <a:rPr lang="en-US" sz="1800" b="1" dirty="0">
+              <a:rPr lang="en-US" sz="1800" b="1">
                 <a:solidFill>
                   <a:srgbClr val="C2410C"/>
                 </a:solidFill>
@@ -10142,7 +10142,7 @@
               <a:t>const</a:t>
             </a:r>
             <a:r>
-              <a:rPr lang="en-US" sz="1800" dirty="0">
+              <a:rPr lang="en-US" sz="1800">
                 <a:solidFill>
                   <a:srgbClr val="17202A"/>
                 </a:solidFill>
@@ -10152,7 +10152,7 @@
               </a:rPr>
               <a:t> notas = [8, 7.5, 10];</a:t>
             </a:r>
-            <a:endParaRPr lang="en-US" sz="1800" dirty="0"/>
+            <a:endParaRPr lang="en-US" sz="1800"/>
           </a:p>
           <a:p>
             <a:pPr marL="0" indent="0" algn="l">
@@ -10161,7 +10161,7 @@
               </a:lnSpc>
               <a:buNone/>
             </a:pPr>
-            <a:endParaRPr lang="en-US" sz="1800" dirty="0"/>
+            <a:endParaRPr lang="en-US" sz="1800"/>
           </a:p>
           <a:p>
             <a:pPr marL="0" indent="0" algn="l">
@@ -10171,7 +10171,7 @@
               <a:buNone/>
             </a:pPr>
             <a:r>
-              <a:rPr lang="en-US" sz="1800" b="1" dirty="0">
+              <a:rPr lang="en-US" sz="1800" b="1">
                 <a:solidFill>
                   <a:srgbClr val="C2410C"/>
                 </a:solidFill>
@@ -10182,7 +10182,7 @@
               <a:t>console</a:t>
             </a:r>
             <a:r>
-              <a:rPr lang="en-US" sz="1800" dirty="0">
+              <a:rPr lang="en-US" sz="1800">
                 <a:solidFill>
                   <a:srgbClr val="17202A"/>
                 </a:solidFill>
@@ -10193,7 +10193,7 @@
               <a:t>.</a:t>
             </a:r>
             <a:r>
-              <a:rPr lang="en-US" sz="1800" b="1" dirty="0">
+              <a:rPr lang="en-US" sz="1800" b="1">
                 <a:solidFill>
                   <a:srgbClr val="C2410C"/>
                 </a:solidFill>
@@ -10204,7 +10204,7 @@
               <a:t>log</a:t>
             </a:r>
             <a:r>
-              <a:rPr lang="en-US" sz="1800" dirty="0">
+              <a:rPr lang="en-US" sz="1800">
                 <a:solidFill>
                   <a:srgbClr val="17202A"/>
                 </a:solidFill>
@@ -10214,7 +10214,7 @@
               </a:rPr>
               <a:t>(notas[0]);   // 8</a:t>
             </a:r>
-            <a:endParaRPr lang="en-US" sz="1800" dirty="0"/>
+            <a:endParaRPr lang="en-US" sz="1800"/>
           </a:p>
           <a:p>
             <a:pPr marL="0" indent="0" algn="l">
@@ -10224,7 +10224,7 @@
               <a:buNone/>
             </a:pPr>
             <a:r>
-              <a:rPr lang="en-US" sz="1800" b="1" dirty="0">
+              <a:rPr lang="en-US" sz="1800" b="1">
                 <a:solidFill>
                   <a:srgbClr val="C2410C"/>
                 </a:solidFill>
@@ -10235,7 +10235,7 @@
               <a:t>console</a:t>
             </a:r>
             <a:r>
-              <a:rPr lang="en-US" sz="1800" dirty="0">
+              <a:rPr lang="en-US" sz="1800">
                 <a:solidFill>
                   <a:srgbClr val="17202A"/>
                 </a:solidFill>
@@ -10246,7 +10246,7 @@
               <a:t>.</a:t>
             </a:r>
             <a:r>
-              <a:rPr lang="en-US" sz="1800" b="1" dirty="0">
+              <a:rPr lang="en-US" sz="1800" b="1">
                 <a:solidFill>
                   <a:srgbClr val="C2410C"/>
                 </a:solidFill>
@@ -10257,7 +10257,7 @@
               <a:t>log</a:t>
             </a:r>
             <a:r>
-              <a:rPr lang="en-US" sz="1800" dirty="0">
+              <a:rPr lang="en-US" sz="1800">
                 <a:solidFill>
                   <a:srgbClr val="17202A"/>
                 </a:solidFill>
@@ -10267,7 +10267,7 @@
               </a:rPr>
               <a:t>(notas.length); // 3</a:t>
             </a:r>
-            <a:endParaRPr lang="en-US" sz="1800" dirty="0"/>
+            <a:endParaRPr lang="en-US" sz="1800"/>
           </a:p>
           <a:p>
             <a:pPr marL="0" indent="0" algn="l">
@@ -10276,7 +10276,7 @@
               </a:lnSpc>
               <a:buNone/>
             </a:pPr>
-            <a:endParaRPr lang="en-US" sz="1800" dirty="0"/>
+            <a:endParaRPr lang="en-US" sz="1800"/>
           </a:p>
           <a:p>
             <a:pPr marL="0" indent="0" algn="l">
@@ -10286,7 +10286,7 @@
               <a:buNone/>
             </a:pPr>
             <a:r>
-              <a:rPr lang="en-US" sz="1800" dirty="0">
+              <a:rPr lang="en-US" sz="1800">
                 <a:solidFill>
                   <a:srgbClr val="17202A"/>
                 </a:solidFill>
@@ -10296,7 +10296,7 @@
               </a:rPr>
               <a:t>notas.push(9);</a:t>
             </a:r>
-            <a:endParaRPr lang="en-US" sz="1800" dirty="0"/>
+            <a:endParaRPr lang="en-US" sz="1800"/>
           </a:p>
         </p:txBody>
       </p:sp>
@@ -10366,7 +10366,7 @@
               <a:buNone/>
             </a:pPr>
             <a:r>
-              <a:rPr lang="en-US" sz="1800" dirty="0">
+              <a:rPr lang="en-US" sz="1800">
                 <a:solidFill>
                   <a:srgbClr val="17202A"/>
                 </a:solidFill>
@@ -10376,7 +10376,7 @@
               </a:rPr>
               <a:t>notas = [8, 7.5, 10]</a:t>
             </a:r>
-            <a:endParaRPr lang="en-US" sz="1800" dirty="0"/>
+            <a:endParaRPr lang="en-US" sz="1800"/>
           </a:p>
           <a:p>
             <a:pPr marL="0" indent="0" algn="l">
@@ -10385,7 +10385,7 @@
               </a:lnSpc>
               <a:buNone/>
             </a:pPr>
-            <a:endParaRPr lang="en-US" sz="1800" dirty="0"/>
+            <a:endParaRPr lang="en-US" sz="1800"/>
           </a:p>
           <a:p>
             <a:pPr marL="0" indent="0" algn="l">
@@ -10395,7 +10395,7 @@
               <a:buNone/>
             </a:pPr>
             <a:r>
-              <a:rPr lang="en-US" sz="1800" b="1" dirty="0">
+              <a:rPr lang="en-US" sz="1800" b="1">
                 <a:solidFill>
                   <a:srgbClr val="C2410C"/>
                 </a:solidFill>
@@ -10406,7 +10406,7 @@
               <a:t>print</a:t>
             </a:r>
             <a:r>
-              <a:rPr lang="en-US" sz="1800" dirty="0">
+              <a:rPr lang="en-US" sz="1800">
                 <a:solidFill>
                   <a:srgbClr val="17202A"/>
                 </a:solidFill>
@@ -10416,7 +10416,7 @@
               </a:rPr>
               <a:t>(notas[0])   # 8</a:t>
             </a:r>
-            <a:endParaRPr lang="en-US" sz="1800" dirty="0"/>
+            <a:endParaRPr lang="en-US" sz="1800"/>
           </a:p>
           <a:p>
             <a:pPr marL="0" indent="0" algn="l">
@@ -10426,7 +10426,7 @@
               <a:buNone/>
             </a:pPr>
             <a:r>
-              <a:rPr lang="en-US" sz="1800" b="1" dirty="0">
+              <a:rPr lang="en-US" sz="1800" b="1">
                 <a:solidFill>
                   <a:srgbClr val="C2410C"/>
                 </a:solidFill>
@@ -10437,7 +10437,7 @@
               <a:t>print</a:t>
             </a:r>
             <a:r>
-              <a:rPr lang="en-US" sz="1800" dirty="0">
+              <a:rPr lang="en-US" sz="1800">
                 <a:solidFill>
                   <a:srgbClr val="17202A"/>
                 </a:solidFill>
@@ -10448,7 +10448,7 @@
               <a:t>(</a:t>
             </a:r>
             <a:r>
-              <a:rPr lang="en-US" sz="1800" b="1" dirty="0">
+              <a:rPr lang="en-US" sz="1800" b="1">
                 <a:solidFill>
                   <a:srgbClr val="C2410C"/>
                 </a:solidFill>
@@ -10459,7 +10459,7 @@
               <a:t>len</a:t>
             </a:r>
             <a:r>
-              <a:rPr lang="en-US" sz="1800" dirty="0">
+              <a:rPr lang="en-US" sz="1800">
                 <a:solidFill>
                   <a:srgbClr val="17202A"/>
                 </a:solidFill>
@@ -10469,7 +10469,7 @@
               </a:rPr>
               <a:t>(notas)) # 3</a:t>
             </a:r>
-            <a:endParaRPr lang="en-US" sz="1800" dirty="0"/>
+            <a:endParaRPr lang="en-US" sz="1800"/>
           </a:p>
           <a:p>
             <a:pPr marL="0" indent="0" algn="l">
@@ -10478,7 +10478,7 @@
               </a:lnSpc>
               <a:buNone/>
             </a:pPr>
-            <a:endParaRPr lang="en-US" sz="1800" dirty="0"/>
+            <a:endParaRPr lang="en-US" sz="1800"/>
           </a:p>
           <a:p>
             <a:pPr marL="0" indent="0" algn="l">
@@ -10488,7 +10488,7 @@
               <a:buNone/>
             </a:pPr>
             <a:r>
-              <a:rPr lang="en-US" sz="1800" dirty="0">
+              <a:rPr lang="en-US" sz="1800">
                 <a:solidFill>
                   <a:srgbClr val="17202A"/>
                 </a:solidFill>
@@ -10498,7 +10498,7 @@
               </a:rPr>
               <a:t>notas.append(9)</a:t>
             </a:r>
-            <a:endParaRPr lang="en-US" sz="1800" dirty="0"/>
+            <a:endParaRPr lang="en-US" sz="1800"/>
           </a:p>
         </p:txBody>
       </p:sp>
@@ -10527,7 +10527,7 @@
               <a:buNone/>
             </a:pPr>
             <a:r>
-              <a:rPr lang="en-US" sz="1900" i="1" dirty="0">
+              <a:rPr lang="en-US" sz="1900" i="1">
                 <a:solidFill>
                   <a:srgbClr val="5A6472"/>
                 </a:solidFill>
@@ -10537,7 +10537,7 @@
               </a:rPr>
               <a:t>Mesma ideia de coleção ordenada e indexada a partir do zero; mudam os nomes dos métodos.</a:t>
             </a:r>
-            <a:endParaRPr lang="en-US" sz="1900" dirty="0"/>
+            <a:endParaRPr lang="en-US" sz="1900"/>
           </a:p>
         </p:txBody>
       </p:sp>
@@ -10595,7 +10595,7 @@
               <a:buNone/>
             </a:pPr>
             <a:r>
-              <a:rPr lang="en-US" sz="3400" b="1" dirty="0">
+              <a:rPr lang="en-US" sz="3400" b="1">
                 <a:solidFill>
                   <a:srgbClr val="17202A"/>
                 </a:solidFill>
@@ -10605,7 +10605,7 @@
               </a:rPr>
               <a:t>Objetos x dicionários</a:t>
             </a:r>
-            <a:endParaRPr lang="en-US" sz="3400" dirty="0"/>
+            <a:endParaRPr lang="en-US" sz="3400"/>
           </a:p>
         </p:txBody>
       </p:sp>
@@ -10672,7 +10672,7 @@
               <a:buNone/>
             </a:pPr>
             <a:r>
-              <a:rPr lang="en-US" sz="2200" b="1" dirty="0">
+              <a:rPr lang="en-US" sz="2200" b="1">
                 <a:solidFill>
                   <a:srgbClr val="C2410C"/>
                 </a:solidFill>
@@ -10682,7 +10682,7 @@
               </a:rPr>
               <a:t>JavaScript</a:t>
             </a:r>
-            <a:endParaRPr lang="en-US" sz="2200" dirty="0"/>
+            <a:endParaRPr lang="en-US" sz="2200"/>
           </a:p>
         </p:txBody>
       </p:sp>
@@ -10711,7 +10711,7 @@
               <a:buNone/>
             </a:pPr>
             <a:r>
-              <a:rPr lang="en-US" sz="2200" b="1" dirty="0">
+              <a:rPr lang="en-US" sz="2200" b="1">
                 <a:solidFill>
                   <a:srgbClr val="5A6472"/>
                 </a:solidFill>
@@ -10721,7 +10721,7 @@
               </a:rPr>
               <a:t>Python</a:t>
             </a:r>
-            <a:endParaRPr lang="en-US" sz="2200" dirty="0"/>
+            <a:endParaRPr lang="en-US" sz="2200"/>
           </a:p>
         </p:txBody>
       </p:sp>
@@ -10791,7 +10791,7 @@
               <a:buNone/>
             </a:pPr>
             <a:r>
-              <a:rPr lang="en-US" sz="1800" b="1" dirty="0">
+              <a:rPr lang="en-US" sz="1800" b="1">
                 <a:solidFill>
                   <a:srgbClr val="C2410C"/>
                 </a:solidFill>
@@ -10802,7 +10802,7 @@
               <a:t>const</a:t>
             </a:r>
             <a:r>
-              <a:rPr lang="en-US" sz="1800" dirty="0">
+              <a:rPr lang="en-US" sz="1800">
                 <a:solidFill>
                   <a:srgbClr val="17202A"/>
                 </a:solidFill>
@@ -10812,7 +10812,7 @@
               </a:rPr>
               <a:t> aluno = {</a:t>
             </a:r>
-            <a:endParaRPr lang="en-US" sz="1800" dirty="0"/>
+            <a:endParaRPr lang="en-US" sz="1800"/>
           </a:p>
           <a:p>
             <a:pPr marL="0" indent="0" algn="l">
@@ -10822,7 +10822,7 @@
               <a:buNone/>
             </a:pPr>
             <a:r>
-              <a:rPr lang="en-US" sz="1800" dirty="0">
+              <a:rPr lang="en-US" sz="1800">
                 <a:solidFill>
                   <a:srgbClr val="17202A"/>
                 </a:solidFill>
@@ -10832,7 +10832,7 @@
               </a:rPr>
               <a:t>  nome: "Ana",</a:t>
             </a:r>
-            <a:endParaRPr lang="en-US" sz="1800" dirty="0"/>
+            <a:endParaRPr lang="en-US" sz="1800"/>
           </a:p>
           <a:p>
             <a:pPr marL="0" indent="0" algn="l">
@@ -10842,7 +10842,7 @@
               <a:buNone/>
             </a:pPr>
             <a:r>
-              <a:rPr lang="en-US" sz="1800" dirty="0">
+              <a:rPr lang="en-US" sz="1800">
                 <a:solidFill>
                   <a:srgbClr val="17202A"/>
                 </a:solidFill>
@@ -10852,7 +10852,7 @@
               </a:rPr>
               <a:t>  idade: 20</a:t>
             </a:r>
-            <a:endParaRPr lang="en-US" sz="1800" dirty="0"/>
+            <a:endParaRPr lang="en-US" sz="1800"/>
           </a:p>
           <a:p>
             <a:pPr marL="0" indent="0" algn="l">
@@ -10862,7 +10862,7 @@
               <a:buNone/>
             </a:pPr>
             <a:r>
-              <a:rPr lang="en-US" sz="1800" dirty="0">
+              <a:rPr lang="en-US" sz="1800">
                 <a:solidFill>
                   <a:srgbClr val="17202A"/>
                 </a:solidFill>
@@ -10872,7 +10872,7 @@
               </a:rPr>
               <a:t>};</a:t>
             </a:r>
-            <a:endParaRPr lang="en-US" sz="1800" dirty="0"/>
+            <a:endParaRPr lang="en-US" sz="1800"/>
           </a:p>
           <a:p>
             <a:pPr marL="0" indent="0" algn="l">
@@ -10881,7 +10881,7 @@
               </a:lnSpc>
               <a:buNone/>
             </a:pPr>
-            <a:endParaRPr lang="en-US" sz="1800" dirty="0"/>
+            <a:endParaRPr lang="en-US" sz="1800"/>
           </a:p>
           <a:p>
             <a:pPr marL="0" indent="0" algn="l">
@@ -10891,7 +10891,7 @@
               <a:buNone/>
             </a:pPr>
             <a:r>
-              <a:rPr lang="en-US" sz="1800" b="1" dirty="0">
+              <a:rPr lang="en-US" sz="1800" b="1">
                 <a:solidFill>
                   <a:srgbClr val="C2410C"/>
                 </a:solidFill>
@@ -10902,7 +10902,7 @@
               <a:t>console</a:t>
             </a:r>
             <a:r>
-              <a:rPr lang="en-US" sz="1800" dirty="0">
+              <a:rPr lang="en-US" sz="1800">
                 <a:solidFill>
                   <a:srgbClr val="17202A"/>
                 </a:solidFill>
@@ -10913,7 +10913,7 @@
               <a:t>.</a:t>
             </a:r>
             <a:r>
-              <a:rPr lang="en-US" sz="1800" b="1" dirty="0">
+              <a:rPr lang="en-US" sz="1800" b="1">
                 <a:solidFill>
                   <a:srgbClr val="C2410C"/>
                 </a:solidFill>
@@ -10924,7 +10924,7 @@
               <a:t>log</a:t>
             </a:r>
             <a:r>
-              <a:rPr lang="en-US" sz="1800" dirty="0">
+              <a:rPr lang="en-US" sz="1800">
                 <a:solidFill>
                   <a:srgbClr val="17202A"/>
                 </a:solidFill>
@@ -10934,7 +10934,7 @@
               </a:rPr>
               <a:t>(aluno.nome);</a:t>
             </a:r>
-            <a:endParaRPr lang="en-US" sz="1800" dirty="0"/>
+            <a:endParaRPr lang="en-US" sz="1800"/>
           </a:p>
           <a:p>
             <a:pPr marL="0" indent="0" algn="l">
@@ -10944,7 +10944,7 @@
               <a:buNone/>
             </a:pPr>
             <a:r>
-              <a:rPr lang="en-US" sz="1800" b="1" dirty="0">
+              <a:rPr lang="en-US" sz="1800" b="1">
                 <a:solidFill>
                   <a:srgbClr val="C2410C"/>
                 </a:solidFill>
@@ -10955,7 +10955,7 @@
               <a:t>console</a:t>
             </a:r>
             <a:r>
-              <a:rPr lang="en-US" sz="1800" dirty="0">
+              <a:rPr lang="en-US" sz="1800">
                 <a:solidFill>
                   <a:srgbClr val="17202A"/>
                 </a:solidFill>
@@ -10966,7 +10966,7 @@
               <a:t>.</a:t>
             </a:r>
             <a:r>
-              <a:rPr lang="en-US" sz="1800" b="1" dirty="0">
+              <a:rPr lang="en-US" sz="1800" b="1">
                 <a:solidFill>
                   <a:srgbClr val="C2410C"/>
                 </a:solidFill>
@@ -10977,7 +10977,7 @@
               <a:t>log</a:t>
             </a:r>
             <a:r>
-              <a:rPr lang="en-US" sz="1800" dirty="0">
+              <a:rPr lang="en-US" sz="1800">
                 <a:solidFill>
                   <a:srgbClr val="17202A"/>
                 </a:solidFill>
@@ -10987,7 +10987,7 @@
               </a:rPr>
               <a:t>(aluno["idade"]);</a:t>
             </a:r>
-            <a:endParaRPr lang="en-US" sz="1800" dirty="0"/>
+            <a:endParaRPr lang="en-US" sz="1800"/>
           </a:p>
         </p:txBody>
       </p:sp>
@@ -11057,7 +11057,7 @@
               <a:buNone/>
             </a:pPr>
             <a:r>
-              <a:rPr lang="en-US" sz="1800" dirty="0">
+              <a:rPr lang="en-US" sz="1800">
                 <a:solidFill>
                   <a:srgbClr val="17202A"/>
                 </a:solidFill>
@@ -11067,7 +11067,7 @@
               </a:rPr>
               <a:t>aluno = {</a:t>
             </a:r>
-            <a:endParaRPr lang="en-US" sz="1800" dirty="0"/>
+            <a:endParaRPr lang="en-US" sz="1800"/>
           </a:p>
           <a:p>
             <a:pPr marL="0" indent="0" algn="l">
@@ -11077,7 +11077,7 @@
               <a:buNone/>
             </a:pPr>
             <a:r>
-              <a:rPr lang="en-US" sz="1800" dirty="0">
+              <a:rPr lang="en-US" sz="1800">
                 <a:solidFill>
                   <a:srgbClr val="17202A"/>
                 </a:solidFill>
@@ -11087,7 +11087,7 @@
               </a:rPr>
               <a:t>    "nome": "Ana",</a:t>
             </a:r>
-            <a:endParaRPr lang="en-US" sz="1800" dirty="0"/>
+            <a:endParaRPr lang="en-US" sz="1800"/>
           </a:p>
           <a:p>
             <a:pPr marL="0" indent="0" algn="l">
@@ -11097,7 +11097,7 @@
               <a:buNone/>
             </a:pPr>
             <a:r>
-              <a:rPr lang="en-US" sz="1800" dirty="0">
+              <a:rPr lang="en-US" sz="1800">
                 <a:solidFill>
                   <a:srgbClr val="17202A"/>
                 </a:solidFill>
@@ -11107,7 +11107,7 @@
               </a:rPr>
               <a:t>    "idade": 20</a:t>
             </a:r>
-            <a:endParaRPr lang="en-US" sz="1800" dirty="0"/>
+            <a:endParaRPr lang="en-US" sz="1800"/>
           </a:p>
           <a:p>
             <a:pPr marL="0" indent="0" algn="l">
@@ -11117,7 +11117,7 @@
               <a:buNone/>
             </a:pPr>
             <a:r>
-              <a:rPr lang="en-US" sz="1800" dirty="0">
+              <a:rPr lang="en-US" sz="1800">
                 <a:solidFill>
                   <a:srgbClr val="17202A"/>
                 </a:solidFill>
@@ -11127,7 +11127,7 @@
               </a:rPr>
               <a:t>}</a:t>
             </a:r>
-            <a:endParaRPr lang="en-US" sz="1800" dirty="0"/>
+            <a:endParaRPr lang="en-US" sz="1800"/>
           </a:p>
           <a:p>
             <a:pPr marL="0" indent="0" algn="l">
@@ -11136,7 +11136,7 @@
               </a:lnSpc>
               <a:buNone/>
             </a:pPr>
-            <a:endParaRPr lang="en-US" sz="1800" dirty="0"/>
+            <a:endParaRPr lang="en-US" sz="1800"/>
           </a:p>
           <a:p>
             <a:pPr marL="0" indent="0" algn="l">
@@ -11146,7 +11146,7 @@
               <a:buNone/>
             </a:pPr>
             <a:r>
-              <a:rPr lang="en-US" sz="1800" b="1" dirty="0">
+              <a:rPr lang="en-US" sz="1800" b="1">
                 <a:solidFill>
                   <a:srgbClr val="C2410C"/>
                 </a:solidFill>
@@ -11157,7 +11157,7 @@
               <a:t>print</a:t>
             </a:r>
             <a:r>
-              <a:rPr lang="en-US" sz="1800" dirty="0">
+              <a:rPr lang="en-US" sz="1800">
                 <a:solidFill>
                   <a:srgbClr val="17202A"/>
                 </a:solidFill>
@@ -11167,7 +11167,7 @@
               </a:rPr>
               <a:t>(aluno["nome"])</a:t>
             </a:r>
-            <a:endParaRPr lang="en-US" sz="1800" dirty="0"/>
+            <a:endParaRPr lang="en-US" sz="1800"/>
           </a:p>
           <a:p>
             <a:pPr marL="0" indent="0" algn="l">
@@ -11177,7 +11177,7 @@
               <a:buNone/>
             </a:pPr>
             <a:r>
-              <a:rPr lang="en-US" sz="1800" b="1" dirty="0">
+              <a:rPr lang="en-US" sz="1800" b="1">
                 <a:solidFill>
                   <a:srgbClr val="C2410C"/>
                 </a:solidFill>
@@ -11188,7 +11188,7 @@
               <a:t>print</a:t>
             </a:r>
             <a:r>
-              <a:rPr lang="en-US" sz="1800" dirty="0">
+              <a:rPr lang="en-US" sz="1800">
                 <a:solidFill>
                   <a:srgbClr val="17202A"/>
                 </a:solidFill>
@@ -11198,7 +11198,7 @@
               </a:rPr>
               <a:t>(aluno["idade"])</a:t>
             </a:r>
-            <a:endParaRPr lang="en-US" sz="1800" dirty="0"/>
+            <a:endParaRPr lang="en-US" sz="1800"/>
           </a:p>
         </p:txBody>
       </p:sp>
@@ -11227,7 +11227,7 @@
               <a:buNone/>
             </a:pPr>
             <a:r>
-              <a:rPr lang="en-US" sz="1900" i="1" dirty="0">
+              <a:rPr lang="en-US" sz="1900" i="1">
                 <a:solidFill>
                   <a:srgbClr val="5A6472"/>
                 </a:solidFill>
@@ -11237,7 +11237,7 @@
               </a:rPr>
               <a:t>No objeto do JS as chaves são escritas sem aspas e podem ser acessadas com ponto.</a:t>
             </a:r>
-            <a:endParaRPr lang="en-US" sz="1900" dirty="0"/>
+            <a:endParaRPr lang="en-US" sz="1900"/>
           </a:p>
         </p:txBody>
       </p:sp>
@@ -11295,7 +11295,7 @@
               <a:buNone/>
             </a:pPr>
             <a:r>
-              <a:rPr lang="en-US" sz="3400" b="1" dirty="0">
+              <a:rPr lang="en-US" sz="3400" b="1">
                 <a:solidFill>
                   <a:srgbClr val="17202A"/>
                 </a:solidFill>
@@ -11305,7 +11305,7 @@
               </a:rPr>
               <a:t>typeof x type()</a:t>
             </a:r>
-            <a:endParaRPr lang="en-US" sz="3400" dirty="0"/>
+            <a:endParaRPr lang="en-US" sz="3400"/>
           </a:p>
         </p:txBody>
       </p:sp>
@@ -11372,7 +11372,7 @@
               <a:buNone/>
             </a:pPr>
             <a:r>
-              <a:rPr lang="en-US" sz="2200" b="1" dirty="0">
+              <a:rPr lang="en-US" sz="2200" b="1">
                 <a:solidFill>
                   <a:srgbClr val="C2410C"/>
                 </a:solidFill>
@@ -11382,7 +11382,7 @@
               </a:rPr>
               <a:t>JavaScript</a:t>
             </a:r>
-            <a:endParaRPr lang="en-US" sz="2200" dirty="0"/>
+            <a:endParaRPr lang="en-US" sz="2200"/>
           </a:p>
         </p:txBody>
       </p:sp>
@@ -11411,7 +11411,7 @@
               <a:buNone/>
             </a:pPr>
             <a:r>
-              <a:rPr lang="en-US" sz="2200" b="1" dirty="0">
+              <a:rPr lang="en-US" sz="2200" b="1">
                 <a:solidFill>
                   <a:srgbClr val="5A6472"/>
                 </a:solidFill>
@@ -11421,7 +11421,7 @@
               </a:rPr>
               <a:t>Python</a:t>
             </a:r>
-            <a:endParaRPr lang="en-US" sz="2200" dirty="0"/>
+            <a:endParaRPr lang="en-US" sz="2200"/>
           </a:p>
         </p:txBody>
       </p:sp>
@@ -11491,7 +11491,7 @@
               <a:buNone/>
             </a:pPr>
             <a:r>
-              <a:rPr lang="en-US" sz="1800" i="1" dirty="0">
+              <a:rPr lang="en-US" sz="1800" i="1">
                 <a:solidFill>
                   <a:srgbClr val="5A6472"/>
                 </a:solidFill>
@@ -11501,7 +11501,7 @@
               </a:rPr>
               <a:t>// devolve o tipo como texto</a:t>
             </a:r>
-            <a:endParaRPr lang="en-US" sz="1800" dirty="0"/>
+            <a:endParaRPr lang="en-US" sz="1800"/>
           </a:p>
           <a:p>
             <a:pPr marL="0" indent="0" algn="l">
@@ -11511,7 +11511,7 @@
               <a:buNone/>
             </a:pPr>
             <a:r>
-              <a:rPr lang="en-US" sz="1800" b="1" dirty="0">
+              <a:rPr lang="en-US" sz="1800" b="1">
                 <a:solidFill>
                   <a:srgbClr val="C2410C"/>
                 </a:solidFill>
@@ -11522,7 +11522,7 @@
               <a:t>typeof</a:t>
             </a:r>
             <a:r>
-              <a:rPr lang="en-US" sz="1800" dirty="0">
+              <a:rPr lang="en-US" sz="1800">
                 <a:solidFill>
                   <a:srgbClr val="17202A"/>
                 </a:solidFill>
@@ -11532,7 +11532,7 @@
               </a:rPr>
               <a:t> "Ana";  // "string"</a:t>
             </a:r>
-            <a:endParaRPr lang="en-US" sz="1800" dirty="0"/>
+            <a:endParaRPr lang="en-US" sz="1800"/>
           </a:p>
           <a:p>
             <a:pPr marL="0" indent="0" algn="l">
@@ -11542,7 +11542,7 @@
               <a:buNone/>
             </a:pPr>
             <a:r>
-              <a:rPr lang="en-US" sz="1800" b="1" dirty="0">
+              <a:rPr lang="en-US" sz="1800" b="1">
                 <a:solidFill>
                   <a:srgbClr val="C2410C"/>
                 </a:solidFill>
@@ -11553,7 +11553,7 @@
               <a:t>typeof</a:t>
             </a:r>
             <a:r>
-              <a:rPr lang="en-US" sz="1800" dirty="0">
+              <a:rPr lang="en-US" sz="1800">
                 <a:solidFill>
                   <a:srgbClr val="17202A"/>
                 </a:solidFill>
@@ -11563,7 +11563,7 @@
               </a:rPr>
               <a:t> 20;     // "number"</a:t>
             </a:r>
-            <a:endParaRPr lang="en-US" sz="1800" dirty="0"/>
+            <a:endParaRPr lang="en-US" sz="1800"/>
           </a:p>
           <a:p>
             <a:pPr marL="0" indent="0" algn="l">
@@ -11573,7 +11573,7 @@
               <a:buNone/>
             </a:pPr>
             <a:r>
-              <a:rPr lang="en-US" sz="1800" b="1" dirty="0">
+              <a:rPr lang="en-US" sz="1800" b="1">
                 <a:solidFill>
                   <a:srgbClr val="C2410C"/>
                 </a:solidFill>
@@ -11584,7 +11584,7 @@
               <a:t>typeof</a:t>
             </a:r>
             <a:r>
-              <a:rPr lang="en-US" sz="1800" dirty="0">
+              <a:rPr lang="en-US" sz="1800">
                 <a:solidFill>
                   <a:srgbClr val="17202A"/>
                 </a:solidFill>
@@ -11595,7 +11595,7 @@
               <a:t> </a:t>
             </a:r>
             <a:r>
-              <a:rPr lang="en-US" sz="1800" b="1" dirty="0">
+              <a:rPr lang="en-US" sz="1800" b="1">
                 <a:solidFill>
                   <a:srgbClr val="C2410C"/>
                 </a:solidFill>
@@ -11606,7 +11606,7 @@
               <a:t>true</a:t>
             </a:r>
             <a:r>
-              <a:rPr lang="en-US" sz="1800" dirty="0">
+              <a:rPr lang="en-US" sz="1800">
                 <a:solidFill>
                   <a:srgbClr val="17202A"/>
                 </a:solidFill>
@@ -11616,7 +11616,7 @@
               </a:rPr>
               <a:t>;   // "boolean"</a:t>
             </a:r>
-            <a:endParaRPr lang="en-US" sz="1800" dirty="0"/>
+            <a:endParaRPr lang="en-US" sz="1800"/>
           </a:p>
           <a:p>
             <a:pPr marL="0" indent="0" algn="l">
@@ -11626,7 +11626,7 @@
               <a:buNone/>
             </a:pPr>
             <a:r>
-              <a:rPr lang="en-US" sz="1800" b="1" dirty="0">
+              <a:rPr lang="en-US" sz="1800" b="1">
                 <a:solidFill>
                   <a:srgbClr val="C2410C"/>
                 </a:solidFill>
@@ -11637,7 +11637,7 @@
               <a:t>typeof</a:t>
             </a:r>
             <a:r>
-              <a:rPr lang="en-US" sz="1800" dirty="0">
+              <a:rPr lang="en-US" sz="1800">
                 <a:solidFill>
                   <a:srgbClr val="17202A"/>
                 </a:solidFill>
@@ -11648,7 +11648,7 @@
               <a:t> x;      // "</a:t>
             </a:r>
             <a:r>
-              <a:rPr lang="en-US" sz="1800" b="1" dirty="0">
+              <a:rPr lang="en-US" sz="1800" b="1">
                 <a:solidFill>
                   <a:srgbClr val="C2410C"/>
                 </a:solidFill>
@@ -11659,7 +11659,7 @@
               <a:t>undefined</a:t>
             </a:r>
             <a:r>
-              <a:rPr lang="en-US" sz="1800" dirty="0">
+              <a:rPr lang="en-US" sz="1800">
                 <a:solidFill>
                   <a:srgbClr val="17202A"/>
                 </a:solidFill>
@@ -11669,7 +11669,7 @@
               </a:rPr>
               <a:t>"</a:t>
             </a:r>
-            <a:endParaRPr lang="en-US" sz="1800" dirty="0"/>
+            <a:endParaRPr lang="en-US" sz="1800"/>
           </a:p>
         </p:txBody>
       </p:sp>
@@ -11739,7 +11739,7 @@
               <a:buNone/>
             </a:pPr>
             <a:r>
-              <a:rPr lang="en-US" sz="1800" i="1" dirty="0">
+              <a:rPr lang="en-US" sz="1800" i="1">
                 <a:solidFill>
                   <a:srgbClr val="5A6472"/>
                 </a:solidFill>
@@ -11749,7 +11749,7 @@
               </a:rPr>
               <a:t># devolve um objeto de classe</a:t>
             </a:r>
-            <a:endParaRPr lang="en-US" sz="1800" dirty="0"/>
+            <a:endParaRPr lang="en-US" sz="1800"/>
           </a:p>
           <a:p>
             <a:pPr marL="0" indent="0" algn="l">
@@ -11759,7 +11759,7 @@
               <a:buNone/>
             </a:pPr>
             <a:r>
-              <a:rPr lang="en-US" sz="1800" b="1" dirty="0">
+              <a:rPr lang="en-US" sz="1800" b="1">
                 <a:solidFill>
                   <a:srgbClr val="C2410C"/>
                 </a:solidFill>
@@ -11770,7 +11770,7 @@
               <a:t>type</a:t>
             </a:r>
             <a:r>
-              <a:rPr lang="en-US" sz="1800" dirty="0">
+              <a:rPr lang="en-US" sz="1800">
                 <a:solidFill>
                   <a:srgbClr val="17202A"/>
                 </a:solidFill>
@@ -11781,7 +11781,7 @@
               <a:t>("Ana")  # </a:t>
             </a:r>
             <a:r>
-              <a:rPr lang="en-US" sz="1800" b="1" dirty="0">
+              <a:rPr lang="en-US" sz="1800" b="1">
                 <a:solidFill>
                   <a:srgbClr val="C2410C"/>
                 </a:solidFill>
@@ -11791,7 +11791,7 @@
               </a:rPr>
               <a:t>str</a:t>
             </a:r>
-            <a:endParaRPr lang="en-US" sz="1800" dirty="0"/>
+            <a:endParaRPr lang="en-US" sz="1800"/>
           </a:p>
           <a:p>
             <a:pPr marL="0" indent="0" algn="l">
@@ -11801,7 +11801,7 @@
               <a:buNone/>
             </a:pPr>
             <a:r>
-              <a:rPr lang="en-US" sz="1800" b="1" dirty="0">
+              <a:rPr lang="en-US" sz="1800" b="1">
                 <a:solidFill>
                   <a:srgbClr val="C2410C"/>
                 </a:solidFill>
@@ -11812,7 +11812,7 @@
               <a:t>type</a:t>
             </a:r>
             <a:r>
-              <a:rPr lang="en-US" sz="1800" dirty="0">
+              <a:rPr lang="en-US" sz="1800">
                 <a:solidFill>
                   <a:srgbClr val="17202A"/>
                 </a:solidFill>
@@ -11823,7 +11823,7 @@
               <a:t>(20)     # </a:t>
             </a:r>
             <a:r>
-              <a:rPr lang="en-US" sz="1800" b="1" dirty="0">
+              <a:rPr lang="en-US" sz="1800" b="1">
                 <a:solidFill>
                   <a:srgbClr val="C2410C"/>
                 </a:solidFill>
@@ -11833,7 +11833,7 @@
               </a:rPr>
               <a:t>int</a:t>
             </a:r>
-            <a:endParaRPr lang="en-US" sz="1800" dirty="0"/>
+            <a:endParaRPr lang="en-US" sz="1800"/>
           </a:p>
           <a:p>
             <a:pPr marL="0" indent="0" algn="l">
@@ -11843,7 +11843,7 @@
               <a:buNone/>
             </a:pPr>
             <a:r>
-              <a:rPr lang="en-US" sz="1800" b="1" dirty="0">
+              <a:rPr lang="en-US" sz="1800" b="1">
                 <a:solidFill>
                   <a:srgbClr val="C2410C"/>
                 </a:solidFill>
@@ -11854,7 +11854,7 @@
               <a:t>type</a:t>
             </a:r>
             <a:r>
-              <a:rPr lang="en-US" sz="1800" dirty="0">
+              <a:rPr lang="en-US" sz="1800">
                 <a:solidFill>
                   <a:srgbClr val="17202A"/>
                 </a:solidFill>
@@ -11865,7 +11865,7 @@
               <a:t>(</a:t>
             </a:r>
             <a:r>
-              <a:rPr lang="en-US" sz="1800" b="1" dirty="0">
+              <a:rPr lang="en-US" sz="1800" b="1">
                 <a:solidFill>
                   <a:srgbClr val="C2410C"/>
                 </a:solidFill>
@@ -11876,7 +11876,7 @@
               <a:t>True</a:t>
             </a:r>
             <a:r>
-              <a:rPr lang="en-US" sz="1800" dirty="0">
+              <a:rPr lang="en-US" sz="1800">
                 <a:solidFill>
                   <a:srgbClr val="17202A"/>
                 </a:solidFill>
@@ -11887,7 +11887,7 @@
               <a:t>)   # </a:t>
             </a:r>
             <a:r>
-              <a:rPr lang="en-US" sz="1800" b="1" dirty="0">
+              <a:rPr lang="en-US" sz="1800" b="1">
                 <a:solidFill>
                   <a:srgbClr val="C2410C"/>
                 </a:solidFill>
@@ -11897,7 +11897,7 @@
               </a:rPr>
               <a:t>bool</a:t>
             </a:r>
-            <a:endParaRPr lang="en-US" sz="1800" dirty="0"/>
+            <a:endParaRPr lang="en-US" sz="1800"/>
           </a:p>
           <a:p>
             <a:pPr marL="0" indent="0" algn="l">
@@ -11907,7 +11907,7 @@
               <a:buNone/>
             </a:pPr>
             <a:r>
-              <a:rPr lang="en-US" sz="1800" b="1" dirty="0">
+              <a:rPr lang="en-US" sz="1800" b="1">
                 <a:solidFill>
                   <a:srgbClr val="C2410C"/>
                 </a:solidFill>
@@ -11918,7 +11918,7 @@
               <a:t>type</a:t>
             </a:r>
             <a:r>
-              <a:rPr lang="en-US" sz="1800" dirty="0">
+              <a:rPr lang="en-US" sz="1800">
                 <a:solidFill>
                   <a:srgbClr val="17202A"/>
                 </a:solidFill>
@@ -11929,7 +11929,7 @@
               <a:t>(</a:t>
             </a:r>
             <a:r>
-              <a:rPr lang="en-US" sz="1800" b="1" dirty="0">
+              <a:rPr lang="en-US" sz="1800" b="1">
                 <a:solidFill>
                   <a:srgbClr val="C2410C"/>
                 </a:solidFill>
@@ -11940,7 +11940,7 @@
               <a:t>None</a:t>
             </a:r>
             <a:r>
-              <a:rPr lang="en-US" sz="1800" dirty="0">
+              <a:rPr lang="en-US" sz="1800">
                 <a:solidFill>
                   <a:srgbClr val="17202A"/>
                 </a:solidFill>
@@ -11950,7 +11950,7 @@
               </a:rPr>
               <a:t>)   # NoneType</a:t>
             </a:r>
-            <a:endParaRPr lang="en-US" sz="1800" dirty="0"/>
+            <a:endParaRPr lang="en-US" sz="1800"/>
           </a:p>
         </p:txBody>
       </p:sp>
@@ -11979,7 +11979,7 @@
               <a:buNone/>
             </a:pPr>
             <a:r>
-              <a:rPr lang="en-US" sz="1900" i="1" dirty="0">
+              <a:rPr lang="en-US" sz="1900" i="1">
                 <a:solidFill>
                   <a:srgbClr val="5A6472"/>
                 </a:solidFill>
@@ -11989,7 +11989,7 @@
               </a:rPr>
               <a:t>typeof devolve o nome do tipo como texto e é útil para depurar valores inesperados.</a:t>
             </a:r>
-            <a:endParaRPr lang="en-US" sz="1900" dirty="0"/>
+            <a:endParaRPr lang="en-US" sz="1900"/>
           </a:p>
         </p:txBody>
       </p:sp>
@@ -12047,7 +12047,7 @@
               <a:buNone/>
             </a:pPr>
             <a:r>
-              <a:rPr lang="en-US" sz="3400" b="1" dirty="0">
+              <a:rPr lang="en-US" sz="3400" b="1">
                 <a:solidFill>
                   <a:srgbClr val="17202A"/>
                 </a:solidFill>
@@ -12057,7 +12057,7 @@
               </a:rPr>
               <a:t>Template literals x f-strings</a:t>
             </a:r>
-            <a:endParaRPr lang="en-US" sz="3400" dirty="0"/>
+            <a:endParaRPr lang="en-US" sz="3400"/>
           </a:p>
         </p:txBody>
       </p:sp>
@@ -12124,7 +12124,7 @@
               <a:buNone/>
             </a:pPr>
             <a:r>
-              <a:rPr lang="en-US" sz="2200" b="1" dirty="0">
+              <a:rPr lang="en-US" sz="2200" b="1">
                 <a:solidFill>
                   <a:srgbClr val="C2410C"/>
                 </a:solidFill>
@@ -12134,7 +12134,7 @@
               </a:rPr>
               <a:t>JavaScript</a:t>
             </a:r>
-            <a:endParaRPr lang="en-US" sz="2200" dirty="0"/>
+            <a:endParaRPr lang="en-US" sz="2200"/>
           </a:p>
         </p:txBody>
       </p:sp>
@@ -12163,7 +12163,7 @@
               <a:buNone/>
             </a:pPr>
             <a:r>
-              <a:rPr lang="en-US" sz="2200" b="1" dirty="0">
+              <a:rPr lang="en-US" sz="2200" b="1">
                 <a:solidFill>
                   <a:srgbClr val="5A6472"/>
                 </a:solidFill>
@@ -12173,7 +12173,7 @@
               </a:rPr>
               <a:t>Python</a:t>
             </a:r>
-            <a:endParaRPr lang="en-US" sz="2200" dirty="0"/>
+            <a:endParaRPr lang="en-US" sz="2200"/>
           </a:p>
         </p:txBody>
       </p:sp>
@@ -12243,7 +12243,7 @@
               <a:buNone/>
             </a:pPr>
             <a:r>
-              <a:rPr lang="en-US" sz="1800" b="1" dirty="0">
+              <a:rPr lang="en-US" sz="1800" b="1">
                 <a:solidFill>
                   <a:srgbClr val="C2410C"/>
                 </a:solidFill>
@@ -12254,7 +12254,7 @@
               <a:t>const</a:t>
             </a:r>
             <a:r>
-              <a:rPr lang="en-US" sz="1800" dirty="0">
+              <a:rPr lang="en-US" sz="1800">
                 <a:solidFill>
                   <a:srgbClr val="17202A"/>
                 </a:solidFill>
@@ -12264,7 +12264,7 @@
               </a:rPr>
               <a:t> nome = "Ana";</a:t>
             </a:r>
-            <a:endParaRPr lang="en-US" sz="1800" dirty="0"/>
+            <a:endParaRPr lang="en-US" sz="1800"/>
           </a:p>
           <a:p>
             <a:pPr marL="0" indent="0" algn="l">
@@ -12274,7 +12274,7 @@
               <a:buNone/>
             </a:pPr>
             <a:r>
-              <a:rPr lang="en-US" sz="1800" b="1" dirty="0">
+              <a:rPr lang="en-US" sz="1800" b="1">
                 <a:solidFill>
                   <a:srgbClr val="C2410C"/>
                 </a:solidFill>
@@ -12285,7 +12285,7 @@
               <a:t>const</a:t>
             </a:r>
             <a:r>
-              <a:rPr lang="en-US" sz="1800" dirty="0">
+              <a:rPr lang="en-US" sz="1800">
                 <a:solidFill>
                   <a:srgbClr val="17202A"/>
                 </a:solidFill>
@@ -12295,7 +12295,7 @@
               </a:rPr>
               <a:t> nota = 8.5;</a:t>
             </a:r>
-            <a:endParaRPr lang="en-US" sz="1800" dirty="0"/>
+            <a:endParaRPr lang="en-US" sz="1800"/>
           </a:p>
           <a:p>
             <a:pPr marL="0" indent="0" algn="l">
@@ -12304,7 +12304,7 @@
               </a:lnSpc>
               <a:buNone/>
             </a:pPr>
-            <a:endParaRPr lang="en-US" sz="1800" dirty="0"/>
+            <a:endParaRPr lang="en-US" sz="1800"/>
           </a:p>
           <a:p>
             <a:pPr marL="0" indent="0" algn="l">
@@ -12314,7 +12314,7 @@
               <a:buNone/>
             </a:pPr>
             <a:r>
-              <a:rPr lang="en-US" sz="1800" b="1" dirty="0">
+              <a:rPr lang="en-US" sz="1800" b="1">
                 <a:solidFill>
                   <a:srgbClr val="C2410C"/>
                 </a:solidFill>
@@ -12325,7 +12325,7 @@
               <a:t>console</a:t>
             </a:r>
             <a:r>
-              <a:rPr lang="en-US" sz="1800" dirty="0">
+              <a:rPr lang="en-US" sz="1800">
                 <a:solidFill>
                   <a:srgbClr val="17202A"/>
                 </a:solidFill>
@@ -12336,7 +12336,7 @@
               <a:t>.</a:t>
             </a:r>
             <a:r>
-              <a:rPr lang="en-US" sz="1800" b="1" dirty="0">
+              <a:rPr lang="en-US" sz="1800" b="1">
                 <a:solidFill>
                   <a:srgbClr val="C2410C"/>
                 </a:solidFill>
@@ -12347,7 +12347,7 @@
               <a:t>log</a:t>
             </a:r>
             <a:r>
-              <a:rPr lang="en-US" sz="1800" dirty="0">
+              <a:rPr lang="en-US" sz="1800">
                 <a:solidFill>
                   <a:srgbClr val="17202A"/>
                 </a:solidFill>
@@ -12357,7 +12357,7 @@
               </a:rPr>
               <a:t>(`${nome} tirou ${nota}`);</a:t>
             </a:r>
-            <a:endParaRPr lang="en-US" sz="1800" dirty="0"/>
+            <a:endParaRPr lang="en-US" sz="1800"/>
           </a:p>
           <a:p>
             <a:pPr marL="0" indent="0" algn="l">
@@ -12367,7 +12367,7 @@
               <a:buNone/>
             </a:pPr>
             <a:r>
-              <a:rPr lang="en-US" sz="1800" i="1" dirty="0">
+              <a:rPr lang="en-US" sz="1800" i="1">
                 <a:solidFill>
                   <a:srgbClr val="5A6472"/>
                 </a:solidFill>
@@ -12377,7 +12377,7 @@
               </a:rPr>
               <a:t>// Ana tirou 8.5</a:t>
             </a:r>
-            <a:endParaRPr lang="en-US" sz="1800" dirty="0"/>
+            <a:endParaRPr lang="en-US" sz="1800"/>
           </a:p>
         </p:txBody>
       </p:sp>
@@ -12447,7 +12447,7 @@
               <a:buNone/>
             </a:pPr>
             <a:r>
-              <a:rPr lang="en-US" sz="1800" dirty="0">
+              <a:rPr lang="en-US" sz="1800">
                 <a:solidFill>
                   <a:srgbClr val="17202A"/>
                 </a:solidFill>
@@ -12457,7 +12457,7 @@
               </a:rPr>
               <a:t>nome = "Ana"</a:t>
             </a:r>
-            <a:endParaRPr lang="en-US" sz="1800" dirty="0"/>
+            <a:endParaRPr lang="en-US" sz="1800"/>
           </a:p>
           <a:p>
             <a:pPr marL="0" indent="0" algn="l">
@@ -12467,7 +12467,7 @@
               <a:buNone/>
             </a:pPr>
             <a:r>
-              <a:rPr lang="en-US" sz="1800" dirty="0">
+              <a:rPr lang="en-US" sz="1800">
                 <a:solidFill>
                   <a:srgbClr val="17202A"/>
                 </a:solidFill>
@@ -12477,7 +12477,7 @@
               </a:rPr>
               <a:t>nota = 8.5</a:t>
             </a:r>
-            <a:endParaRPr lang="en-US" sz="1800" dirty="0"/>
+            <a:endParaRPr lang="en-US" sz="1800"/>
           </a:p>
           <a:p>
             <a:pPr marL="0" indent="0" algn="l">
@@ -12486,7 +12486,7 @@
               </a:lnSpc>
               <a:buNone/>
             </a:pPr>
-            <a:endParaRPr lang="en-US" sz="1800" dirty="0"/>
+            <a:endParaRPr lang="en-US" sz="1800"/>
           </a:p>
           <a:p>
             <a:pPr marL="0" indent="0" algn="l">
@@ -12496,7 +12496,7 @@
               <a:buNone/>
             </a:pPr>
             <a:r>
-              <a:rPr lang="en-US" sz="1800" b="1" dirty="0">
+              <a:rPr lang="en-US" sz="1800" b="1">
                 <a:solidFill>
                   <a:srgbClr val="C2410C"/>
                 </a:solidFill>
@@ -12507,7 +12507,7 @@
               <a:t>print</a:t>
             </a:r>
             <a:r>
-              <a:rPr lang="en-US" sz="1800" dirty="0">
+              <a:rPr lang="en-US" sz="1800">
                 <a:solidFill>
                   <a:srgbClr val="17202A"/>
                 </a:solidFill>
@@ -12517,7 +12517,7 @@
               </a:rPr>
               <a:t>(f"{nome} tirou {nota}")</a:t>
             </a:r>
-            <a:endParaRPr lang="en-US" sz="1800" dirty="0"/>
+            <a:endParaRPr lang="en-US" sz="1800"/>
           </a:p>
           <a:p>
             <a:pPr marL="0" indent="0" algn="l">
@@ -12527,7 +12527,7 @@
               <a:buNone/>
             </a:pPr>
             <a:r>
-              <a:rPr lang="en-US" sz="1800" i="1" dirty="0">
+              <a:rPr lang="en-US" sz="1800" i="1">
                 <a:solidFill>
                   <a:srgbClr val="5A6472"/>
                 </a:solidFill>
@@ -12537,7 +12537,7 @@
               </a:rPr>
               <a:t># Ana tirou 8.5</a:t>
             </a:r>
-            <a:endParaRPr lang="en-US" sz="1800" dirty="0"/>
+            <a:endParaRPr lang="en-US" sz="1800"/>
           </a:p>
         </p:txBody>
       </p:sp>
@@ -12566,7 +12566,7 @@
               <a:buNone/>
             </a:pPr>
             <a:r>
-              <a:rPr lang="en-US" sz="1900" i="1" dirty="0">
+              <a:rPr lang="en-US" sz="1900" i="1">
                 <a:solidFill>
                   <a:srgbClr val="5A6472"/>
                 </a:solidFill>
@@ -12576,7 +12576,7 @@
               </a:rPr>
               <a:t>Em JS, o texto vai entre crases e a expressão dentro de ${ }.</a:t>
             </a:r>
-            <a:endParaRPr lang="en-US" sz="1900" dirty="0"/>
+            <a:endParaRPr lang="en-US" sz="1900"/>
           </a:p>
         </p:txBody>
       </p:sp>
@@ -12646,7 +12646,7 @@
               <a:buNone/>
             </a:pPr>
             <a:r>
-              <a:rPr lang="en-US" sz="3400" b="1" dirty="0">
+              <a:rPr lang="en-US" sz="3400" b="1">
                 <a:solidFill>
                   <a:srgbClr val="17202A"/>
                 </a:solidFill>
@@ -12656,7 +12656,7 @@
               </a:rPr>
               <a:t>O plano</a:t>
             </a:r>
-            <a:endParaRPr lang="en-US" sz="3400" dirty="0"/>
+            <a:endParaRPr lang="en-US" sz="3400"/>
           </a:p>
         </p:txBody>
       </p:sp>
@@ -12737,7 +12737,7 @@
               <a:buAutoNum type="arabicPeriod"/>
             </a:pPr>
             <a:r>
-              <a:rPr lang="en-US" sz="2600" b="1" dirty="0">
+              <a:rPr lang="en-US" sz="2600" b="1">
                 <a:solidFill>
                   <a:srgbClr val="17202A"/>
                 </a:solidFill>
@@ -12748,7 +12748,7 @@
               <a:t>JavaScript:</a:t>
             </a:r>
             <a:r>
-              <a:rPr lang="en-US" sz="2600" dirty="0">
+              <a:rPr lang="en-US" sz="2600">
                 <a:solidFill>
                   <a:srgbClr val="17202A"/>
                 </a:solidFill>
@@ -12759,7 +12759,7 @@
               <a:t> </a:t>
             </a:r>
             <a:r>
-              <a:rPr lang="en-US" sz="2600" dirty="0" err="1">
+              <a:rPr lang="en-US" sz="2600" err="1">
                 <a:solidFill>
                   <a:srgbClr val="17202A"/>
                 </a:solidFill>
@@ -12770,7 +12770,7 @@
               <a:t>linguagem</a:t>
             </a:r>
             <a:r>
-              <a:rPr lang="en-US" sz="2600" dirty="0">
+              <a:rPr lang="en-US" sz="2600">
                 <a:solidFill>
                   <a:srgbClr val="17202A"/>
                 </a:solidFill>
@@ -12781,7 +12781,7 @@
               <a:t> </a:t>
             </a:r>
             <a:r>
-              <a:rPr lang="en-US" sz="2600" dirty="0" err="1">
+              <a:rPr lang="en-US" sz="2600" err="1">
                 <a:solidFill>
                   <a:srgbClr val="17202A"/>
                 </a:solidFill>
@@ -12792,7 +12792,7 @@
               <a:t>interpretada</a:t>
             </a:r>
             <a:r>
-              <a:rPr lang="en-US" sz="2600" dirty="0">
+              <a:rPr lang="en-US" sz="2600">
                 <a:solidFill>
                   <a:srgbClr val="17202A"/>
                 </a:solidFill>
@@ -12803,7 +12803,7 @@
               <a:t> e </a:t>
             </a:r>
             <a:r>
-              <a:rPr lang="en-US" sz="2600" dirty="0" err="1">
+              <a:rPr lang="en-US" sz="2600" err="1">
                 <a:solidFill>
                   <a:srgbClr val="17202A"/>
                 </a:solidFill>
@@ -12814,7 +12814,7 @@
               <a:t>dinamicamente</a:t>
             </a:r>
             <a:r>
-              <a:rPr lang="en-US" sz="2600" dirty="0">
+              <a:rPr lang="en-US" sz="2600">
                 <a:solidFill>
                   <a:srgbClr val="17202A"/>
                 </a:solidFill>
@@ -12825,7 +12825,7 @@
               <a:t> </a:t>
             </a:r>
             <a:r>
-              <a:rPr lang="en-US" sz="2600" dirty="0" err="1">
+              <a:rPr lang="en-US" sz="2600" err="1">
                 <a:solidFill>
                   <a:srgbClr val="17202A"/>
                 </a:solidFill>
@@ -12836,7 +12836,7 @@
               <a:t>tipada</a:t>
             </a:r>
             <a:r>
-              <a:rPr lang="en-US" sz="2600" dirty="0">
+              <a:rPr lang="en-US" sz="2600">
                 <a:solidFill>
                   <a:srgbClr val="17202A"/>
                 </a:solidFill>
@@ -12857,7 +12857,7 @@
               <a:buAutoNum type="arabicPeriod"/>
             </a:pPr>
             <a:r>
-              <a:rPr lang="en-US" sz="2600" b="1" dirty="0">
+              <a:rPr lang="en-US" sz="2600" b="1">
                 <a:solidFill>
                   <a:srgbClr val="17202A"/>
                 </a:solidFill>
@@ -12868,7 +12868,7 @@
               <a:t>Node.js + Express: </a:t>
             </a:r>
             <a:r>
-              <a:rPr lang="en-US" sz="2600" dirty="0">
+              <a:rPr lang="en-US" sz="2600">
                 <a:solidFill>
                   <a:srgbClr val="17202A"/>
                 </a:solidFill>
@@ -12879,7 +12879,7 @@
               <a:t>Node é o runtime </a:t>
             </a:r>
             <a:r>
-              <a:rPr lang="en-US" sz="2600" dirty="0" err="1">
+              <a:rPr lang="en-US" sz="2600" err="1">
                 <a:solidFill>
                   <a:srgbClr val="17202A"/>
                 </a:solidFill>
@@ -12890,7 +12890,7 @@
               <a:t>que</a:t>
             </a:r>
             <a:r>
-              <a:rPr lang="en-US" sz="2600" dirty="0">
+              <a:rPr lang="en-US" sz="2600">
                 <a:solidFill>
                   <a:srgbClr val="17202A"/>
                 </a:solidFill>
@@ -12901,7 +12901,7 @@
               <a:t> </a:t>
             </a:r>
             <a:r>
-              <a:rPr lang="en-US" sz="2600" dirty="0" err="1">
+              <a:rPr lang="en-US" sz="2600" err="1">
                 <a:solidFill>
                   <a:srgbClr val="17202A"/>
                 </a:solidFill>
@@ -12912,7 +12912,7 @@
               <a:t>permite</a:t>
             </a:r>
             <a:r>
-              <a:rPr lang="en-US" sz="2600" dirty="0">
+              <a:rPr lang="en-US" sz="2600">
                 <a:solidFill>
                   <a:srgbClr val="17202A"/>
                 </a:solidFill>
@@ -12923,7 +12923,7 @@
               <a:t> JavaScript </a:t>
             </a:r>
             <a:r>
-              <a:rPr lang="en-US" sz="2600" dirty="0" err="1">
+              <a:rPr lang="en-US" sz="2600" err="1">
                 <a:solidFill>
                   <a:srgbClr val="17202A"/>
                 </a:solidFill>
@@ -12934,7 +12934,7 @@
               <a:t>rodar</a:t>
             </a:r>
             <a:r>
-              <a:rPr lang="en-US" sz="2600" dirty="0">
+              <a:rPr lang="en-US" sz="2600">
                 <a:solidFill>
                   <a:srgbClr val="17202A"/>
                 </a:solidFill>
@@ -12945,7 +12945,7 @@
               <a:t> for a do </a:t>
             </a:r>
             <a:r>
-              <a:rPr lang="en-US" sz="2600" dirty="0" err="1">
+              <a:rPr lang="en-US" sz="2600" err="1">
                 <a:solidFill>
                   <a:srgbClr val="17202A"/>
                 </a:solidFill>
@@ -12956,7 +12956,7 @@
               <a:t>navegador</a:t>
             </a:r>
             <a:r>
-              <a:rPr lang="en-US" sz="2600" dirty="0">
+              <a:rPr lang="en-US" sz="2600">
                 <a:solidFill>
                   <a:srgbClr val="17202A"/>
                 </a:solidFill>
@@ -12967,7 +12967,7 @@
               <a:t>; Express é o framework </a:t>
             </a:r>
             <a:r>
-              <a:rPr lang="en-US" sz="2600" dirty="0" err="1">
+              <a:rPr lang="en-US" sz="2600" err="1">
                 <a:solidFill>
                   <a:srgbClr val="17202A"/>
                 </a:solidFill>
@@ -12978,7 +12978,7 @@
               <a:t>que</a:t>
             </a:r>
             <a:r>
-              <a:rPr lang="en-US" sz="2600" dirty="0">
+              <a:rPr lang="en-US" sz="2600">
                 <a:solidFill>
                   <a:srgbClr val="17202A"/>
                 </a:solidFill>
@@ -12989,7 +12989,7 @@
               <a:t> </a:t>
             </a:r>
             <a:r>
-              <a:rPr lang="en-US" sz="2600" dirty="0" err="1">
+              <a:rPr lang="en-US" sz="2600" err="1">
                 <a:solidFill>
                   <a:srgbClr val="17202A"/>
                 </a:solidFill>
@@ -13000,7 +13000,7 @@
               <a:t>simplifica</a:t>
             </a:r>
             <a:r>
-              <a:rPr lang="en-US" sz="2600" dirty="0">
+              <a:rPr lang="en-US" sz="2600">
                 <a:solidFill>
                   <a:srgbClr val="17202A"/>
                 </a:solidFill>
@@ -13011,7 +13011,7 @@
               <a:t> a </a:t>
             </a:r>
             <a:r>
-              <a:rPr lang="en-US" sz="2600" dirty="0" err="1">
+              <a:rPr lang="en-US" sz="2600" err="1">
                 <a:solidFill>
                   <a:srgbClr val="17202A"/>
                 </a:solidFill>
@@ -13022,7 +13022,7 @@
               <a:t>criação</a:t>
             </a:r>
             <a:r>
-              <a:rPr lang="en-US" sz="2600" dirty="0">
+              <a:rPr lang="en-US" sz="2600">
                 <a:solidFill>
                   <a:srgbClr val="17202A"/>
                 </a:solidFill>
@@ -13033,7 +13033,7 @@
               <a:t> de </a:t>
             </a:r>
             <a:r>
-              <a:rPr lang="en-US" sz="2600" dirty="0" err="1">
+              <a:rPr lang="en-US" sz="2600" err="1">
                 <a:solidFill>
                   <a:srgbClr val="17202A"/>
                 </a:solidFill>
@@ -13044,7 +13044,7 @@
               <a:t>aplicações</a:t>
             </a:r>
             <a:r>
-              <a:rPr lang="en-US" sz="2600" dirty="0">
+              <a:rPr lang="en-US" sz="2600">
                 <a:solidFill>
                   <a:srgbClr val="17202A"/>
                 </a:solidFill>
@@ -13055,7 +13055,7 @@
               <a:t> web e APIs (</a:t>
             </a:r>
             <a:r>
-              <a:rPr lang="en-US" sz="2600" dirty="0" err="1">
+              <a:rPr lang="en-US" sz="2600" err="1">
                 <a:solidFill>
                   <a:srgbClr val="17202A"/>
                 </a:solidFill>
@@ -13066,7 +13066,7 @@
               <a:t>gerenciar</a:t>
             </a:r>
             <a:r>
-              <a:rPr lang="en-US" sz="2600" dirty="0">
+              <a:rPr lang="en-US" sz="2600">
                 <a:solidFill>
                   <a:srgbClr val="17202A"/>
                 </a:solidFill>
@@ -13077,7 +13077,7 @@
               <a:t> </a:t>
             </a:r>
             <a:r>
-              <a:rPr lang="en-US" sz="2600" dirty="0" err="1">
+              <a:rPr lang="en-US" sz="2600" err="1">
                 <a:solidFill>
                   <a:srgbClr val="17202A"/>
                 </a:solidFill>
@@ -13088,7 +13088,7 @@
               <a:t>rotas</a:t>
             </a:r>
             <a:r>
-              <a:rPr lang="en-US" sz="2600" dirty="0">
+              <a:rPr lang="en-US" sz="2600">
                 <a:solidFill>
                   <a:srgbClr val="17202A"/>
                 </a:solidFill>
@@ -13099,7 +13099,7 @@
               <a:t> de URL, </a:t>
             </a:r>
             <a:r>
-              <a:rPr lang="en-US" sz="2600" dirty="0" err="1">
+              <a:rPr lang="en-US" sz="2600" err="1">
                 <a:solidFill>
                   <a:srgbClr val="17202A"/>
                 </a:solidFill>
@@ -13110,7 +13110,7 @@
               <a:t>requisições</a:t>
             </a:r>
             <a:r>
-              <a:rPr lang="en-US" sz="2600" dirty="0">
+              <a:rPr lang="en-US" sz="2600">
                 <a:solidFill>
                   <a:srgbClr val="17202A"/>
                 </a:solidFill>
@@ -13131,7 +13131,7 @@
               <a:buAutoNum type="arabicPeriod"/>
             </a:pPr>
             <a:r>
-              <a:rPr lang="en-US" sz="2600" b="1" dirty="0">
+              <a:rPr lang="en-US" sz="2600" b="1">
                 <a:solidFill>
                   <a:srgbClr val="17202A"/>
                 </a:solidFill>
@@ -13142,7 +13142,7 @@
               <a:t>JSON: </a:t>
             </a:r>
             <a:r>
-              <a:rPr lang="en-US" sz="2600" dirty="0" err="1">
+              <a:rPr lang="en-US" sz="2600" err="1">
                 <a:solidFill>
                   <a:srgbClr val="17202A"/>
                 </a:solidFill>
@@ -13153,7 +13153,7 @@
               <a:t>formato</a:t>
             </a:r>
             <a:r>
-              <a:rPr lang="en-US" sz="2600" dirty="0">
+              <a:rPr lang="en-US" sz="2600">
                 <a:solidFill>
                   <a:srgbClr val="17202A"/>
                 </a:solidFill>
@@ -13164,7 +13164,7 @@
               <a:t> de </a:t>
             </a:r>
             <a:r>
-              <a:rPr lang="en-US" sz="2600" dirty="0" err="1">
+              <a:rPr lang="en-US" sz="2600" err="1">
                 <a:solidFill>
                   <a:srgbClr val="17202A"/>
                 </a:solidFill>
@@ -13175,7 +13175,7 @@
               <a:t>texto</a:t>
             </a:r>
             <a:r>
-              <a:rPr lang="en-US" sz="2600" dirty="0">
+              <a:rPr lang="en-US" sz="2600">
                 <a:solidFill>
                   <a:srgbClr val="17202A"/>
                 </a:solidFill>
@@ -13186,7 +13186,7 @@
               <a:t> para </a:t>
             </a:r>
             <a:r>
-              <a:rPr lang="en-US" sz="2600" dirty="0" err="1">
+              <a:rPr lang="en-US" sz="2600" err="1">
                 <a:solidFill>
                   <a:srgbClr val="17202A"/>
                 </a:solidFill>
@@ -13197,7 +13197,7 @@
               <a:t>representar</a:t>
             </a:r>
             <a:r>
-              <a:rPr lang="en-US" sz="2600" dirty="0">
+              <a:rPr lang="en-US" sz="2600">
                 <a:solidFill>
                   <a:srgbClr val="17202A"/>
                 </a:solidFill>
@@ -13208,7 +13208,7 @@
               <a:t> dados </a:t>
             </a:r>
             <a:r>
-              <a:rPr lang="en-US" sz="2600" dirty="0" err="1">
+              <a:rPr lang="en-US" sz="2600" err="1">
                 <a:solidFill>
                   <a:srgbClr val="17202A"/>
                 </a:solidFill>
@@ -13219,7 +13219,7 @@
               <a:t>estruturados</a:t>
             </a:r>
             <a:r>
-              <a:rPr lang="en-US" sz="2600" dirty="0">
+              <a:rPr lang="en-US" sz="2600">
                 <a:solidFill>
                   <a:srgbClr val="17202A"/>
                 </a:solidFill>
@@ -13230,7 +13230,7 @@
               <a:t>, </a:t>
             </a:r>
             <a:r>
-              <a:rPr lang="en-US" sz="2600" dirty="0" err="1">
+              <a:rPr lang="en-US" sz="2600" err="1">
                 <a:solidFill>
                   <a:srgbClr val="17202A"/>
                 </a:solidFill>
@@ -13241,7 +13241,7 @@
               <a:t>derivado</a:t>
             </a:r>
             <a:r>
-              <a:rPr lang="en-US" sz="2600" dirty="0">
+              <a:rPr lang="en-US" sz="2600">
                 <a:solidFill>
                   <a:srgbClr val="17202A"/>
                 </a:solidFill>
@@ -13252,7 +13252,7 @@
               <a:t> </a:t>
             </a:r>
             <a:r>
-              <a:rPr lang="en-US" sz="2600" dirty="0" err="1">
+              <a:rPr lang="en-US" sz="2600" err="1">
                 <a:solidFill>
                   <a:srgbClr val="17202A"/>
                 </a:solidFill>
@@ -13263,7 +13263,7 @@
               <a:t>diretamente</a:t>
             </a:r>
             <a:r>
-              <a:rPr lang="en-US" sz="2600" dirty="0">
+              <a:rPr lang="en-US" sz="2600">
                 <a:solidFill>
                   <a:srgbClr val="17202A"/>
                 </a:solidFill>
@@ -13274,7 +13274,7 @@
               <a:t> da </a:t>
             </a:r>
             <a:r>
-              <a:rPr lang="en-US" sz="2600" dirty="0" err="1">
+              <a:rPr lang="en-US" sz="2600" err="1">
                 <a:solidFill>
                   <a:srgbClr val="17202A"/>
                 </a:solidFill>
@@ -13285,7 +13285,7 @@
               <a:t>sintaxe</a:t>
             </a:r>
             <a:r>
-              <a:rPr lang="en-US" sz="2600" dirty="0">
+              <a:rPr lang="en-US" sz="2600">
                 <a:solidFill>
                   <a:srgbClr val="17202A"/>
                 </a:solidFill>
@@ -13296,7 +13296,7 @@
               <a:t> de </a:t>
             </a:r>
             <a:r>
-              <a:rPr lang="en-US" sz="2600" dirty="0" err="1">
+              <a:rPr lang="en-US" sz="2600" err="1">
                 <a:solidFill>
                   <a:srgbClr val="17202A"/>
                 </a:solidFill>
@@ -13307,7 +13307,7 @@
               <a:t>objetos</a:t>
             </a:r>
             <a:r>
-              <a:rPr lang="en-US" sz="2600" dirty="0">
+              <a:rPr lang="en-US" sz="2600">
                 <a:solidFill>
                   <a:srgbClr val="17202A"/>
                 </a:solidFill>
@@ -13318,7 +13318,7 @@
               <a:t> do </a:t>
             </a:r>
             <a:r>
-              <a:rPr lang="en-US" sz="2600" dirty="0" err="1">
+              <a:rPr lang="en-US" sz="2600" err="1">
                 <a:solidFill>
                   <a:srgbClr val="17202A"/>
                 </a:solidFill>
@@ -13329,7 +13329,7 @@
               <a:t>próprio</a:t>
             </a:r>
             <a:r>
-              <a:rPr lang="en-US" sz="2600" dirty="0">
+              <a:rPr lang="en-US" sz="2600">
                 <a:solidFill>
                   <a:srgbClr val="17202A"/>
                 </a:solidFill>
@@ -13339,7 +13339,7 @@
               </a:rPr>
               <a:t> JavaScript (API Rest);</a:t>
             </a:r>
-            <a:endParaRPr lang="en-US" sz="2600" b="1" dirty="0">
+            <a:endParaRPr lang="en-US" sz="2600" b="1">
               <a:solidFill>
                 <a:srgbClr val="17202A"/>
               </a:solidFill>
@@ -13357,7 +13357,7 @@
               <a:buFont typeface="+mj-lt"/>
               <a:buAutoNum type="arabicPeriod"/>
             </a:pPr>
-            <a:endParaRPr lang="en-US" sz="2600" b="1" dirty="0"/>
+            <a:endParaRPr lang="en-US" sz="2600" b="1"/>
           </a:p>
         </p:txBody>
       </p:sp>
@@ -13420,7 +13420,7 @@
               <a:buNone/>
             </a:pPr>
             <a:r>
-              <a:rPr lang="en-US" sz="3400" b="1" dirty="0">
+              <a:rPr lang="en-US" sz="3400" b="1">
                 <a:solidFill>
                   <a:srgbClr val="17202A"/>
                 </a:solidFill>
@@ -13430,7 +13430,7 @@
               </a:rPr>
               <a:t>console.log x print()</a:t>
             </a:r>
-            <a:endParaRPr lang="en-US" sz="3400" dirty="0"/>
+            <a:endParaRPr lang="en-US" sz="3400"/>
           </a:p>
         </p:txBody>
       </p:sp>
@@ -13497,7 +13497,7 @@
               <a:buNone/>
             </a:pPr>
             <a:r>
-              <a:rPr lang="en-US" sz="2200" b="1" dirty="0">
+              <a:rPr lang="en-US" sz="2200" b="1">
                 <a:solidFill>
                   <a:srgbClr val="C2410C"/>
                 </a:solidFill>
@@ -13507,7 +13507,7 @@
               </a:rPr>
               <a:t>JavaScript</a:t>
             </a:r>
-            <a:endParaRPr lang="en-US" sz="2200" dirty="0"/>
+            <a:endParaRPr lang="en-US" sz="2200"/>
           </a:p>
         </p:txBody>
       </p:sp>
@@ -13536,7 +13536,7 @@
               <a:buNone/>
             </a:pPr>
             <a:r>
-              <a:rPr lang="en-US" sz="2200" b="1" dirty="0">
+              <a:rPr lang="en-US" sz="2200" b="1">
                 <a:solidFill>
                   <a:srgbClr val="5A6472"/>
                 </a:solidFill>
@@ -13546,7 +13546,7 @@
               </a:rPr>
               <a:t>Python</a:t>
             </a:r>
-            <a:endParaRPr lang="en-US" sz="2200" dirty="0"/>
+            <a:endParaRPr lang="en-US" sz="2200"/>
           </a:p>
         </p:txBody>
       </p:sp>
@@ -13616,7 +13616,7 @@
               <a:buNone/>
             </a:pPr>
             <a:r>
-              <a:rPr lang="en-US" sz="1800" b="1" dirty="0">
+              <a:rPr lang="en-US" sz="1800" b="1">
                 <a:solidFill>
                   <a:srgbClr val="C2410C"/>
                 </a:solidFill>
@@ -13627,7 +13627,7 @@
               <a:t>console</a:t>
             </a:r>
             <a:r>
-              <a:rPr lang="en-US" sz="1800" dirty="0">
+              <a:rPr lang="en-US" sz="1800">
                 <a:solidFill>
                   <a:srgbClr val="17202A"/>
                 </a:solidFill>
@@ -13638,7 +13638,7 @@
               <a:t>.</a:t>
             </a:r>
             <a:r>
-              <a:rPr lang="en-US" sz="1800" b="1" dirty="0">
+              <a:rPr lang="en-US" sz="1800" b="1">
                 <a:solidFill>
                   <a:srgbClr val="C2410C"/>
                 </a:solidFill>
@@ -13649,7 +13649,7 @@
               <a:t>log</a:t>
             </a:r>
             <a:r>
-              <a:rPr lang="en-US" sz="1800" dirty="0">
+              <a:rPr lang="en-US" sz="1800">
                 <a:solidFill>
                   <a:srgbClr val="17202A"/>
                 </a:solidFill>
@@ -13659,7 +13659,7 @@
               </a:rPr>
               <a:t>("Olá");</a:t>
             </a:r>
-            <a:endParaRPr lang="en-US" sz="1800" dirty="0"/>
+            <a:endParaRPr lang="en-US" sz="1800"/>
           </a:p>
           <a:p>
             <a:pPr marL="0" indent="0" algn="l">
@@ -13669,7 +13669,7 @@
               <a:buNone/>
             </a:pPr>
             <a:r>
-              <a:rPr lang="en-US" sz="1800" b="1" dirty="0">
+              <a:rPr lang="en-US" sz="1800" b="1">
                 <a:solidFill>
                   <a:srgbClr val="C2410C"/>
                 </a:solidFill>
@@ -13680,7 +13680,7 @@
               <a:t>console</a:t>
             </a:r>
             <a:r>
-              <a:rPr lang="en-US" sz="1800" dirty="0">
+              <a:rPr lang="en-US" sz="1800">
                 <a:solidFill>
                   <a:srgbClr val="17202A"/>
                 </a:solidFill>
@@ -13691,7 +13691,7 @@
               <a:t>.</a:t>
             </a:r>
             <a:r>
-              <a:rPr lang="en-US" sz="1800" b="1" dirty="0">
+              <a:rPr lang="en-US" sz="1800" b="1">
                 <a:solidFill>
                   <a:srgbClr val="C2410C"/>
                 </a:solidFill>
@@ -13702,7 +13702,7 @@
               <a:t>log</a:t>
             </a:r>
             <a:r>
-              <a:rPr lang="en-US" sz="1800" dirty="0">
+              <a:rPr lang="en-US" sz="1800">
                 <a:solidFill>
                   <a:srgbClr val="17202A"/>
                 </a:solidFill>
@@ -13712,7 +13712,7 @@
               </a:rPr>
               <a:t>(nome, idade);</a:t>
             </a:r>
-            <a:endParaRPr lang="en-US" sz="1800" dirty="0"/>
+            <a:endParaRPr lang="en-US" sz="1800"/>
           </a:p>
           <a:p>
             <a:pPr marL="0" indent="0" algn="l">
@@ -13722,7 +13722,7 @@
               <a:buNone/>
             </a:pPr>
             <a:r>
-              <a:rPr lang="en-US" sz="1800" b="1" dirty="0">
+              <a:rPr lang="en-US" sz="1800" b="1">
                 <a:solidFill>
                   <a:srgbClr val="C2410C"/>
                 </a:solidFill>
@@ -13733,7 +13733,7 @@
               <a:t>console</a:t>
             </a:r>
             <a:r>
-              <a:rPr lang="en-US" sz="1800" dirty="0">
+              <a:rPr lang="en-US" sz="1800">
                 <a:solidFill>
                   <a:srgbClr val="17202A"/>
                 </a:solidFill>
@@ -13744,7 +13744,7 @@
               <a:t>.</a:t>
             </a:r>
             <a:r>
-              <a:rPr lang="en-US" sz="1800" b="1" dirty="0">
+              <a:rPr lang="en-US" sz="1800" b="1">
                 <a:solidFill>
                   <a:srgbClr val="C2410C"/>
                 </a:solidFill>
@@ -13755,7 +13755,7 @@
               <a:t>log</a:t>
             </a:r>
             <a:r>
-              <a:rPr lang="en-US" sz="1800" dirty="0">
+              <a:rPr lang="en-US" sz="1800">
                 <a:solidFill>
                   <a:srgbClr val="17202A"/>
                 </a:solidFill>
@@ -13766,7 +13766,7 @@
               <a:t>(</a:t>
             </a:r>
             <a:r>
-              <a:rPr lang="en-US" sz="1800" b="1" dirty="0">
+              <a:rPr lang="en-US" sz="1800" b="1">
                 <a:solidFill>
                   <a:srgbClr val="C2410C"/>
                 </a:solidFill>
@@ -13777,7 +13777,7 @@
               <a:t>typeof</a:t>
             </a:r>
             <a:r>
-              <a:rPr lang="en-US" sz="1800" dirty="0">
+              <a:rPr lang="en-US" sz="1800">
                 <a:solidFill>
                   <a:srgbClr val="17202A"/>
                 </a:solidFill>
@@ -13787,7 +13787,7 @@
               </a:rPr>
               <a:t> nota);</a:t>
             </a:r>
-            <a:endParaRPr lang="en-US" sz="1800" dirty="0"/>
+            <a:endParaRPr lang="en-US" sz="1800"/>
           </a:p>
         </p:txBody>
       </p:sp>
@@ -13857,7 +13857,7 @@
               <a:buNone/>
             </a:pPr>
             <a:r>
-              <a:rPr lang="en-US" sz="1800" b="1" dirty="0">
+              <a:rPr lang="en-US" sz="1800" b="1">
                 <a:solidFill>
                   <a:srgbClr val="C2410C"/>
                 </a:solidFill>
@@ -13868,7 +13868,7 @@
               <a:t>print</a:t>
             </a:r>
             <a:r>
-              <a:rPr lang="en-US" sz="1800" dirty="0">
+              <a:rPr lang="en-US" sz="1800">
                 <a:solidFill>
                   <a:srgbClr val="17202A"/>
                 </a:solidFill>
@@ -13878,7 +13878,7 @@
               </a:rPr>
               <a:t>("Olá")</a:t>
             </a:r>
-            <a:endParaRPr lang="en-US" sz="1800" dirty="0"/>
+            <a:endParaRPr lang="en-US" sz="1800"/>
           </a:p>
           <a:p>
             <a:pPr marL="0" indent="0" algn="l">
@@ -13888,7 +13888,7 @@
               <a:buNone/>
             </a:pPr>
             <a:r>
-              <a:rPr lang="en-US" sz="1800" b="1" dirty="0">
+              <a:rPr lang="en-US" sz="1800" b="1">
                 <a:solidFill>
                   <a:srgbClr val="C2410C"/>
                 </a:solidFill>
@@ -13899,7 +13899,7 @@
               <a:t>print</a:t>
             </a:r>
             <a:r>
-              <a:rPr lang="en-US" sz="1800" dirty="0">
+              <a:rPr lang="en-US" sz="1800">
                 <a:solidFill>
                   <a:srgbClr val="17202A"/>
                 </a:solidFill>
@@ -13909,7 +13909,7 @@
               </a:rPr>
               <a:t>(nome, idade)</a:t>
             </a:r>
-            <a:endParaRPr lang="en-US" sz="1800" dirty="0"/>
+            <a:endParaRPr lang="en-US" sz="1800"/>
           </a:p>
           <a:p>
             <a:pPr marL="0" indent="0" algn="l">
@@ -13919,7 +13919,7 @@
               <a:buNone/>
             </a:pPr>
             <a:r>
-              <a:rPr lang="en-US" sz="1800" b="1" dirty="0">
+              <a:rPr lang="en-US" sz="1800" b="1">
                 <a:solidFill>
                   <a:srgbClr val="C2410C"/>
                 </a:solidFill>
@@ -13930,7 +13930,7 @@
               <a:t>print</a:t>
             </a:r>
             <a:r>
-              <a:rPr lang="en-US" sz="1800" dirty="0">
+              <a:rPr lang="en-US" sz="1800">
                 <a:solidFill>
                   <a:srgbClr val="17202A"/>
                 </a:solidFill>
@@ -13941,7 +13941,7 @@
               <a:t>(</a:t>
             </a:r>
             <a:r>
-              <a:rPr lang="en-US" sz="1800" b="1" dirty="0">
+              <a:rPr lang="en-US" sz="1800" b="1">
                 <a:solidFill>
                   <a:srgbClr val="C2410C"/>
                 </a:solidFill>
@@ -13952,7 +13952,7 @@
               <a:t>type</a:t>
             </a:r>
             <a:r>
-              <a:rPr lang="en-US" sz="1800" dirty="0">
+              <a:rPr lang="en-US" sz="1800">
                 <a:solidFill>
                   <a:srgbClr val="17202A"/>
                 </a:solidFill>
@@ -13962,7 +13962,7 @@
               </a:rPr>
               <a:t>(nota))</a:t>
             </a:r>
-            <a:endParaRPr lang="en-US" sz="1800" dirty="0"/>
+            <a:endParaRPr lang="en-US" sz="1800"/>
           </a:p>
         </p:txBody>
       </p:sp>
@@ -13991,7 +13991,7 @@
               <a:buNone/>
             </a:pPr>
             <a:r>
-              <a:rPr lang="en-US" sz="1900" i="1" dirty="0">
+              <a:rPr lang="en-US" sz="1900" i="1">
                 <a:solidFill>
                   <a:srgbClr val="5A6472"/>
                 </a:solidFill>
@@ -14001,7 +14001,7 @@
               </a:rPr>
               <a:t>console.log é a ferramenta mais direta de depuração: mostre o valor antes de supor o que ele contém.</a:t>
             </a:r>
-            <a:endParaRPr lang="en-US" sz="1900" dirty="0"/>
+            <a:endParaRPr lang="en-US" sz="1900"/>
           </a:p>
         </p:txBody>
       </p:sp>
@@ -14059,7 +14059,7 @@
               <a:buNone/>
             </a:pPr>
             <a:r>
-              <a:rPr lang="en-US" sz="3400" b="1" dirty="0">
+              <a:rPr lang="en-US" sz="3400" b="1">
                 <a:solidFill>
                   <a:srgbClr val="17202A"/>
                 </a:solidFill>
@@ -14069,7 +14069,7 @@
               </a:rPr>
               <a:t>Para levar da aula</a:t>
             </a:r>
-            <a:endParaRPr lang="en-US" sz="3400" dirty="0"/>
+            <a:endParaRPr lang="en-US" sz="3400"/>
           </a:p>
         </p:txBody>
       </p:sp>
@@ -14140,7 +14140,7 @@
               <a:buChar char="•"/>
             </a:pPr>
             <a:r>
-              <a:rPr lang="en-US" sz="2600" dirty="0">
+              <a:rPr lang="en-US" sz="2600">
                 <a:solidFill>
                   <a:srgbClr val="17202A"/>
                 </a:solidFill>
@@ -14150,7 +14150,7 @@
               </a:rPr>
               <a:t>Blocos com chaves; ponto e vírgula ao fim das instruções</a:t>
             </a:r>
-            <a:endParaRPr lang="en-US" sz="2600" dirty="0"/>
+            <a:endParaRPr lang="en-US" sz="2600"/>
           </a:p>
           <a:p>
             <a:pPr marL="342900" indent="-342900">
@@ -14161,7 +14161,7 @@
               <a:buChar char="•"/>
             </a:pPr>
             <a:r>
-              <a:rPr lang="en-US" sz="2600" dirty="0">
+              <a:rPr lang="en-US" sz="2600">
                 <a:solidFill>
                   <a:srgbClr val="17202A"/>
                 </a:solidFill>
@@ -14171,7 +14171,7 @@
               </a:rPr>
               <a:t>const por padrão, let quando precisar reatribuir, var nunca</a:t>
             </a:r>
-            <a:endParaRPr lang="en-US" sz="2600" dirty="0"/>
+            <a:endParaRPr lang="en-US" sz="2600"/>
           </a:p>
           <a:p>
             <a:pPr marL="342900" indent="-342900">
@@ -14182,7 +14182,7 @@
               <a:buChar char="•"/>
             </a:pPr>
             <a:r>
-              <a:rPr lang="en-US" sz="2600" dirty="0">
+              <a:rPr lang="en-US" sz="2600">
                 <a:solidFill>
                   <a:srgbClr val="17202A"/>
                 </a:solidFill>
@@ -14192,7 +14192,7 @@
               </a:rPr>
               <a:t>Declarar sem inicializar resulta em undefined</a:t>
             </a:r>
-            <a:endParaRPr lang="en-US" sz="2600" dirty="0"/>
+            <a:endParaRPr lang="en-US" sz="2600"/>
           </a:p>
           <a:p>
             <a:pPr marL="342900" indent="-342900">
@@ -14203,7 +14203,7 @@
               <a:buChar char="•"/>
             </a:pPr>
             <a:r>
-              <a:rPr lang="en-US" sz="2600" dirty="0">
+              <a:rPr lang="en-US" sz="2600">
                 <a:solidFill>
                   <a:srgbClr val="17202A"/>
                 </a:solidFill>
@@ -14213,7 +14213,7 @@
               </a:rPr>
               <a:t>Arrays e objetos correspondem a listas e dicionários</a:t>
             </a:r>
-            <a:endParaRPr lang="en-US" sz="2600" dirty="0"/>
+            <a:endParaRPr lang="en-US" sz="2600"/>
           </a:p>
           <a:p>
             <a:pPr marL="342900" indent="-342900">
@@ -14224,7 +14224,7 @@
               <a:buChar char="•"/>
             </a:pPr>
             <a:r>
-              <a:rPr lang="en-US" sz="2600" dirty="0">
+              <a:rPr lang="en-US" sz="2600">
                 <a:solidFill>
                   <a:srgbClr val="17202A"/>
                 </a:solidFill>
@@ -14234,7 +14234,7 @@
               </a:rPr>
               <a:t>typeof, template literals e console.log no dia a dia</a:t>
             </a:r>
-            <a:endParaRPr lang="en-US" sz="2600" dirty="0"/>
+            <a:endParaRPr lang="en-US" sz="2600"/>
           </a:p>
         </p:txBody>
       </p:sp>
@@ -14292,7 +14292,7 @@
               <a:buNone/>
             </a:pPr>
             <a:r>
-              <a:rPr lang="en-US" sz="3400" b="1" dirty="0">
+              <a:rPr lang="en-US" sz="3400" b="1">
                 <a:solidFill>
                   <a:srgbClr val="17202A"/>
                 </a:solidFill>
@@ -14302,7 +14302,7 @@
               </a:rPr>
               <a:t>Próximos passos</a:t>
             </a:r>
-            <a:endParaRPr lang="en-US" sz="3400" dirty="0"/>
+            <a:endParaRPr lang="en-US" sz="3400"/>
           </a:p>
         </p:txBody>
       </p:sp>
@@ -14372,7 +14372,7 @@
               <a:buNone/>
             </a:pPr>
             <a:r>
-              <a:rPr lang="en-US" sz="2800" dirty="0">
+              <a:rPr lang="en-US" sz="2800">
                 <a:solidFill>
                   <a:srgbClr val="17202A"/>
                 </a:solidFill>
@@ -14382,7 +14382,7 @@
               </a:rPr>
               <a:t>Pratique no console do navegador (F12) ou com o Node.js.</a:t>
             </a:r>
-            <a:endParaRPr lang="en-US" sz="2800" dirty="0"/>
+            <a:endParaRPr lang="en-US" sz="2800"/>
           </a:p>
           <a:p>
             <a:pPr marL="0" indent="0">
@@ -14392,7 +14392,7 @@
               <a:buNone/>
             </a:pPr>
             <a:r>
-              <a:rPr lang="en-US" sz="2800" dirty="0">
+              <a:rPr lang="en-US" sz="2800">
                 <a:solidFill>
                   <a:srgbClr val="17202A"/>
                 </a:solidFill>
@@ -14402,14 +14402,14 @@
               </a:rPr>
               <a:t>Reescreva em JavaScript três exercícios que você já fez em Python.</a:t>
             </a:r>
-            <a:endParaRPr lang="en-US" sz="2800" dirty="0"/>
+            <a:endParaRPr lang="en-US" sz="2800"/>
           </a:p>
           <a:p>
             <a:pPr marL="0" indent="0">
               <a:buNone/>
             </a:pPr>
             <a:r>
-              <a:rPr lang="en-US" sz="3200" b="1" dirty="0">
+              <a:rPr lang="en-US" sz="3200" b="1">
                 <a:solidFill>
                   <a:srgbClr val="C2410C"/>
                 </a:solidFill>
@@ -14419,7 +14419,7 @@
               </a:rPr>
               <a:t>Dúvidas?</a:t>
             </a:r>
-            <a:endParaRPr lang="en-US" sz="2800" dirty="0"/>
+            <a:endParaRPr lang="en-US" sz="2800"/>
           </a:p>
         </p:txBody>
       </p:sp>
@@ -14489,7 +14489,7 @@
               <a:buNone/>
             </a:pPr>
             <a:r>
-              <a:rPr lang="en-US" sz="3400" b="1" dirty="0">
+              <a:rPr lang="en-US" sz="3400" b="1">
                 <a:solidFill>
                   <a:srgbClr val="17202A"/>
                 </a:solidFill>
@@ -14499,7 +14499,7 @@
               </a:rPr>
               <a:t>O plano</a:t>
             </a:r>
-            <a:endParaRPr lang="en-US" sz="3400" dirty="0"/>
+            <a:endParaRPr lang="en-US" sz="3400"/>
           </a:p>
         </p:txBody>
       </p:sp>
@@ -14580,7 +14580,7 @@
               <a:buAutoNum type="arabicPeriod" startAt="4"/>
             </a:pPr>
             <a:r>
-              <a:rPr lang="en-US" sz="2600" b="1" dirty="0">
+              <a:rPr lang="en-US" sz="2600" b="1">
                 <a:solidFill>
                   <a:srgbClr val="17202A"/>
                 </a:solidFill>
@@ -14591,7 +14591,7 @@
               <a:t>HTML + CSS:</a:t>
             </a:r>
             <a:r>
-              <a:rPr lang="en-US" sz="2600" dirty="0">
+              <a:rPr lang="en-US" sz="2600">
                 <a:solidFill>
                   <a:srgbClr val="17202A"/>
                 </a:solidFill>
@@ -14602,7 +14602,7 @@
               <a:t> </a:t>
             </a:r>
             <a:r>
-              <a:rPr lang="en-US" sz="2600" dirty="0" err="1">
+              <a:rPr lang="en-US" sz="2600" err="1">
                 <a:solidFill>
                   <a:srgbClr val="17202A"/>
                 </a:solidFill>
@@ -14613,7 +14613,7 @@
               <a:t>Definição</a:t>
             </a:r>
             <a:r>
-              <a:rPr lang="en-US" sz="2600" dirty="0">
+              <a:rPr lang="en-US" sz="2600">
                 <a:solidFill>
                   <a:srgbClr val="17202A"/>
                 </a:solidFill>
@@ -14624,7 +14624,7 @@
               <a:t> da </a:t>
             </a:r>
             <a:r>
-              <a:rPr lang="en-US" sz="2600" dirty="0" err="1">
+              <a:rPr lang="en-US" sz="2600" err="1">
                 <a:solidFill>
                   <a:srgbClr val="17202A"/>
                 </a:solidFill>
@@ -14635,7 +14635,7 @@
               <a:t>estrutura</a:t>
             </a:r>
             <a:r>
-              <a:rPr lang="en-US" sz="2600" dirty="0">
+              <a:rPr lang="en-US" sz="2600">
                 <a:solidFill>
                   <a:srgbClr val="17202A"/>
                 </a:solidFill>
@@ -14646,7 +14646,7 @@
               <a:t> da </a:t>
             </a:r>
             <a:r>
-              <a:rPr lang="en-US" sz="2600" dirty="0" err="1">
+              <a:rPr lang="en-US" sz="2600" err="1">
                 <a:solidFill>
                   <a:srgbClr val="17202A"/>
                 </a:solidFill>
@@ -14657,7 +14657,7 @@
               <a:t>página</a:t>
             </a:r>
             <a:r>
-              <a:rPr lang="en-US" sz="2600" dirty="0">
+              <a:rPr lang="en-US" sz="2600">
                 <a:solidFill>
                   <a:srgbClr val="17202A"/>
                 </a:solidFill>
@@ -14668,7 +14668,7 @@
               <a:t> e da </a:t>
             </a:r>
             <a:r>
-              <a:rPr lang="en-US" sz="2600" dirty="0" err="1">
+              <a:rPr lang="en-US" sz="2600" err="1">
                 <a:solidFill>
                   <a:srgbClr val="17202A"/>
                 </a:solidFill>
@@ -14679,7 +14679,7 @@
               <a:t>aparência</a:t>
             </a:r>
             <a:r>
-              <a:rPr lang="en-US" sz="2600" dirty="0">
+              <a:rPr lang="en-US" sz="2600">
                 <a:solidFill>
                   <a:srgbClr val="17202A"/>
                 </a:solidFill>
@@ -14690,7 +14690,7 @@
               <a:t> da </a:t>
             </a:r>
             <a:r>
-              <a:rPr lang="en-US" sz="2600" dirty="0" err="1">
+              <a:rPr lang="en-US" sz="2600" err="1">
                 <a:solidFill>
                   <a:srgbClr val="17202A"/>
                 </a:solidFill>
@@ -14701,7 +14701,7 @@
               <a:t>página</a:t>
             </a:r>
             <a:r>
-              <a:rPr lang="en-US" sz="2600" dirty="0">
+              <a:rPr lang="en-US" sz="2600">
                 <a:solidFill>
                   <a:srgbClr val="17202A"/>
                 </a:solidFill>
@@ -14722,7 +14722,7 @@
               <a:buAutoNum type="arabicPeriod" startAt="4"/>
             </a:pPr>
             <a:r>
-              <a:rPr lang="en-US" sz="2600" b="1" dirty="0">
+              <a:rPr lang="en-US" sz="2600" b="1">
                 <a:solidFill>
                   <a:srgbClr val="17202A"/>
                 </a:solidFill>
@@ -14733,7 +14733,7 @@
               <a:t>React: </a:t>
             </a:r>
             <a:r>
-              <a:rPr lang="en-US" sz="2600" dirty="0">
+              <a:rPr lang="en-US" sz="2600">
                 <a:solidFill>
                   <a:srgbClr val="17202A"/>
                 </a:solidFill>
@@ -14744,7 +14744,7 @@
               <a:t>é o </a:t>
             </a:r>
             <a:r>
-              <a:rPr lang="en-US" sz="2600" dirty="0" err="1">
+              <a:rPr lang="en-US" sz="2600" err="1">
                 <a:solidFill>
                   <a:srgbClr val="17202A"/>
                 </a:solidFill>
@@ -14755,7 +14755,7 @@
               <a:t>que</a:t>
             </a:r>
             <a:r>
-              <a:rPr lang="en-US" sz="2600" dirty="0">
+              <a:rPr lang="en-US" sz="2600">
                 <a:solidFill>
                   <a:srgbClr val="17202A"/>
                 </a:solidFill>
@@ -14766,7 +14766,7 @@
               <a:t> </a:t>
             </a:r>
             <a:r>
-              <a:rPr lang="en-US" sz="2600" dirty="0" err="1">
+              <a:rPr lang="en-US" sz="2600" err="1">
                 <a:solidFill>
                   <a:srgbClr val="17202A"/>
                 </a:solidFill>
@@ -14777,7 +14777,7 @@
               <a:t>dará</a:t>
             </a:r>
             <a:r>
-              <a:rPr lang="en-US" sz="2600" dirty="0">
+              <a:rPr lang="en-US" sz="2600">
                 <a:solidFill>
                   <a:srgbClr val="17202A"/>
                 </a:solidFill>
@@ -14788,7 +14788,7 @@
               <a:t> “</a:t>
             </a:r>
             <a:r>
-              <a:rPr lang="en-US" sz="2600" dirty="0" err="1">
+              <a:rPr lang="en-US" sz="2600" err="1">
                 <a:solidFill>
                   <a:srgbClr val="17202A"/>
                 </a:solidFill>
@@ -14799,7 +14799,7 @@
               <a:t>vida</a:t>
             </a:r>
             <a:r>
-              <a:rPr lang="en-US" sz="2600" dirty="0">
+              <a:rPr lang="en-US" sz="2600">
                 <a:solidFill>
                   <a:srgbClr val="17202A"/>
                 </a:solidFill>
@@ -14810,7 +14810,7 @@
               <a:t>” à interface web, </a:t>
             </a:r>
             <a:r>
-              <a:rPr lang="en-US" sz="2600" dirty="0" err="1">
+              <a:rPr lang="en-US" sz="2600" err="1">
                 <a:solidFill>
                   <a:srgbClr val="17202A"/>
                 </a:solidFill>
@@ -14821,7 +14821,7 @@
               <a:t>consumindo</a:t>
             </a:r>
             <a:r>
-              <a:rPr lang="en-US" sz="2600" dirty="0">
+              <a:rPr lang="en-US" sz="2600">
                 <a:solidFill>
                   <a:srgbClr val="17202A"/>
                 </a:solidFill>
@@ -14832,7 +14832,7 @@
               <a:t> do backend. É </a:t>
             </a:r>
             <a:r>
-              <a:rPr lang="en-US" sz="2600" dirty="0" err="1">
+              <a:rPr lang="en-US" sz="2600" err="1">
                 <a:solidFill>
                   <a:srgbClr val="17202A"/>
                 </a:solidFill>
@@ -14843,7 +14843,7 @@
               <a:t>uma</a:t>
             </a:r>
             <a:r>
-              <a:rPr lang="en-US" sz="2600" dirty="0">
+              <a:rPr lang="en-US" sz="2600">
                 <a:solidFill>
                   <a:srgbClr val="17202A"/>
                 </a:solidFill>
@@ -14854,7 +14854,7 @@
               <a:t> </a:t>
             </a:r>
             <a:r>
-              <a:rPr lang="en-US" sz="2600" dirty="0" err="1">
+              <a:rPr lang="en-US" sz="2600" err="1">
                 <a:solidFill>
                   <a:srgbClr val="17202A"/>
                 </a:solidFill>
@@ -14865,7 +14865,7 @@
               <a:t>biblioteca</a:t>
             </a:r>
             <a:r>
-              <a:rPr lang="en-US" sz="2600" dirty="0">
+              <a:rPr lang="en-US" sz="2600">
                 <a:solidFill>
                   <a:srgbClr val="17202A"/>
                 </a:solidFill>
@@ -14876,7 +14876,7 @@
               <a:t> </a:t>
             </a:r>
             <a:r>
-              <a:rPr lang="en-US" sz="2600" dirty="0" err="1">
+              <a:rPr lang="en-US" sz="2600" err="1">
                 <a:solidFill>
                   <a:srgbClr val="17202A"/>
                 </a:solidFill>
@@ -14887,7 +14887,7 @@
               <a:t>que</a:t>
             </a:r>
             <a:r>
-              <a:rPr lang="en-US" sz="2600" dirty="0">
+              <a:rPr lang="en-US" sz="2600">
                 <a:solidFill>
                   <a:srgbClr val="17202A"/>
                 </a:solidFill>
@@ -14898,7 +14898,7 @@
               <a:t> </a:t>
             </a:r>
             <a:r>
-              <a:rPr lang="en-US" sz="2600" dirty="0" err="1">
+              <a:rPr lang="en-US" sz="2600" err="1">
                 <a:solidFill>
                   <a:srgbClr val="17202A"/>
                 </a:solidFill>
@@ -14909,7 +14909,7 @@
               <a:t>constrói</a:t>
             </a:r>
             <a:r>
-              <a:rPr lang="en-US" sz="2600" dirty="0">
+              <a:rPr lang="en-US" sz="2600">
                 <a:solidFill>
                   <a:srgbClr val="17202A"/>
                 </a:solidFill>
@@ -14920,7 +14920,7 @@
               <a:t> interfaces </a:t>
             </a:r>
             <a:r>
-              <a:rPr lang="en-US" sz="2600" dirty="0" err="1">
+              <a:rPr lang="en-US" sz="2600" err="1">
                 <a:solidFill>
                   <a:srgbClr val="17202A"/>
                 </a:solidFill>
@@ -14931,7 +14931,7 @@
               <a:t>através</a:t>
             </a:r>
             <a:r>
-              <a:rPr lang="en-US" sz="2600" dirty="0">
+              <a:rPr lang="en-US" sz="2600">
                 <a:solidFill>
                   <a:srgbClr val="17202A"/>
                 </a:solidFill>
@@ -14952,7 +14952,7 @@
               <a:buAutoNum type="arabicPeriod" startAt="4"/>
             </a:pPr>
             <a:r>
-              <a:rPr lang="en-US" sz="2600" b="1" dirty="0">
+              <a:rPr lang="en-US" sz="2600" b="1">
                 <a:solidFill>
                   <a:srgbClr val="17202A"/>
                 </a:solidFill>
@@ -14963,7 +14963,7 @@
               <a:t>React Native:</a:t>
             </a:r>
             <a:r>
-              <a:rPr lang="en-US" sz="2600" dirty="0">
+              <a:rPr lang="en-US" sz="2600">
                 <a:solidFill>
                   <a:srgbClr val="17202A"/>
                 </a:solidFill>
@@ -14974,7 +14974,7 @@
               <a:t> a </a:t>
             </a:r>
             <a:r>
-              <a:rPr lang="en-US" sz="2600" dirty="0" err="1">
+              <a:rPr lang="en-US" sz="2600" err="1">
                 <a:solidFill>
                   <a:srgbClr val="17202A"/>
                 </a:solidFill>
@@ -14985,7 +14985,7 @@
               <a:t>mesma</a:t>
             </a:r>
             <a:r>
-              <a:rPr lang="en-US" sz="2600" dirty="0">
+              <a:rPr lang="en-US" sz="2600">
                 <a:solidFill>
                   <a:srgbClr val="17202A"/>
                 </a:solidFill>
@@ -14996,7 +14996,7 @@
               <a:t> </a:t>
             </a:r>
             <a:r>
-              <a:rPr lang="en-US" sz="2600" dirty="0" err="1">
+              <a:rPr lang="en-US" sz="2600" err="1">
                 <a:solidFill>
                   <a:srgbClr val="17202A"/>
                 </a:solidFill>
@@ -15007,7 +15007,7 @@
               <a:t>lógica</a:t>
             </a:r>
             <a:r>
-              <a:rPr lang="en-US" sz="2600" dirty="0">
+              <a:rPr lang="en-US" sz="2600">
                 <a:solidFill>
                   <a:srgbClr val="17202A"/>
                 </a:solidFill>
@@ -15018,7 +15018,7 @@
               <a:t> de components, agora </a:t>
             </a:r>
             <a:r>
-              <a:rPr lang="en-US" sz="2600" dirty="0" err="1">
+              <a:rPr lang="en-US" sz="2600" err="1">
                 <a:solidFill>
                   <a:srgbClr val="17202A"/>
                 </a:solidFill>
@@ -15029,7 +15029,7 @@
               <a:t>gerando</a:t>
             </a:r>
             <a:r>
-              <a:rPr lang="en-US" sz="2600" dirty="0">
+              <a:rPr lang="en-US" sz="2600">
                 <a:solidFill>
                   <a:srgbClr val="17202A"/>
                 </a:solidFill>
@@ -15040,7 +15040,7 @@
               <a:t> app </a:t>
             </a:r>
             <a:r>
-              <a:rPr lang="en-US" sz="2600" dirty="0" err="1">
+              <a:rPr lang="en-US" sz="2600" err="1">
                 <a:solidFill>
                   <a:srgbClr val="17202A"/>
                 </a:solidFill>
@@ -15051,7 +15051,7 @@
               <a:t>nativo</a:t>
             </a:r>
             <a:r>
-              <a:rPr lang="en-US" sz="2600" dirty="0">
+              <a:rPr lang="en-US" sz="2600">
                 <a:solidFill>
                   <a:srgbClr val="17202A"/>
                 </a:solidFill>
@@ -15062,7 +15062,7 @@
               <a:t>. Usa o </a:t>
             </a:r>
             <a:r>
-              <a:rPr lang="en-US" sz="2600" dirty="0" err="1">
+              <a:rPr lang="en-US" sz="2600" err="1">
                 <a:solidFill>
                   <a:srgbClr val="17202A"/>
                 </a:solidFill>
@@ -15073,7 +15073,7 @@
               <a:t>mesmo</a:t>
             </a:r>
             <a:r>
-              <a:rPr lang="en-US" sz="2600" dirty="0">
+              <a:rPr lang="en-US" sz="2600">
                 <a:solidFill>
                   <a:srgbClr val="17202A"/>
                 </a:solidFill>
@@ -15084,7 +15084,7 @@
               <a:t> </a:t>
             </a:r>
             <a:r>
-              <a:rPr lang="en-US" sz="2600" dirty="0" err="1">
+              <a:rPr lang="en-US" sz="2600" err="1">
                 <a:solidFill>
                   <a:srgbClr val="17202A"/>
                 </a:solidFill>
@@ -15095,7 +15095,7 @@
               <a:t>modelo</a:t>
             </a:r>
             <a:r>
-              <a:rPr lang="en-US" sz="2600" dirty="0">
+              <a:rPr lang="en-US" sz="2600">
                 <a:solidFill>
                   <a:srgbClr val="17202A"/>
                 </a:solidFill>
@@ -15106,7 +15106,7 @@
               <a:t> do React, mas </a:t>
             </a:r>
             <a:r>
-              <a:rPr lang="en-US" sz="2600" dirty="0" err="1">
+              <a:rPr lang="en-US" sz="2600" err="1">
                 <a:solidFill>
                   <a:srgbClr val="17202A"/>
                 </a:solidFill>
@@ -15117,7 +15117,7 @@
               <a:t>em</a:t>
             </a:r>
             <a:r>
-              <a:rPr lang="en-US" sz="2600" dirty="0">
+              <a:rPr lang="en-US" sz="2600">
                 <a:solidFill>
                   <a:srgbClr val="17202A"/>
                 </a:solidFill>
@@ -15128,7 +15128,7 @@
               <a:t> </a:t>
             </a:r>
             <a:r>
-              <a:rPr lang="en-US" sz="2600" dirty="0" err="1">
+              <a:rPr lang="en-US" sz="2600" err="1">
                 <a:solidFill>
                   <a:srgbClr val="17202A"/>
                 </a:solidFill>
@@ -15139,7 +15139,7 @@
               <a:t>vez</a:t>
             </a:r>
             <a:r>
-              <a:rPr lang="en-US" sz="2600" dirty="0">
+              <a:rPr lang="en-US" sz="2600">
                 <a:solidFill>
                   <a:srgbClr val="17202A"/>
                 </a:solidFill>
@@ -15150,7 +15150,7 @@
               <a:t> de </a:t>
             </a:r>
             <a:r>
-              <a:rPr lang="en-US" sz="2600" dirty="0" err="1">
+              <a:rPr lang="en-US" sz="2600" err="1">
                 <a:solidFill>
                   <a:srgbClr val="17202A"/>
                 </a:solidFill>
@@ -15161,7 +15161,7 @@
               <a:t>gerar</a:t>
             </a:r>
             <a:r>
-              <a:rPr lang="en-US" sz="2600" dirty="0">
+              <a:rPr lang="en-US" sz="2600">
                 <a:solidFill>
                   <a:srgbClr val="17202A"/>
                 </a:solidFill>
@@ -15172,7 +15172,7 @@
               <a:t> HTML, </a:t>
             </a:r>
             <a:r>
-              <a:rPr lang="en-US" sz="2600" dirty="0" err="1">
+              <a:rPr lang="en-US" sz="2600" err="1">
                 <a:solidFill>
                   <a:srgbClr val="17202A"/>
                 </a:solidFill>
@@ -15183,7 +15183,7 @@
               <a:t>gera</a:t>
             </a:r>
             <a:r>
-              <a:rPr lang="en-US" sz="2600" dirty="0">
+              <a:rPr lang="en-US" sz="2600">
                 <a:solidFill>
                   <a:srgbClr val="17202A"/>
                 </a:solidFill>
@@ -15194,7 +15194,7 @@
               <a:t> interface </a:t>
             </a:r>
             <a:r>
-              <a:rPr lang="en-US" sz="2600" dirty="0" err="1">
+              <a:rPr lang="en-US" sz="2600" err="1">
                 <a:solidFill>
                   <a:srgbClr val="17202A"/>
                 </a:solidFill>
@@ -15205,7 +15205,7 @@
               <a:t>nativa</a:t>
             </a:r>
             <a:r>
-              <a:rPr lang="en-US" sz="2600" dirty="0">
+              <a:rPr lang="en-US" sz="2600">
                 <a:solidFill>
                   <a:srgbClr val="17202A"/>
                 </a:solidFill>
@@ -15215,7 +15215,7 @@
               </a:rPr>
               <a:t> real de Android/iOS.</a:t>
             </a:r>
-            <a:endParaRPr lang="en-US" sz="2600" b="1" dirty="0">
+            <a:endParaRPr lang="en-US" sz="2600" b="1">
               <a:solidFill>
                 <a:srgbClr val="17202A"/>
               </a:solidFill>
@@ -15233,7 +15233,7 @@
               <a:buFont typeface="+mj-lt"/>
               <a:buAutoNum type="arabicPeriod" startAt="4"/>
             </a:pPr>
-            <a:endParaRPr lang="en-US" sz="2600" b="1" dirty="0"/>
+            <a:endParaRPr lang="en-US" sz="2600" b="1"/>
           </a:p>
         </p:txBody>
       </p:sp>
@@ -15349,7 +15349,7 @@
               <a:buNone/>
             </a:pPr>
             <a:r>
-              <a:rPr lang="en-US" sz="4600" b="1" dirty="0">
+              <a:rPr lang="en-US" sz="4600" b="1">
                 <a:solidFill>
                   <a:srgbClr val="17202A"/>
                 </a:solidFill>
@@ -15359,7 +15359,7 @@
               </a:rPr>
               <a:t>Introdução ao JavaScript básico</a:t>
             </a:r>
-            <a:endParaRPr lang="en-US" sz="4600" dirty="0"/>
+            <a:endParaRPr lang="en-US" sz="4600"/>
           </a:p>
         </p:txBody>
       </p:sp>
@@ -15394,7 +15394,7 @@
               <a:buNone/>
             </a:pPr>
             <a:r>
-              <a:rPr lang="en-US" sz="2400" dirty="0">
+              <a:rPr lang="en-US" sz="2400">
                 <a:solidFill>
                   <a:srgbClr val="5A6472"/>
                 </a:solidFill>
@@ -15404,7 +15404,7 @@
               </a:rPr>
               <a:t>Desenvolvimento Web/Mobile • Análise e Desenvolvimento de Sistemas</a:t>
             </a:r>
-            <a:endParaRPr lang="en-US" sz="2400" dirty="0"/>
+            <a:endParaRPr lang="en-US" sz="2400"/>
           </a:p>
         </p:txBody>
       </p:sp>
@@ -15439,7 +15439,7 @@
               <a:buNone/>
             </a:pPr>
             <a:r>
-              <a:rPr lang="en-US" sz="2400" b="1" dirty="0">
+              <a:rPr lang="en-US" sz="2400" b="1">
                 <a:solidFill>
                   <a:srgbClr val="C2410C"/>
                 </a:solidFill>
@@ -15449,7 +15449,7 @@
               </a:rPr>
               <a:t>Para quem já programa em Python</a:t>
             </a:r>
-            <a:endParaRPr lang="en-US" sz="2400" dirty="0"/>
+            <a:endParaRPr lang="en-US" sz="2400"/>
           </a:p>
         </p:txBody>
       </p:sp>
@@ -15524,7 +15524,7 @@
               <a:buNone/>
             </a:pPr>
             <a:r>
-              <a:rPr lang="en-US" sz="3400" b="1" dirty="0">
+              <a:rPr lang="en-US" sz="3400" b="1">
                 <a:solidFill>
                   <a:srgbClr val="17202A"/>
                 </a:solidFill>
@@ -15534,7 +15534,7 @@
               </a:rPr>
               <a:t>Roteiro da aula</a:t>
             </a:r>
-            <a:endParaRPr lang="en-US" sz="3400" dirty="0"/>
+            <a:endParaRPr lang="en-US" sz="3400"/>
           </a:p>
         </p:txBody>
       </p:sp>
@@ -15614,7 +15614,7 @@
               <a:buChar char="•"/>
             </a:pPr>
             <a:r>
-              <a:rPr lang="en-US" sz="2600" dirty="0">
+              <a:rPr lang="en-US" sz="2600">
                 <a:solidFill>
                   <a:srgbClr val="17202A"/>
                 </a:solidFill>
@@ -15624,7 +15624,7 @@
               </a:rPr>
               <a:t>O que é JavaScript e onde ele roda</a:t>
             </a:r>
-            <a:endParaRPr lang="en-US" sz="2600" dirty="0"/>
+            <a:endParaRPr lang="en-US" sz="2600"/>
           </a:p>
           <a:p>
             <a:pPr marL="342900" indent="-342900">
@@ -15635,7 +15635,7 @@
               <a:buChar char="•"/>
             </a:pPr>
             <a:r>
-              <a:rPr lang="en-US" sz="2600" dirty="0">
+              <a:rPr lang="en-US" sz="2600">
                 <a:solidFill>
                   <a:srgbClr val="17202A"/>
                 </a:solidFill>
@@ -15645,7 +15645,7 @@
               </a:rPr>
               <a:t>Sintaxe básica: chaves, ponto e vírgula e comentários</a:t>
             </a:r>
-            <a:endParaRPr lang="en-US" sz="2600" dirty="0"/>
+            <a:endParaRPr lang="en-US" sz="2600"/>
           </a:p>
           <a:p>
             <a:pPr marL="342900" indent="-342900">
@@ -15656,7 +15656,7 @@
               <a:buChar char="•"/>
             </a:pPr>
             <a:r>
-              <a:rPr lang="en-US" sz="2600" dirty="0">
+              <a:rPr lang="en-US" sz="2600">
                 <a:solidFill>
                   <a:srgbClr val="17202A"/>
                 </a:solidFill>
@@ -15666,7 +15666,7 @@
               </a:rPr>
               <a:t>Variáveis: let, const e var</a:t>
             </a:r>
-            <a:endParaRPr lang="en-US" sz="2600" dirty="0"/>
+            <a:endParaRPr lang="en-US" sz="2600"/>
           </a:p>
           <a:p>
             <a:pPr marL="342900" indent="-342900">
@@ -15677,7 +15677,7 @@
               <a:buChar char="•"/>
             </a:pPr>
             <a:r>
-              <a:rPr lang="en-US" sz="2600" dirty="0">
+              <a:rPr lang="en-US" sz="2600">
                 <a:solidFill>
                   <a:srgbClr val="17202A"/>
                 </a:solidFill>
@@ -15687,7 +15687,7 @@
               </a:rPr>
               <a:t>Declarar x inicializar e o valor undefined</a:t>
             </a:r>
-            <a:endParaRPr lang="en-US" sz="2600" dirty="0"/>
+            <a:endParaRPr lang="en-US" sz="2600"/>
           </a:p>
           <a:p>
             <a:pPr marL="342900" indent="-342900">
@@ -15698,7 +15698,7 @@
               <a:buChar char="•"/>
             </a:pPr>
             <a:r>
-              <a:rPr lang="en-US" sz="2600" dirty="0">
+              <a:rPr lang="en-US" sz="2600">
                 <a:solidFill>
                   <a:srgbClr val="17202A"/>
                 </a:solidFill>
@@ -15708,7 +15708,7 @@
               </a:rPr>
               <a:t>Tipos primitivos, arrays e objetos</a:t>
             </a:r>
-            <a:endParaRPr lang="en-US" sz="2600" dirty="0"/>
+            <a:endParaRPr lang="en-US" sz="2600"/>
           </a:p>
           <a:p>
             <a:pPr marL="342900" indent="-342900">
@@ -15719,7 +15719,7 @@
               <a:buChar char="•"/>
             </a:pPr>
             <a:r>
-              <a:rPr lang="en-US" sz="2600" dirty="0">
+              <a:rPr lang="en-US" sz="2600">
                 <a:solidFill>
                   <a:srgbClr val="17202A"/>
                 </a:solidFill>
@@ -15729,7 +15729,7 @@
               </a:rPr>
               <a:t>typeof, template literals e console.log</a:t>
             </a:r>
-            <a:endParaRPr lang="en-US" sz="2600" dirty="0"/>
+            <a:endParaRPr lang="en-US" sz="2600"/>
           </a:p>
         </p:txBody>
       </p:sp>
@@ -15792,7 +15792,7 @@
               <a:buNone/>
             </a:pPr>
             <a:r>
-              <a:rPr lang="en-US" sz="3400" b="1" dirty="0">
+              <a:rPr lang="en-US" sz="3400" b="1">
                 <a:solidFill>
                   <a:srgbClr val="17202A"/>
                 </a:solidFill>
@@ -15802,7 +15802,7 @@
               </a:rPr>
               <a:t>O que é JavaScript?</a:t>
             </a:r>
-            <a:endParaRPr lang="en-US" sz="3400" dirty="0"/>
+            <a:endParaRPr lang="en-US" sz="3400"/>
           </a:p>
         </p:txBody>
       </p:sp>
@@ -15869,7 +15869,7 @@
               <a:buNone/>
             </a:pPr>
             <a:r>
-              <a:rPr lang="en-US" sz="3200" dirty="0">
+              <a:rPr lang="en-US" sz="3200">
                 <a:solidFill>
                   <a:srgbClr val="17202A"/>
                 </a:solidFill>
@@ -15879,7 +15879,7 @@
               </a:rPr>
               <a:t>JavaScript é uma linguagem interpretada, dinâmica e de tipagem fraca, criada para dar comportamento às páginas web — e hoje usada também fora do navegador.</a:t>
             </a:r>
-            <a:endParaRPr lang="en-US" sz="3200" dirty="0"/>
+            <a:endParaRPr lang="en-US" sz="3200"/>
           </a:p>
         </p:txBody>
       </p:sp>
@@ -15937,7 +15937,7 @@
               <a:buNone/>
             </a:pPr>
             <a:r>
-              <a:rPr lang="en-US" sz="3400" b="1" dirty="0">
+              <a:rPr lang="en-US" sz="3400" b="1">
                 <a:solidFill>
                   <a:srgbClr val="17202A"/>
                 </a:solidFill>
@@ -15947,7 +15947,7 @@
               </a:rPr>
               <a:t>Onde o JavaScript roda</a:t>
             </a:r>
-            <a:endParaRPr lang="en-US" sz="3400" dirty="0"/>
+            <a:endParaRPr lang="en-US" sz="3400"/>
           </a:p>
         </p:txBody>
       </p:sp>
@@ -16018,7 +16018,7 @@
               <a:buChar char="•"/>
             </a:pPr>
             <a:r>
-              <a:rPr lang="en-US" sz="2600" dirty="0">
+              <a:rPr lang="en-US" sz="2600">
                 <a:solidFill>
                   <a:srgbClr val="17202A"/>
                 </a:solidFill>
@@ -16028,7 +16028,7 @@
               </a:rPr>
               <a:t>No navegador: Chrome, Firefox, Safari executam JS direto na página</a:t>
             </a:r>
-            <a:endParaRPr lang="en-US" sz="2600" dirty="0"/>
+            <a:endParaRPr lang="en-US" sz="2600"/>
           </a:p>
           <a:p>
             <a:pPr marL="342900" indent="-342900">
@@ -16039,7 +16039,7 @@
               <a:buChar char="•"/>
             </a:pPr>
             <a:r>
-              <a:rPr lang="en-US" sz="2600" dirty="0">
+              <a:rPr lang="en-US" sz="2600">
                 <a:solidFill>
                   <a:srgbClr val="17202A"/>
                 </a:solidFill>
@@ -16049,7 +16049,7 @@
               </a:rPr>
               <a:t>No servidor: Node.js roda JS fora do navegador, como o interpretador do Python</a:t>
             </a:r>
-            <a:endParaRPr lang="en-US" sz="2600" dirty="0"/>
+            <a:endParaRPr lang="en-US" sz="2600"/>
           </a:p>
           <a:p>
             <a:pPr marL="342900" indent="-342900">
@@ -16060,7 +16060,7 @@
               <a:buChar char="•"/>
             </a:pPr>
             <a:r>
-              <a:rPr lang="en-US" sz="2600" dirty="0">
+              <a:rPr lang="en-US" sz="2600">
                 <a:solidFill>
                   <a:srgbClr val="17202A"/>
                 </a:solidFill>
@@ -16070,7 +16070,7 @@
               </a:rPr>
               <a:t>Em apps móveis e desktop: React Native, Electron</a:t>
             </a:r>
-            <a:endParaRPr lang="en-US" sz="2600" dirty="0"/>
+            <a:endParaRPr lang="en-US" sz="2600"/>
           </a:p>
         </p:txBody>
       </p:sp>
@@ -16099,7 +16099,7 @@
               <a:buNone/>
             </a:pPr>
             <a:r>
-              <a:rPr lang="en-US" sz="2000" i="1" dirty="0">
+              <a:rPr lang="en-US" sz="2000" i="1">
                 <a:solidFill>
                   <a:srgbClr val="5A6472"/>
                 </a:solidFill>
@@ -16109,7 +16109,7 @@
               </a:rPr>
               <a:t>Mesma linguagem, ambientes diferentes — o que muda são as bibliotecas disponíveis.</a:t>
             </a:r>
-            <a:endParaRPr lang="en-US" sz="2000" dirty="0"/>
+            <a:endParaRPr lang="en-US" sz="2000"/>
           </a:p>
         </p:txBody>
       </p:sp>
@@ -16167,7 +16167,7 @@
               <a:buNone/>
             </a:pPr>
             <a:r>
-              <a:rPr lang="en-US" sz="3400" b="1" dirty="0">
+              <a:rPr lang="en-US" sz="3400" b="1">
                 <a:solidFill>
                   <a:srgbClr val="17202A"/>
                 </a:solidFill>
@@ -16177,7 +16177,7 @@
               </a:rPr>
               <a:t>Como executamos o código</a:t>
             </a:r>
-            <a:endParaRPr lang="en-US" sz="3400" dirty="0"/>
+            <a:endParaRPr lang="en-US" sz="3400"/>
           </a:p>
         </p:txBody>
       </p:sp>
@@ -16244,7 +16244,7 @@
               <a:buNone/>
             </a:pPr>
             <a:r>
-              <a:rPr lang="en-US" sz="2200" b="1" dirty="0">
+              <a:rPr lang="en-US" sz="2200" b="1">
                 <a:solidFill>
                   <a:srgbClr val="C2410C"/>
                 </a:solidFill>
@@ -16254,7 +16254,7 @@
               </a:rPr>
               <a:t>JavaScript</a:t>
             </a:r>
-            <a:endParaRPr lang="en-US" sz="2200" dirty="0"/>
+            <a:endParaRPr lang="en-US" sz="2200"/>
           </a:p>
         </p:txBody>
       </p:sp>
@@ -16283,7 +16283,7 @@
               <a:buNone/>
             </a:pPr>
             <a:r>
-              <a:rPr lang="en-US" sz="2200" b="1" dirty="0">
+              <a:rPr lang="en-US" sz="2200" b="1">
                 <a:solidFill>
                   <a:srgbClr val="5A6472"/>
                 </a:solidFill>
@@ -16293,7 +16293,7 @@
               </a:rPr>
               <a:t>Python</a:t>
             </a:r>
-            <a:endParaRPr lang="en-US" sz="2200" dirty="0"/>
+            <a:endParaRPr lang="en-US" sz="2200"/>
           </a:p>
         </p:txBody>
       </p:sp>
@@ -16363,7 +16363,7 @@
               <a:buNone/>
             </a:pPr>
             <a:r>
-              <a:rPr lang="en-US" sz="1800" i="1" dirty="0">
+              <a:rPr lang="en-US" sz="1800" i="1">
                 <a:solidFill>
                   <a:srgbClr val="5A6472"/>
                 </a:solidFill>
@@ -16373,7 +16373,7 @@
               </a:rPr>
               <a:t>// arquivo: script.js</a:t>
             </a:r>
-            <a:endParaRPr lang="en-US" sz="1800" dirty="0"/>
+            <a:endParaRPr lang="en-US" sz="1800"/>
           </a:p>
           <a:p>
             <a:pPr marL="0" indent="0" algn="l">
@@ -16383,7 +16383,7 @@
               <a:buNone/>
             </a:pPr>
             <a:r>
-              <a:rPr lang="en-US" sz="1800" b="1" dirty="0">
+              <a:rPr lang="en-US" sz="1800" b="1">
                 <a:solidFill>
                   <a:srgbClr val="C2410C"/>
                 </a:solidFill>
@@ -16394,7 +16394,7 @@
               <a:t>console</a:t>
             </a:r>
             <a:r>
-              <a:rPr lang="en-US" sz="1800" dirty="0">
+              <a:rPr lang="en-US" sz="1800">
                 <a:solidFill>
                   <a:srgbClr val="17202A"/>
                 </a:solidFill>
@@ -16405,7 +16405,7 @@
               <a:t>.</a:t>
             </a:r>
             <a:r>
-              <a:rPr lang="en-US" sz="1800" b="1" dirty="0">
+              <a:rPr lang="en-US" sz="1800" b="1">
                 <a:solidFill>
                   <a:srgbClr val="C2410C"/>
                 </a:solidFill>
@@ -16416,7 +16416,7 @@
               <a:t>log</a:t>
             </a:r>
             <a:r>
-              <a:rPr lang="en-US" sz="1800" dirty="0">
+              <a:rPr lang="en-US" sz="1800">
                 <a:solidFill>
                   <a:srgbClr val="17202A"/>
                 </a:solidFill>
@@ -16426,7 +16426,7 @@
               </a:rPr>
               <a:t>("Olá, turma!");</a:t>
             </a:r>
-            <a:endParaRPr lang="en-US" sz="1800" dirty="0"/>
+            <a:endParaRPr lang="en-US" sz="1800"/>
           </a:p>
           <a:p>
             <a:pPr marL="0" indent="0" algn="l">
@@ -16435,7 +16435,7 @@
               </a:lnSpc>
               <a:buNone/>
             </a:pPr>
-            <a:endParaRPr lang="en-US" sz="1800" dirty="0"/>
+            <a:endParaRPr lang="en-US" sz="1800"/>
           </a:p>
           <a:p>
             <a:pPr marL="0" indent="0" algn="l">
@@ -16445,7 +16445,7 @@
               <a:buNone/>
             </a:pPr>
             <a:r>
-              <a:rPr lang="en-US" sz="1800" i="1" dirty="0">
+              <a:rPr lang="en-US" sz="1800" i="1">
                 <a:solidFill>
                   <a:srgbClr val="5A6472"/>
                 </a:solidFill>
@@ -16455,7 +16455,7 @@
               </a:rPr>
               <a:t>// no terminal:</a:t>
             </a:r>
-            <a:endParaRPr lang="en-US" sz="1800" dirty="0"/>
+            <a:endParaRPr lang="en-US" sz="1800"/>
           </a:p>
           <a:p>
             <a:pPr marL="0" indent="0" algn="l">
@@ -16465,7 +16465,7 @@
               <a:buNone/>
             </a:pPr>
             <a:r>
-              <a:rPr lang="en-US" sz="1800" i="1" dirty="0">
+              <a:rPr lang="en-US" sz="1800" i="1">
                 <a:solidFill>
                   <a:srgbClr val="5A6472"/>
                 </a:solidFill>
@@ -16475,7 +16475,7 @@
               </a:rPr>
               <a:t>// node script.js</a:t>
             </a:r>
-            <a:endParaRPr lang="en-US" sz="1800" dirty="0"/>
+            <a:endParaRPr lang="en-US" sz="1800"/>
           </a:p>
         </p:txBody>
       </p:sp>
@@ -16545,7 +16545,7 @@
               <a:buNone/>
             </a:pPr>
             <a:r>
-              <a:rPr lang="en-US" sz="1800" i="1" dirty="0">
+              <a:rPr lang="en-US" sz="1800" i="1">
                 <a:solidFill>
                   <a:srgbClr val="5A6472"/>
                 </a:solidFill>
@@ -16555,7 +16555,7 @@
               </a:rPr>
               <a:t># arquivo: script.py</a:t>
             </a:r>
-            <a:endParaRPr lang="en-US" sz="1800" dirty="0"/>
+            <a:endParaRPr lang="en-US" sz="1800"/>
           </a:p>
           <a:p>
             <a:pPr marL="0" indent="0" algn="l">
@@ -16565,7 +16565,7 @@
               <a:buNone/>
             </a:pPr>
             <a:r>
-              <a:rPr lang="en-US" sz="1800" b="1" dirty="0">
+              <a:rPr lang="en-US" sz="1800" b="1">
                 <a:solidFill>
                   <a:srgbClr val="C2410C"/>
                 </a:solidFill>
@@ -16576,7 +16576,7 @@
               <a:t>print</a:t>
             </a:r>
             <a:r>
-              <a:rPr lang="en-US" sz="1800" dirty="0">
+              <a:rPr lang="en-US" sz="1800">
                 <a:solidFill>
                   <a:srgbClr val="17202A"/>
                 </a:solidFill>
@@ -16586,7 +16586,7 @@
               </a:rPr>
               <a:t>("Olá, turma!")</a:t>
             </a:r>
-            <a:endParaRPr lang="en-US" sz="1800" dirty="0"/>
+            <a:endParaRPr lang="en-US" sz="1800"/>
           </a:p>
           <a:p>
             <a:pPr marL="0" indent="0" algn="l">
@@ -16595,7 +16595,7 @@
               </a:lnSpc>
               <a:buNone/>
             </a:pPr>
-            <a:endParaRPr lang="en-US" sz="1800" dirty="0"/>
+            <a:endParaRPr lang="en-US" sz="1800"/>
           </a:p>
           <a:p>
             <a:pPr marL="0" indent="0" algn="l">
@@ -16605,7 +16605,7 @@
               <a:buNone/>
             </a:pPr>
             <a:r>
-              <a:rPr lang="en-US" sz="1800" i="1" dirty="0">
+              <a:rPr lang="en-US" sz="1800" i="1">
                 <a:solidFill>
                   <a:srgbClr val="5A6472"/>
                 </a:solidFill>
@@ -16615,7 +16615,7 @@
               </a:rPr>
               <a:t># no terminal:</a:t>
             </a:r>
-            <a:endParaRPr lang="en-US" sz="1800" dirty="0"/>
+            <a:endParaRPr lang="en-US" sz="1800"/>
           </a:p>
           <a:p>
             <a:pPr marL="0" indent="0" algn="l">
@@ -16625,7 +16625,7 @@
               <a:buNone/>
             </a:pPr>
             <a:r>
-              <a:rPr lang="en-US" sz="1800" i="1" dirty="0">
+              <a:rPr lang="en-US" sz="1800" i="1">
                 <a:solidFill>
                   <a:srgbClr val="5A6472"/>
                 </a:solidFill>
@@ -16635,7 +16635,7 @@
               </a:rPr>
               <a:t># python script.py</a:t>
             </a:r>
-            <a:endParaRPr lang="en-US" sz="1800" dirty="0"/>
+            <a:endParaRPr lang="en-US" sz="1800"/>
           </a:p>
         </p:txBody>
       </p:sp>
@@ -16664,7 +16664,7 @@
               <a:buNone/>
             </a:pPr>
             <a:r>
-              <a:rPr lang="en-US" sz="1900" i="1" dirty="0">
+              <a:rPr lang="en-US" sz="1900" i="1">
                 <a:solidFill>
                   <a:srgbClr val="5A6472"/>
                 </a:solidFill>
@@ -16674,7 +16674,7 @@
               </a:rPr>
               <a:t>O fluxo é o mesmo que vocês já conhecem: escrever o arquivo e mandar o interpretador executar.</a:t>
             </a:r>
-            <a:endParaRPr lang="en-US" sz="1900" dirty="0"/>
+            <a:endParaRPr lang="en-US" sz="1900"/>
           </a:p>
         </p:txBody>
       </p:sp>
@@ -17277,18 +17277,51 @@
 </file>
 
 <file path=customXml/item1.xml><?xml version="1.0" encoding="utf-8"?>
-<ct:contentTypeSchema xmlns:ct="http://schemas.microsoft.com/office/2006/metadata/contentType" xmlns:ma="http://schemas.microsoft.com/office/2006/metadata/properties/metaAttributes" ct:_="" ma:_="" ma:contentTypeName="Documento" ma:contentTypeID="0x01010067AF940A41E02B42AE989720C36A0380" ma:contentTypeVersion="0" ma:contentTypeDescription="Crie um novo documento." ma:contentTypeScope="" ma:versionID="2ca66df9725b81028f0c9fff17035b44">
-  <xsd:schema xmlns:xsd="http://www.w3.org/2001/XMLSchema" xmlns:xs="http://www.w3.org/2001/XMLSchema" xmlns:p="http://schemas.microsoft.com/office/2006/metadata/properties" targetNamespace="http://schemas.microsoft.com/office/2006/metadata/properties" ma:root="true" ma:fieldsID="059dbc040a3f85ddd093e31795c9c73e">
+<?mso-contentType ?>
+<FormTemplates xmlns="http://schemas.microsoft.com/sharepoint/v3/contenttype/forms">
+  <Display>DocumentLibraryForm</Display>
+  <Edit>DocumentLibraryForm</Edit>
+  <New>DocumentLibraryForm</New>
+</FormTemplates>
+</file>
+
+<file path=customXml/item2.xml><?xml version="1.0" encoding="utf-8"?>
+<ct:contentTypeSchema xmlns:ct="http://schemas.microsoft.com/office/2006/metadata/contentType" xmlns:ma="http://schemas.microsoft.com/office/2006/metadata/properties/metaAttributes" ct:_="" ma:_="" ma:contentTypeName="Document" ma:contentTypeID="0x01010067AF940A41E02B42AE989720C36A0380" ma:contentTypeVersion="3" ma:contentTypeDescription="Create a new document." ma:contentTypeScope="" ma:versionID="84c8fa9b024ab4442b32982a9ff156a6">
+  <xsd:schema xmlns:xsd="http://www.w3.org/2001/XMLSchema" xmlns:xs="http://www.w3.org/2001/XMLSchema" xmlns:p="http://schemas.microsoft.com/office/2006/metadata/properties" xmlns:ns2="dd5b9d87-8382-4c7f-9963-6784ff2ca28b" targetNamespace="http://schemas.microsoft.com/office/2006/metadata/properties" ma:root="true" ma:fieldsID="a399dde5afd487ee214c0235c88ee8a7" ns2:_="">
+    <xsd:import namespace="dd5b9d87-8382-4c7f-9963-6784ff2ca28b"/>
     <xsd:element name="properties">
       <xsd:complexType>
         <xsd:sequence>
           <xsd:element name="documentManagement">
             <xsd:complexType>
-              <xsd:all/>
+              <xsd:all>
+                <xsd:element ref="ns2:MediaServiceMetadata" minOccurs="0"/>
+                <xsd:element ref="ns2:MediaServiceFastMetadata" minOccurs="0"/>
+                <xsd:element ref="ns2:MediaServiceSearchProperties" minOccurs="0"/>
+              </xsd:all>
             </xsd:complexType>
           </xsd:element>
         </xsd:sequence>
       </xsd:complexType>
+    </xsd:element>
+  </xsd:schema>
+  <xsd:schema xmlns:xsd="http://www.w3.org/2001/XMLSchema" xmlns:xs="http://www.w3.org/2001/XMLSchema" xmlns:dms="http://schemas.microsoft.com/office/2006/documentManagement/types" xmlns:pc="http://schemas.microsoft.com/office/infopath/2007/PartnerControls" targetNamespace="dd5b9d87-8382-4c7f-9963-6784ff2ca28b" elementFormDefault="qualified">
+    <xsd:import namespace="http://schemas.microsoft.com/office/2006/documentManagement/types"/>
+    <xsd:import namespace="http://schemas.microsoft.com/office/infopath/2007/PartnerControls"/>
+    <xsd:element name="MediaServiceMetadata" ma:index="8" nillable="true" ma:displayName="MediaServiceMetadata" ma:hidden="true" ma:internalName="MediaServiceMetadata" ma:readOnly="true">
+      <xsd:simpleType>
+        <xsd:restriction base="dms:Note"/>
+      </xsd:simpleType>
+    </xsd:element>
+    <xsd:element name="MediaServiceFastMetadata" ma:index="9" nillable="true" ma:displayName="MediaServiceFastMetadata" ma:hidden="true" ma:internalName="MediaServiceFastMetadata" ma:readOnly="true">
+      <xsd:simpleType>
+        <xsd:restriction base="dms:Note"/>
+      </xsd:simpleType>
+    </xsd:element>
+    <xsd:element name="MediaServiceSearchProperties" ma:index="10" nillable="true" ma:displayName="MediaServiceSearchProperties" ma:hidden="true" ma:internalName="MediaServiceSearchProperties" ma:readOnly="true">
+      <xsd:simpleType>
+        <xsd:restriction base="dms:Note"/>
+      </xsd:simpleType>
     </xsd:element>
   </xsd:schema>
   <xsd:schema xmlns="http://schemas.openxmlformats.org/package/2006/metadata/core-properties" xmlns:xsd="http://www.w3.org/2001/XMLSchema" xmlns:xsi="http://www.w3.org/2001/XMLSchema-instance" xmlns:dc="http://purl.org/dc/elements/1.1/" xmlns:dcterms="http://purl.org/dc/terms/" xmlns:odoc="http://schemas.microsoft.com/internal/obd" targetNamespace="http://schemas.openxmlformats.org/package/2006/metadata/core-properties" elementFormDefault="qualified" attributeFormDefault="unqualified" blockDefault="#all">
@@ -17300,8 +17333,8 @@
         <xsd:element ref="dc:creator" minOccurs="0" maxOccurs="1"/>
         <xsd:element ref="dcterms:created" minOccurs="0" maxOccurs="1"/>
         <xsd:element ref="dc:identifier" minOccurs="0" maxOccurs="1"/>
-        <xsd:element name="contentType" minOccurs="0" maxOccurs="1" type="xsd:string" ma:index="0" ma:displayName="Tipo de Conteúdo"/>
-        <xsd:element ref="dc:title" minOccurs="0" maxOccurs="1" ma:index="4" ma:displayName="Título"/>
+        <xsd:element name="contentType" minOccurs="0" maxOccurs="1" type="xsd:string" ma:index="0" ma:displayName="Content Type"/>
+        <xsd:element ref="dc:title" minOccurs="0" maxOccurs="1" ma:index="4" ma:displayName="Title"/>
         <xsd:element ref="dc:subject" minOccurs="0" maxOccurs="1"/>
         <xsd:element ref="dc:description" minOccurs="0" maxOccurs="1"/>
         <xsd:element name="keywords" minOccurs="0" maxOccurs="1" type="xsd:string"/>
@@ -17390,15 +17423,6 @@
 </ct:contentTypeSchema>
 </file>
 
-<file path=customXml/item2.xml><?xml version="1.0" encoding="utf-8"?>
-<?mso-contentType ?>
-<FormTemplates xmlns="http://schemas.microsoft.com/sharepoint/v3/contenttype/forms">
-  <Display>DocumentLibraryForm</Display>
-  <Edit>DocumentLibraryForm</Edit>
-  <New>DocumentLibraryForm</New>
-</FormTemplates>
-</file>
-
 <file path=customXml/item3.xml><?xml version="1.0" encoding="utf-8"?>
 <p:properties xmlns:p="http://schemas.microsoft.com/office/2006/metadata/properties" xmlns:xsi="http://www.w3.org/2001/XMLSchema-instance" xmlns:pc="http://schemas.microsoft.com/office/infopath/2007/PartnerControls">
   <documentManagement/>
@@ -17406,13 +17430,22 @@
 </file>
 
 <file path=customXml/itemProps1.xml><?xml version="1.0" encoding="utf-8"?>
-<ds:datastoreItem xmlns:ds="http://schemas.openxmlformats.org/officeDocument/2006/customXml" ds:itemID="{7E3F36FF-2AC9-43C0-B12B-533339445D4E}"/>
+<ds:datastoreItem xmlns:ds="http://schemas.openxmlformats.org/officeDocument/2006/customXml" ds:itemID="{9A0C2C37-5EEF-4E91-B134-72CDA5C478B3}">
+  <ds:schemaRefs>
+    <ds:schemaRef ds:uri="http://schemas.microsoft.com/sharepoint/v3/contenttype/forms"/>
+  </ds:schemaRefs>
+</ds:datastoreItem>
 </file>
 
 <file path=customXml/itemProps2.xml><?xml version="1.0" encoding="utf-8"?>
-<ds:datastoreItem xmlns:ds="http://schemas.openxmlformats.org/officeDocument/2006/customXml" ds:itemID="{9A0C2C37-5EEF-4E91-B134-72CDA5C478B3}"/>
+<ds:datastoreItem xmlns:ds="http://schemas.openxmlformats.org/officeDocument/2006/customXml" ds:itemID="{DC379282-9888-47C9-A84C-145D715DA634}"/>
 </file>
 
 <file path=customXml/itemProps3.xml><?xml version="1.0" encoding="utf-8"?>
-<ds:datastoreItem xmlns:ds="http://schemas.openxmlformats.org/officeDocument/2006/customXml" ds:itemID="{A3FEB676-DA8C-47FB-8784-B696C07DDF8B}"/>
+<ds:datastoreItem xmlns:ds="http://schemas.openxmlformats.org/officeDocument/2006/customXml" ds:itemID="{A3FEB676-DA8C-47FB-8784-B696C07DDF8B}">
+  <ds:schemaRefs>
+    <ds:schemaRef ds:uri="http://schemas.microsoft.com/office/2006/metadata/properties"/>
+    <ds:schemaRef ds:uri="http://schemas.microsoft.com/office/infopath/2007/PartnerControls"/>
+  </ds:schemaRefs>
+</ds:datastoreItem>
 </file>